--- a/doc/使用說明(中文).pptx
+++ b/doc/使用說明(中文).pptx
@@ -218,7 +218,7 @@
           <a:p>
             <a:fld id="{2297D84D-3581-4C3F-BAAF-6FA71816E76E}" type="datetimeFigureOut">
               <a:rPr lang="zh-TW" altLang="en-US" smtClean="0"/>
-              <a:t>2026/3/12</a:t>
+              <a:t>2026/3/15</a:t>
             </a:fld>
             <a:endParaRPr lang="zh-TW" altLang="en-US"/>
           </a:p>
@@ -8211,6 +8211,54 @@
               </a:rPr>
               <a:t>系統區分四個權限等級，確保資料安全且操作介面簡潔。等級數字越小，權限越高。</a:t>
             </a:r>
+            <a:endParaRPr lang="en-US" altLang="zh-TW" sz="1800" dirty="0">
+              <a:solidFill>
+                <a:srgbClr val="002060"/>
+              </a:solidFill>
+            </a:endParaRPr>
+          </a:p>
+          <a:p>
+            <a:pPr marL="285750" indent="-285750" algn="l">
+              <a:buFont typeface="Wingdings" panose="05000000000000000000" pitchFamily="2" charset="2"/>
+              <a:buChar char="u"/>
+            </a:pPr>
+            <a:r>
+              <a:rPr lang="zh-TW" altLang="en-US" sz="1800" dirty="0">
+                <a:solidFill>
+                  <a:srgbClr val="002060"/>
+                </a:solidFill>
+              </a:rPr>
+              <a:t>系統有預設的管理員使用者名稱</a:t>
+            </a:r>
+            <a:r>
+              <a:rPr lang="en-US" altLang="zh-TW" sz="1800" dirty="0">
+                <a:solidFill>
+                  <a:srgbClr val="002060"/>
+                </a:solidFill>
+              </a:rPr>
+              <a:t>(admin)</a:t>
+            </a:r>
+            <a:r>
+              <a:rPr lang="zh-TW" altLang="en-US" sz="1800" dirty="0">
+                <a:solidFill>
+                  <a:srgbClr val="002060"/>
+                </a:solidFill>
+              </a:rPr>
+              <a:t>與密碼</a:t>
+            </a:r>
+            <a:r>
+              <a:rPr lang="en-US" altLang="zh-TW" sz="1800" dirty="0">
+                <a:solidFill>
+                  <a:srgbClr val="002060"/>
+                </a:solidFill>
+              </a:rPr>
+              <a:t>(admin)</a:t>
+            </a:r>
+            <a:endParaRPr lang="zh-TW" altLang="en-US" sz="1800" dirty="0">
+              <a:solidFill>
+                <a:srgbClr val="002060"/>
+              </a:solidFill>
+            </a:endParaRPr>
           </a:p>
         </p:txBody>
       </p:sp>

--- a/doc/使用說明(中文).pptx
+++ b/doc/使用說明(中文).pptx
@@ -5,19 +5,22 @@
     <p:sldMasterId id="2147483661" r:id="rId1"/>
   </p:sldMasterIdLst>
   <p:notesMasterIdLst>
-    <p:notesMasterId r:id="rId12"/>
+    <p:notesMasterId r:id="rId15"/>
   </p:notesMasterIdLst>
   <p:sldIdLst>
     <p:sldId id="320" r:id="rId2"/>
     <p:sldId id="2147375043" r:id="rId3"/>
-    <p:sldId id="2147375044" r:id="rId4"/>
-    <p:sldId id="2147375045" r:id="rId5"/>
-    <p:sldId id="2147375047" r:id="rId6"/>
-    <p:sldId id="2147375046" r:id="rId7"/>
-    <p:sldId id="2147375054" r:id="rId8"/>
-    <p:sldId id="2147375048" r:id="rId9"/>
-    <p:sldId id="2147375055" r:id="rId10"/>
-    <p:sldId id="3019" r:id="rId11"/>
+    <p:sldId id="2147375057" r:id="rId4"/>
+    <p:sldId id="2147375058" r:id="rId5"/>
+    <p:sldId id="2147375044" r:id="rId6"/>
+    <p:sldId id="2147375045" r:id="rId7"/>
+    <p:sldId id="2147375047" r:id="rId8"/>
+    <p:sldId id="2147375046" r:id="rId9"/>
+    <p:sldId id="2147375056" r:id="rId10"/>
+    <p:sldId id="2147375054" r:id="rId11"/>
+    <p:sldId id="2147375048" r:id="rId12"/>
+    <p:sldId id="2147375055" r:id="rId13"/>
+    <p:sldId id="3019" r:id="rId14"/>
   </p:sldIdLst>
   <p:sldSz cx="12192000" cy="6858000"/>
   <p:notesSz cx="6858000" cy="9144000"/>
@@ -218,7 +221,7 @@
           <a:p>
             <a:fld id="{2297D84D-3581-4C3F-BAAF-6FA71816E76E}" type="datetimeFigureOut">
               <a:rPr lang="zh-TW" altLang="en-US" smtClean="0"/>
-              <a:t>2026/3/15</a:t>
+              <a:t>2026/3/16</a:t>
             </a:fld>
             <a:endParaRPr lang="zh-TW" altLang="en-US"/>
           </a:p>
@@ -636,7 +639,707 @@
 </p:notes>
 </file>
 
+<file path=ppt/notesSlides/notesSlide10.xml><?xml version="1.0" encoding="utf-8"?>
+<p:notes xmlns:a="http://schemas.openxmlformats.org/drawingml/2006/main" xmlns:r="http://schemas.openxmlformats.org/officeDocument/2006/relationships" xmlns:p="http://schemas.openxmlformats.org/presentationml/2006/main">
+  <p:cSld>
+    <p:spTree>
+      <p:nvGrpSpPr>
+        <p:cNvPr id="1" name="">
+          <a:extLst>
+            <a:ext uri="{FF2B5EF4-FFF2-40B4-BE49-F238E27FC236}">
+              <a16:creationId xmlns:a16="http://schemas.microsoft.com/office/drawing/2014/main" id="{7411B0E2-9DAD-B6EE-90DC-405AE9E420E8}"/>
+            </a:ext>
+          </a:extLst>
+        </p:cNvPr>
+        <p:cNvGrpSpPr/>
+        <p:nvPr/>
+      </p:nvGrpSpPr>
+      <p:grpSpPr>
+        <a:xfrm>
+          <a:off x="0" y="0"/>
+          <a:ext cx="0" cy="0"/>
+          <a:chOff x="0" y="0"/>
+          <a:chExt cx="0" cy="0"/>
+        </a:xfrm>
+      </p:grpSpPr>
+      <p:sp>
+        <p:nvSpPr>
+          <p:cNvPr id="2" name="投影片圖像版面配置區 1">
+            <a:extLst>
+              <a:ext uri="{FF2B5EF4-FFF2-40B4-BE49-F238E27FC236}">
+                <a16:creationId xmlns:a16="http://schemas.microsoft.com/office/drawing/2014/main" id="{9B198BAC-021C-C0B8-F7CE-57CC31AD206B}"/>
+              </a:ext>
+            </a:extLst>
+          </p:cNvPr>
+          <p:cNvSpPr>
+            <a:spLocks noGrp="1" noRot="1" noChangeAspect="1"/>
+          </p:cNvSpPr>
+          <p:nvPr>
+            <p:ph type="sldImg"/>
+          </p:nvPr>
+        </p:nvSpPr>
+        <p:spPr/>
+      </p:sp>
+      <p:sp>
+        <p:nvSpPr>
+          <p:cNvPr id="3" name="備忘稿版面配置區 2">
+            <a:extLst>
+              <a:ext uri="{FF2B5EF4-FFF2-40B4-BE49-F238E27FC236}">
+                <a16:creationId xmlns:a16="http://schemas.microsoft.com/office/drawing/2014/main" id="{BD6B908B-EB18-6544-A5D3-A637663E432D}"/>
+              </a:ext>
+            </a:extLst>
+          </p:cNvPr>
+          <p:cNvSpPr>
+            <a:spLocks noGrp="1"/>
+          </p:cNvSpPr>
+          <p:nvPr>
+            <p:ph type="body" idx="1"/>
+          </p:nvPr>
+        </p:nvSpPr>
+        <p:spPr/>
+        <p:txBody>
+          <a:bodyPr/>
+          <a:lstStyle/>
+          <a:p>
+            <a:r>
+              <a:rPr lang="en-US" altLang="zh-TW" dirty="0"/>
+              <a:t>30</a:t>
+            </a:r>
+            <a:r>
+              <a:rPr lang="zh-TW" altLang="en-US" dirty="0"/>
+              <a:t>項</a:t>
+            </a:r>
+          </a:p>
+        </p:txBody>
+      </p:sp>
+      <p:sp>
+        <p:nvSpPr>
+          <p:cNvPr id="4" name="投影片編號版面配置區 3">
+            <a:extLst>
+              <a:ext uri="{FF2B5EF4-FFF2-40B4-BE49-F238E27FC236}">
+                <a16:creationId xmlns:a16="http://schemas.microsoft.com/office/drawing/2014/main" id="{A22293A4-C3DA-4124-0C26-385BD6ED7EC0}"/>
+              </a:ext>
+            </a:extLst>
+          </p:cNvPr>
+          <p:cNvSpPr>
+            <a:spLocks noGrp="1"/>
+          </p:cNvSpPr>
+          <p:nvPr>
+            <p:ph type="sldNum" sz="quarter" idx="10"/>
+          </p:nvPr>
+        </p:nvSpPr>
+        <p:spPr/>
+        <p:txBody>
+          <a:bodyPr/>
+          <a:lstStyle/>
+          <a:p>
+            <a:pPr marL="0" marR="0" lvl="0" indent="0" algn="r" defTabSz="1219170" rtl="0" eaLnBrk="1" fontAlgn="auto" latinLnBrk="0" hangingPunct="1">
+              <a:lnSpc>
+                <a:spcPct val="100000"/>
+              </a:lnSpc>
+              <a:spcBef>
+                <a:spcPts val="0"/>
+              </a:spcBef>
+              <a:spcAft>
+                <a:spcPts val="0"/>
+              </a:spcAft>
+              <a:buClrTx/>
+              <a:buSzTx/>
+              <a:buFontTx/>
+              <a:buNone/>
+              <a:tabLst/>
+              <a:defRPr/>
+            </a:pPr>
+            <a:fld id="{BFF380C3-7D2B-43B9-A2FF-0551F6D200CF}" type="slidenum">
+              <a:rPr kumimoji="0" lang="en-US" sz="1200" b="0" i="0" u="none" strike="noStrike" kern="1200" cap="none" spc="0" normalizeH="0" baseline="0" noProof="0" smtClean="0">
+                <a:ln>
+                  <a:noFill/>
+                </a:ln>
+                <a:solidFill>
+                  <a:prstClr val="black"/>
+                </a:solidFill>
+                <a:effectLst/>
+                <a:uLnTx/>
+                <a:uFillTx/>
+                <a:latin typeface="Calibri" panose="020F0502020204030204"/>
+                <a:ea typeface="+mn-ea"/>
+                <a:cs typeface="+mn-cs"/>
+              </a:rPr>
+              <a:pPr marL="0" marR="0" lvl="0" indent="0" algn="r" defTabSz="1219170" rtl="0" eaLnBrk="1" fontAlgn="auto" latinLnBrk="0" hangingPunct="1">
+                <a:lnSpc>
+                  <a:spcPct val="100000"/>
+                </a:lnSpc>
+                <a:spcBef>
+                  <a:spcPts val="0"/>
+                </a:spcBef>
+                <a:spcAft>
+                  <a:spcPts val="0"/>
+                </a:spcAft>
+                <a:buClrTx/>
+                <a:buSzTx/>
+                <a:buFontTx/>
+                <a:buNone/>
+                <a:tabLst/>
+                <a:defRPr/>
+              </a:pPr>
+              <a:t>11</a:t>
+            </a:fld>
+            <a:endParaRPr kumimoji="0" lang="en-US" sz="1200" b="0" i="0" u="none" strike="noStrike" kern="1200" cap="none" spc="0" normalizeH="0" baseline="0" noProof="0">
+              <a:ln>
+                <a:noFill/>
+              </a:ln>
+              <a:solidFill>
+                <a:prstClr val="black"/>
+              </a:solidFill>
+              <a:effectLst/>
+              <a:uLnTx/>
+              <a:uFillTx/>
+              <a:latin typeface="Calibri" panose="020F0502020204030204"/>
+              <a:ea typeface="+mn-ea"/>
+              <a:cs typeface="+mn-cs"/>
+            </a:endParaRPr>
+          </a:p>
+        </p:txBody>
+      </p:sp>
+    </p:spTree>
+    <p:extLst>
+      <p:ext uri="{BB962C8B-B14F-4D97-AF65-F5344CB8AC3E}">
+        <p14:creationId xmlns:p14="http://schemas.microsoft.com/office/powerpoint/2010/main" val="1244657598"/>
+      </p:ext>
+    </p:extLst>
+  </p:cSld>
+  <p:clrMapOvr>
+    <a:masterClrMapping/>
+  </p:clrMapOvr>
+</p:notes>
+</file>
+
+<file path=ppt/notesSlides/notesSlide11.xml><?xml version="1.0" encoding="utf-8"?>
+<p:notes xmlns:a="http://schemas.openxmlformats.org/drawingml/2006/main" xmlns:r="http://schemas.openxmlformats.org/officeDocument/2006/relationships" xmlns:p="http://schemas.openxmlformats.org/presentationml/2006/main">
+  <p:cSld>
+    <p:spTree>
+      <p:nvGrpSpPr>
+        <p:cNvPr id="1" name="">
+          <a:extLst>
+            <a:ext uri="{FF2B5EF4-FFF2-40B4-BE49-F238E27FC236}">
+              <a16:creationId xmlns:a16="http://schemas.microsoft.com/office/drawing/2014/main" id="{948BE4CF-676B-A695-B6E5-994869753393}"/>
+            </a:ext>
+          </a:extLst>
+        </p:cNvPr>
+        <p:cNvGrpSpPr/>
+        <p:nvPr/>
+      </p:nvGrpSpPr>
+      <p:grpSpPr>
+        <a:xfrm>
+          <a:off x="0" y="0"/>
+          <a:ext cx="0" cy="0"/>
+          <a:chOff x="0" y="0"/>
+          <a:chExt cx="0" cy="0"/>
+        </a:xfrm>
+      </p:grpSpPr>
+      <p:sp>
+        <p:nvSpPr>
+          <p:cNvPr id="2" name="投影片圖像版面配置區 1">
+            <a:extLst>
+              <a:ext uri="{FF2B5EF4-FFF2-40B4-BE49-F238E27FC236}">
+                <a16:creationId xmlns:a16="http://schemas.microsoft.com/office/drawing/2014/main" id="{4A148959-A56A-B121-9AAC-8FE302D1F875}"/>
+              </a:ext>
+            </a:extLst>
+          </p:cNvPr>
+          <p:cNvSpPr>
+            <a:spLocks noGrp="1" noRot="1" noChangeAspect="1"/>
+          </p:cNvSpPr>
+          <p:nvPr>
+            <p:ph type="sldImg"/>
+          </p:nvPr>
+        </p:nvSpPr>
+        <p:spPr/>
+      </p:sp>
+      <p:sp>
+        <p:nvSpPr>
+          <p:cNvPr id="3" name="備忘稿版面配置區 2">
+            <a:extLst>
+              <a:ext uri="{FF2B5EF4-FFF2-40B4-BE49-F238E27FC236}">
+                <a16:creationId xmlns:a16="http://schemas.microsoft.com/office/drawing/2014/main" id="{63944723-52DC-7FD4-7D5D-68A52C4E51E6}"/>
+              </a:ext>
+            </a:extLst>
+          </p:cNvPr>
+          <p:cNvSpPr>
+            <a:spLocks noGrp="1"/>
+          </p:cNvSpPr>
+          <p:nvPr>
+            <p:ph type="body" idx="1"/>
+          </p:nvPr>
+        </p:nvSpPr>
+        <p:spPr/>
+        <p:txBody>
+          <a:bodyPr/>
+          <a:lstStyle/>
+          <a:p>
+            <a:r>
+              <a:rPr lang="en-US" altLang="zh-TW" dirty="0"/>
+              <a:t>30</a:t>
+            </a:r>
+            <a:r>
+              <a:rPr lang="zh-TW" altLang="en-US" dirty="0"/>
+              <a:t>項</a:t>
+            </a:r>
+          </a:p>
+        </p:txBody>
+      </p:sp>
+      <p:sp>
+        <p:nvSpPr>
+          <p:cNvPr id="4" name="投影片編號版面配置區 3">
+            <a:extLst>
+              <a:ext uri="{FF2B5EF4-FFF2-40B4-BE49-F238E27FC236}">
+                <a16:creationId xmlns:a16="http://schemas.microsoft.com/office/drawing/2014/main" id="{EA68918A-705E-C659-ED2E-9591C6709212}"/>
+              </a:ext>
+            </a:extLst>
+          </p:cNvPr>
+          <p:cNvSpPr>
+            <a:spLocks noGrp="1"/>
+          </p:cNvSpPr>
+          <p:nvPr>
+            <p:ph type="sldNum" sz="quarter" idx="10"/>
+          </p:nvPr>
+        </p:nvSpPr>
+        <p:spPr/>
+        <p:txBody>
+          <a:bodyPr/>
+          <a:lstStyle/>
+          <a:p>
+            <a:pPr marL="0" marR="0" lvl="0" indent="0" algn="r" defTabSz="1219170" rtl="0" eaLnBrk="1" fontAlgn="auto" latinLnBrk="0" hangingPunct="1">
+              <a:lnSpc>
+                <a:spcPct val="100000"/>
+              </a:lnSpc>
+              <a:spcBef>
+                <a:spcPts val="0"/>
+              </a:spcBef>
+              <a:spcAft>
+                <a:spcPts val="0"/>
+              </a:spcAft>
+              <a:buClrTx/>
+              <a:buSzTx/>
+              <a:buFontTx/>
+              <a:buNone/>
+              <a:tabLst/>
+              <a:defRPr/>
+            </a:pPr>
+            <a:fld id="{BFF380C3-7D2B-43B9-A2FF-0551F6D200CF}" type="slidenum">
+              <a:rPr kumimoji="0" lang="en-US" sz="1200" b="0" i="0" u="none" strike="noStrike" kern="1200" cap="none" spc="0" normalizeH="0" baseline="0" noProof="0" smtClean="0">
+                <a:ln>
+                  <a:noFill/>
+                </a:ln>
+                <a:solidFill>
+                  <a:prstClr val="black"/>
+                </a:solidFill>
+                <a:effectLst/>
+                <a:uLnTx/>
+                <a:uFillTx/>
+                <a:latin typeface="Calibri" panose="020F0502020204030204"/>
+                <a:ea typeface="+mn-ea"/>
+                <a:cs typeface="+mn-cs"/>
+              </a:rPr>
+              <a:pPr marL="0" marR="0" lvl="0" indent="0" algn="r" defTabSz="1219170" rtl="0" eaLnBrk="1" fontAlgn="auto" latinLnBrk="0" hangingPunct="1">
+                <a:lnSpc>
+                  <a:spcPct val="100000"/>
+                </a:lnSpc>
+                <a:spcBef>
+                  <a:spcPts val="0"/>
+                </a:spcBef>
+                <a:spcAft>
+                  <a:spcPts val="0"/>
+                </a:spcAft>
+                <a:buClrTx/>
+                <a:buSzTx/>
+                <a:buFontTx/>
+                <a:buNone/>
+                <a:tabLst/>
+                <a:defRPr/>
+              </a:pPr>
+              <a:t>12</a:t>
+            </a:fld>
+            <a:endParaRPr kumimoji="0" lang="en-US" sz="1200" b="0" i="0" u="none" strike="noStrike" kern="1200" cap="none" spc="0" normalizeH="0" baseline="0" noProof="0">
+              <a:ln>
+                <a:noFill/>
+              </a:ln>
+              <a:solidFill>
+                <a:prstClr val="black"/>
+              </a:solidFill>
+              <a:effectLst/>
+              <a:uLnTx/>
+              <a:uFillTx/>
+              <a:latin typeface="Calibri" panose="020F0502020204030204"/>
+              <a:ea typeface="+mn-ea"/>
+              <a:cs typeface="+mn-cs"/>
+            </a:endParaRPr>
+          </a:p>
+        </p:txBody>
+      </p:sp>
+    </p:spTree>
+    <p:extLst>
+      <p:ext uri="{BB962C8B-B14F-4D97-AF65-F5344CB8AC3E}">
+        <p14:creationId xmlns:p14="http://schemas.microsoft.com/office/powerpoint/2010/main" val="1638200618"/>
+      </p:ext>
+    </p:extLst>
+  </p:cSld>
+  <p:clrMapOvr>
+    <a:masterClrMapping/>
+  </p:clrMapOvr>
+</p:notes>
+</file>
+
 <file path=ppt/notesSlides/notesSlide2.xml><?xml version="1.0" encoding="utf-8"?>
+<p:notes xmlns:a="http://schemas.openxmlformats.org/drawingml/2006/main" xmlns:r="http://schemas.openxmlformats.org/officeDocument/2006/relationships" xmlns:p="http://schemas.openxmlformats.org/presentationml/2006/main">
+  <p:cSld>
+    <p:spTree>
+      <p:nvGrpSpPr>
+        <p:cNvPr id="1" name="">
+          <a:extLst>
+            <a:ext uri="{FF2B5EF4-FFF2-40B4-BE49-F238E27FC236}">
+              <a16:creationId xmlns:a16="http://schemas.microsoft.com/office/drawing/2014/main" id="{25918218-28F1-27B7-DAD0-03EF08EFD3E9}"/>
+            </a:ext>
+          </a:extLst>
+        </p:cNvPr>
+        <p:cNvGrpSpPr/>
+        <p:nvPr/>
+      </p:nvGrpSpPr>
+      <p:grpSpPr>
+        <a:xfrm>
+          <a:off x="0" y="0"/>
+          <a:ext cx="0" cy="0"/>
+          <a:chOff x="0" y="0"/>
+          <a:chExt cx="0" cy="0"/>
+        </a:xfrm>
+      </p:grpSpPr>
+      <p:sp>
+        <p:nvSpPr>
+          <p:cNvPr id="2" name="投影片圖像版面配置區 1">
+            <a:extLst>
+              <a:ext uri="{FF2B5EF4-FFF2-40B4-BE49-F238E27FC236}">
+                <a16:creationId xmlns:a16="http://schemas.microsoft.com/office/drawing/2014/main" id="{E0CBEACC-FA69-563F-C6D0-60BFE927B4C0}"/>
+              </a:ext>
+            </a:extLst>
+          </p:cNvPr>
+          <p:cNvSpPr>
+            <a:spLocks noGrp="1" noRot="1" noChangeAspect="1"/>
+          </p:cNvSpPr>
+          <p:nvPr>
+            <p:ph type="sldImg"/>
+          </p:nvPr>
+        </p:nvSpPr>
+        <p:spPr/>
+      </p:sp>
+      <p:sp>
+        <p:nvSpPr>
+          <p:cNvPr id="3" name="備忘稿版面配置區 2">
+            <a:extLst>
+              <a:ext uri="{FF2B5EF4-FFF2-40B4-BE49-F238E27FC236}">
+                <a16:creationId xmlns:a16="http://schemas.microsoft.com/office/drawing/2014/main" id="{4A605115-A566-ED99-2EDE-AF2D3C651498}"/>
+              </a:ext>
+            </a:extLst>
+          </p:cNvPr>
+          <p:cNvSpPr>
+            <a:spLocks noGrp="1"/>
+          </p:cNvSpPr>
+          <p:nvPr>
+            <p:ph type="body" idx="1"/>
+          </p:nvPr>
+        </p:nvSpPr>
+        <p:spPr/>
+        <p:txBody>
+          <a:bodyPr/>
+          <a:lstStyle/>
+          <a:p>
+            <a:r>
+              <a:rPr lang="en-US" altLang="zh-TW" dirty="0"/>
+              <a:t>30</a:t>
+            </a:r>
+            <a:r>
+              <a:rPr lang="zh-TW" altLang="en-US" dirty="0"/>
+              <a:t>項</a:t>
+            </a:r>
+          </a:p>
+        </p:txBody>
+      </p:sp>
+      <p:sp>
+        <p:nvSpPr>
+          <p:cNvPr id="4" name="投影片編號版面配置區 3">
+            <a:extLst>
+              <a:ext uri="{FF2B5EF4-FFF2-40B4-BE49-F238E27FC236}">
+                <a16:creationId xmlns:a16="http://schemas.microsoft.com/office/drawing/2014/main" id="{DD161119-6187-CAE1-2261-D54E160E9C6C}"/>
+              </a:ext>
+            </a:extLst>
+          </p:cNvPr>
+          <p:cNvSpPr>
+            <a:spLocks noGrp="1"/>
+          </p:cNvSpPr>
+          <p:nvPr>
+            <p:ph type="sldNum" sz="quarter" idx="10"/>
+          </p:nvPr>
+        </p:nvSpPr>
+        <p:spPr/>
+        <p:txBody>
+          <a:bodyPr/>
+          <a:lstStyle/>
+          <a:p>
+            <a:pPr marL="0" marR="0" lvl="0" indent="0" algn="r" defTabSz="1219170" rtl="0" eaLnBrk="1" fontAlgn="auto" latinLnBrk="0" hangingPunct="1">
+              <a:lnSpc>
+                <a:spcPct val="100000"/>
+              </a:lnSpc>
+              <a:spcBef>
+                <a:spcPts val="0"/>
+              </a:spcBef>
+              <a:spcAft>
+                <a:spcPts val="0"/>
+              </a:spcAft>
+              <a:buClrTx/>
+              <a:buSzTx/>
+              <a:buFontTx/>
+              <a:buNone/>
+              <a:tabLst/>
+              <a:defRPr/>
+            </a:pPr>
+            <a:fld id="{BFF380C3-7D2B-43B9-A2FF-0551F6D200CF}" type="slidenum">
+              <a:rPr kumimoji="0" lang="en-US" sz="1200" b="0" i="0" u="none" strike="noStrike" kern="1200" cap="none" spc="0" normalizeH="0" baseline="0" noProof="0" smtClean="0">
+                <a:ln>
+                  <a:noFill/>
+                </a:ln>
+                <a:solidFill>
+                  <a:prstClr val="black"/>
+                </a:solidFill>
+                <a:effectLst/>
+                <a:uLnTx/>
+                <a:uFillTx/>
+                <a:latin typeface="Calibri" panose="020F0502020204030204"/>
+                <a:ea typeface="+mn-ea"/>
+                <a:cs typeface="+mn-cs"/>
+              </a:rPr>
+              <a:pPr marL="0" marR="0" lvl="0" indent="0" algn="r" defTabSz="1219170" rtl="0" eaLnBrk="1" fontAlgn="auto" latinLnBrk="0" hangingPunct="1">
+                <a:lnSpc>
+                  <a:spcPct val="100000"/>
+                </a:lnSpc>
+                <a:spcBef>
+                  <a:spcPts val="0"/>
+                </a:spcBef>
+                <a:spcAft>
+                  <a:spcPts val="0"/>
+                </a:spcAft>
+                <a:buClrTx/>
+                <a:buSzTx/>
+                <a:buFontTx/>
+                <a:buNone/>
+                <a:tabLst/>
+                <a:defRPr/>
+              </a:pPr>
+              <a:t>3</a:t>
+            </a:fld>
+            <a:endParaRPr kumimoji="0" lang="en-US" sz="1200" b="0" i="0" u="none" strike="noStrike" kern="1200" cap="none" spc="0" normalizeH="0" baseline="0" noProof="0">
+              <a:ln>
+                <a:noFill/>
+              </a:ln>
+              <a:solidFill>
+                <a:prstClr val="black"/>
+              </a:solidFill>
+              <a:effectLst/>
+              <a:uLnTx/>
+              <a:uFillTx/>
+              <a:latin typeface="Calibri" panose="020F0502020204030204"/>
+              <a:ea typeface="+mn-ea"/>
+              <a:cs typeface="+mn-cs"/>
+            </a:endParaRPr>
+          </a:p>
+        </p:txBody>
+      </p:sp>
+    </p:spTree>
+    <p:extLst>
+      <p:ext uri="{BB962C8B-B14F-4D97-AF65-F5344CB8AC3E}">
+        <p14:creationId xmlns:p14="http://schemas.microsoft.com/office/powerpoint/2010/main" val="2075328792"/>
+      </p:ext>
+    </p:extLst>
+  </p:cSld>
+  <p:clrMapOvr>
+    <a:masterClrMapping/>
+  </p:clrMapOvr>
+</p:notes>
+</file>
+
+<file path=ppt/notesSlides/notesSlide3.xml><?xml version="1.0" encoding="utf-8"?>
+<p:notes xmlns:a="http://schemas.openxmlformats.org/drawingml/2006/main" xmlns:r="http://schemas.openxmlformats.org/officeDocument/2006/relationships" xmlns:p="http://schemas.openxmlformats.org/presentationml/2006/main">
+  <p:cSld>
+    <p:spTree>
+      <p:nvGrpSpPr>
+        <p:cNvPr id="1" name="">
+          <a:extLst>
+            <a:ext uri="{FF2B5EF4-FFF2-40B4-BE49-F238E27FC236}">
+              <a16:creationId xmlns:a16="http://schemas.microsoft.com/office/drawing/2014/main" id="{224F4BF4-010C-68D3-9ECF-1A9D8B3B850E}"/>
+            </a:ext>
+          </a:extLst>
+        </p:cNvPr>
+        <p:cNvGrpSpPr/>
+        <p:nvPr/>
+      </p:nvGrpSpPr>
+      <p:grpSpPr>
+        <a:xfrm>
+          <a:off x="0" y="0"/>
+          <a:ext cx="0" cy="0"/>
+          <a:chOff x="0" y="0"/>
+          <a:chExt cx="0" cy="0"/>
+        </a:xfrm>
+      </p:grpSpPr>
+      <p:sp>
+        <p:nvSpPr>
+          <p:cNvPr id="2" name="投影片圖像版面配置區 1">
+            <a:extLst>
+              <a:ext uri="{FF2B5EF4-FFF2-40B4-BE49-F238E27FC236}">
+                <a16:creationId xmlns:a16="http://schemas.microsoft.com/office/drawing/2014/main" id="{402525D6-D95F-B138-3001-69784120169A}"/>
+              </a:ext>
+            </a:extLst>
+          </p:cNvPr>
+          <p:cNvSpPr>
+            <a:spLocks noGrp="1" noRot="1" noChangeAspect="1"/>
+          </p:cNvSpPr>
+          <p:nvPr>
+            <p:ph type="sldImg"/>
+          </p:nvPr>
+        </p:nvSpPr>
+        <p:spPr/>
+      </p:sp>
+      <p:sp>
+        <p:nvSpPr>
+          <p:cNvPr id="3" name="備忘稿版面配置區 2">
+            <a:extLst>
+              <a:ext uri="{FF2B5EF4-FFF2-40B4-BE49-F238E27FC236}">
+                <a16:creationId xmlns:a16="http://schemas.microsoft.com/office/drawing/2014/main" id="{3CDAD268-9BD0-29F2-EB4D-A213D9303F27}"/>
+              </a:ext>
+            </a:extLst>
+          </p:cNvPr>
+          <p:cNvSpPr>
+            <a:spLocks noGrp="1"/>
+          </p:cNvSpPr>
+          <p:nvPr>
+            <p:ph type="body" idx="1"/>
+          </p:nvPr>
+        </p:nvSpPr>
+        <p:spPr/>
+        <p:txBody>
+          <a:bodyPr/>
+          <a:lstStyle/>
+          <a:p>
+            <a:r>
+              <a:rPr lang="en-US" altLang="zh-TW" dirty="0"/>
+              <a:t>30</a:t>
+            </a:r>
+            <a:r>
+              <a:rPr lang="zh-TW" altLang="en-US" dirty="0"/>
+              <a:t>項</a:t>
+            </a:r>
+          </a:p>
+        </p:txBody>
+      </p:sp>
+      <p:sp>
+        <p:nvSpPr>
+          <p:cNvPr id="4" name="投影片編號版面配置區 3">
+            <a:extLst>
+              <a:ext uri="{FF2B5EF4-FFF2-40B4-BE49-F238E27FC236}">
+                <a16:creationId xmlns:a16="http://schemas.microsoft.com/office/drawing/2014/main" id="{6B817C10-A040-AE67-5F3D-4B18DD095926}"/>
+              </a:ext>
+            </a:extLst>
+          </p:cNvPr>
+          <p:cNvSpPr>
+            <a:spLocks noGrp="1"/>
+          </p:cNvSpPr>
+          <p:nvPr>
+            <p:ph type="sldNum" sz="quarter" idx="10"/>
+          </p:nvPr>
+        </p:nvSpPr>
+        <p:spPr/>
+        <p:txBody>
+          <a:bodyPr/>
+          <a:lstStyle/>
+          <a:p>
+            <a:pPr marL="0" marR="0" lvl="0" indent="0" algn="r" defTabSz="1219170" rtl="0" eaLnBrk="1" fontAlgn="auto" latinLnBrk="0" hangingPunct="1">
+              <a:lnSpc>
+                <a:spcPct val="100000"/>
+              </a:lnSpc>
+              <a:spcBef>
+                <a:spcPts val="0"/>
+              </a:spcBef>
+              <a:spcAft>
+                <a:spcPts val="0"/>
+              </a:spcAft>
+              <a:buClrTx/>
+              <a:buSzTx/>
+              <a:buFontTx/>
+              <a:buNone/>
+              <a:tabLst/>
+              <a:defRPr/>
+            </a:pPr>
+            <a:fld id="{BFF380C3-7D2B-43B9-A2FF-0551F6D200CF}" type="slidenum">
+              <a:rPr kumimoji="0" lang="en-US" sz="1200" b="0" i="0" u="none" strike="noStrike" kern="1200" cap="none" spc="0" normalizeH="0" baseline="0" noProof="0" smtClean="0">
+                <a:ln>
+                  <a:noFill/>
+                </a:ln>
+                <a:solidFill>
+                  <a:prstClr val="black"/>
+                </a:solidFill>
+                <a:effectLst/>
+                <a:uLnTx/>
+                <a:uFillTx/>
+                <a:latin typeface="Calibri" panose="020F0502020204030204"/>
+                <a:ea typeface="+mn-ea"/>
+                <a:cs typeface="+mn-cs"/>
+              </a:rPr>
+              <a:pPr marL="0" marR="0" lvl="0" indent="0" algn="r" defTabSz="1219170" rtl="0" eaLnBrk="1" fontAlgn="auto" latinLnBrk="0" hangingPunct="1">
+                <a:lnSpc>
+                  <a:spcPct val="100000"/>
+                </a:lnSpc>
+                <a:spcBef>
+                  <a:spcPts val="0"/>
+                </a:spcBef>
+                <a:spcAft>
+                  <a:spcPts val="0"/>
+                </a:spcAft>
+                <a:buClrTx/>
+                <a:buSzTx/>
+                <a:buFontTx/>
+                <a:buNone/>
+                <a:tabLst/>
+                <a:defRPr/>
+              </a:pPr>
+              <a:t>4</a:t>
+            </a:fld>
+            <a:endParaRPr kumimoji="0" lang="en-US" sz="1200" b="0" i="0" u="none" strike="noStrike" kern="1200" cap="none" spc="0" normalizeH="0" baseline="0" noProof="0">
+              <a:ln>
+                <a:noFill/>
+              </a:ln>
+              <a:solidFill>
+                <a:prstClr val="black"/>
+              </a:solidFill>
+              <a:effectLst/>
+              <a:uLnTx/>
+              <a:uFillTx/>
+              <a:latin typeface="Calibri" panose="020F0502020204030204"/>
+              <a:ea typeface="+mn-ea"/>
+              <a:cs typeface="+mn-cs"/>
+            </a:endParaRPr>
+          </a:p>
+        </p:txBody>
+      </p:sp>
+    </p:spTree>
+    <p:extLst>
+      <p:ext uri="{BB962C8B-B14F-4D97-AF65-F5344CB8AC3E}">
+        <p14:creationId xmlns:p14="http://schemas.microsoft.com/office/powerpoint/2010/main" val="2666374322"/>
+      </p:ext>
+    </p:extLst>
+  </p:cSld>
+  <p:clrMapOvr>
+    <a:masterClrMapping/>
+  </p:clrMapOvr>
+</p:notes>
+</file>
+
+<file path=ppt/notesSlides/notesSlide4.xml><?xml version="1.0" encoding="utf-8"?>
 <p:notes xmlns:a="http://schemas.openxmlformats.org/drawingml/2006/main" xmlns:r="http://schemas.openxmlformats.org/officeDocument/2006/relationships" xmlns:p="http://schemas.openxmlformats.org/presentationml/2006/main">
   <p:cSld>
     <p:spTree>
@@ -779,7 +1482,7 @@
                 <a:tabLst/>
                 <a:defRPr/>
               </a:pPr>
-              <a:t>3</a:t>
+              <a:t>5</a:t>
             </a:fld>
             <a:endParaRPr kumimoji="0" lang="en-US" sz="1200" b="0" i="0" u="none" strike="noStrike" kern="1200" cap="none" spc="0" normalizeH="0" baseline="0" noProof="0">
               <a:ln>
@@ -811,7 +1514,7 @@
 </p:notes>
 </file>
 
-<file path=ppt/notesSlides/notesSlide3.xml><?xml version="1.0" encoding="utf-8"?>
+<file path=ppt/notesSlides/notesSlide5.xml><?xml version="1.0" encoding="utf-8"?>
 <p:notes xmlns:a="http://schemas.openxmlformats.org/drawingml/2006/main" xmlns:r="http://schemas.openxmlformats.org/officeDocument/2006/relationships" xmlns:p="http://schemas.openxmlformats.org/presentationml/2006/main">
   <p:cSld>
     <p:spTree>
@@ -954,7 +1657,7 @@
                 <a:tabLst/>
                 <a:defRPr/>
               </a:pPr>
-              <a:t>4</a:t>
+              <a:t>6</a:t>
             </a:fld>
             <a:endParaRPr kumimoji="0" lang="en-US" sz="1200" b="0" i="0" u="none" strike="noStrike" kern="1200" cap="none" spc="0" normalizeH="0" baseline="0" noProof="0">
               <a:ln>
@@ -986,7 +1689,7 @@
 </p:notes>
 </file>
 
-<file path=ppt/notesSlides/notesSlide4.xml><?xml version="1.0" encoding="utf-8"?>
+<file path=ppt/notesSlides/notesSlide6.xml><?xml version="1.0" encoding="utf-8"?>
 <p:notes xmlns:a="http://schemas.openxmlformats.org/drawingml/2006/main" xmlns:r="http://schemas.openxmlformats.org/officeDocument/2006/relationships" xmlns:p="http://schemas.openxmlformats.org/presentationml/2006/main">
   <p:cSld>
     <p:spTree>
@@ -1129,7 +1832,7 @@
                 <a:tabLst/>
                 <a:defRPr/>
               </a:pPr>
-              <a:t>5</a:t>
+              <a:t>7</a:t>
             </a:fld>
             <a:endParaRPr kumimoji="0" lang="en-US" sz="1200" b="0" i="0" u="none" strike="noStrike" kern="1200" cap="none" spc="0" normalizeH="0" baseline="0" noProof="0">
               <a:ln>
@@ -1161,7 +1864,7 @@
 </p:notes>
 </file>
 
-<file path=ppt/notesSlides/notesSlide5.xml><?xml version="1.0" encoding="utf-8"?>
+<file path=ppt/notesSlides/notesSlide7.xml><?xml version="1.0" encoding="utf-8"?>
 <p:notes xmlns:a="http://schemas.openxmlformats.org/drawingml/2006/main" xmlns:r="http://schemas.openxmlformats.org/officeDocument/2006/relationships" xmlns:p="http://schemas.openxmlformats.org/presentationml/2006/main">
   <p:cSld>
     <p:spTree>
@@ -1304,7 +2007,7 @@
                 <a:tabLst/>
                 <a:defRPr/>
               </a:pPr>
-              <a:t>6</a:t>
+              <a:t>8</a:t>
             </a:fld>
             <a:endParaRPr kumimoji="0" lang="en-US" sz="1200" b="0" i="0" u="none" strike="noStrike" kern="1200" cap="none" spc="0" normalizeH="0" baseline="0" noProof="0">
               <a:ln>
@@ -1336,7 +2039,182 @@
 </p:notes>
 </file>
 
-<file path=ppt/notesSlides/notesSlide6.xml><?xml version="1.0" encoding="utf-8"?>
+<file path=ppt/notesSlides/notesSlide8.xml><?xml version="1.0" encoding="utf-8"?>
+<p:notes xmlns:a="http://schemas.openxmlformats.org/drawingml/2006/main" xmlns:r="http://schemas.openxmlformats.org/officeDocument/2006/relationships" xmlns:p="http://schemas.openxmlformats.org/presentationml/2006/main">
+  <p:cSld>
+    <p:spTree>
+      <p:nvGrpSpPr>
+        <p:cNvPr id="1" name="">
+          <a:extLst>
+            <a:ext uri="{FF2B5EF4-FFF2-40B4-BE49-F238E27FC236}">
+              <a16:creationId xmlns:a16="http://schemas.microsoft.com/office/drawing/2014/main" id="{914306BC-2CE5-80CA-3E11-A65B34D5C336}"/>
+            </a:ext>
+          </a:extLst>
+        </p:cNvPr>
+        <p:cNvGrpSpPr/>
+        <p:nvPr/>
+      </p:nvGrpSpPr>
+      <p:grpSpPr>
+        <a:xfrm>
+          <a:off x="0" y="0"/>
+          <a:ext cx="0" cy="0"/>
+          <a:chOff x="0" y="0"/>
+          <a:chExt cx="0" cy="0"/>
+        </a:xfrm>
+      </p:grpSpPr>
+      <p:sp>
+        <p:nvSpPr>
+          <p:cNvPr id="2" name="投影片圖像版面配置區 1">
+            <a:extLst>
+              <a:ext uri="{FF2B5EF4-FFF2-40B4-BE49-F238E27FC236}">
+                <a16:creationId xmlns:a16="http://schemas.microsoft.com/office/drawing/2014/main" id="{4E92581C-2ADB-20AD-CAC6-F6B14C80167B}"/>
+              </a:ext>
+            </a:extLst>
+          </p:cNvPr>
+          <p:cNvSpPr>
+            <a:spLocks noGrp="1" noRot="1" noChangeAspect="1"/>
+          </p:cNvSpPr>
+          <p:nvPr>
+            <p:ph type="sldImg"/>
+          </p:nvPr>
+        </p:nvSpPr>
+        <p:spPr/>
+      </p:sp>
+      <p:sp>
+        <p:nvSpPr>
+          <p:cNvPr id="3" name="備忘稿版面配置區 2">
+            <a:extLst>
+              <a:ext uri="{FF2B5EF4-FFF2-40B4-BE49-F238E27FC236}">
+                <a16:creationId xmlns:a16="http://schemas.microsoft.com/office/drawing/2014/main" id="{E73DB2EA-7503-A1CD-B4DF-3772867DC22B}"/>
+              </a:ext>
+            </a:extLst>
+          </p:cNvPr>
+          <p:cNvSpPr>
+            <a:spLocks noGrp="1"/>
+          </p:cNvSpPr>
+          <p:nvPr>
+            <p:ph type="body" idx="1"/>
+          </p:nvPr>
+        </p:nvSpPr>
+        <p:spPr/>
+        <p:txBody>
+          <a:bodyPr/>
+          <a:lstStyle/>
+          <a:p>
+            <a:r>
+              <a:rPr lang="en-US" altLang="zh-TW" dirty="0"/>
+              <a:t>30</a:t>
+            </a:r>
+            <a:r>
+              <a:rPr lang="zh-TW" altLang="en-US" dirty="0"/>
+              <a:t>項</a:t>
+            </a:r>
+          </a:p>
+        </p:txBody>
+      </p:sp>
+      <p:sp>
+        <p:nvSpPr>
+          <p:cNvPr id="4" name="投影片編號版面配置區 3">
+            <a:extLst>
+              <a:ext uri="{FF2B5EF4-FFF2-40B4-BE49-F238E27FC236}">
+                <a16:creationId xmlns:a16="http://schemas.microsoft.com/office/drawing/2014/main" id="{3450EF08-B09F-292E-FFAB-BDEB4A27979A}"/>
+              </a:ext>
+            </a:extLst>
+          </p:cNvPr>
+          <p:cNvSpPr>
+            <a:spLocks noGrp="1"/>
+          </p:cNvSpPr>
+          <p:nvPr>
+            <p:ph type="sldNum" sz="quarter" idx="10"/>
+          </p:nvPr>
+        </p:nvSpPr>
+        <p:spPr/>
+        <p:txBody>
+          <a:bodyPr/>
+          <a:lstStyle/>
+          <a:p>
+            <a:pPr marL="0" marR="0" lvl="0" indent="0" algn="r" defTabSz="1219170" rtl="0" eaLnBrk="1" fontAlgn="auto" latinLnBrk="0" hangingPunct="1">
+              <a:lnSpc>
+                <a:spcPct val="100000"/>
+              </a:lnSpc>
+              <a:spcBef>
+                <a:spcPts val="0"/>
+              </a:spcBef>
+              <a:spcAft>
+                <a:spcPts val="0"/>
+              </a:spcAft>
+              <a:buClrTx/>
+              <a:buSzTx/>
+              <a:buFontTx/>
+              <a:buNone/>
+              <a:tabLst/>
+              <a:defRPr/>
+            </a:pPr>
+            <a:fld id="{BFF380C3-7D2B-43B9-A2FF-0551F6D200CF}" type="slidenum">
+              <a:rPr kumimoji="0" lang="en-US" sz="1200" b="0" i="0" u="none" strike="noStrike" kern="1200" cap="none" spc="0" normalizeH="0" baseline="0" noProof="0" smtClean="0">
+                <a:ln>
+                  <a:noFill/>
+                </a:ln>
+                <a:solidFill>
+                  <a:prstClr val="black"/>
+                </a:solidFill>
+                <a:effectLst/>
+                <a:uLnTx/>
+                <a:uFillTx/>
+                <a:latin typeface="Calibri" panose="020F0502020204030204"/>
+                <a:ea typeface="+mn-ea"/>
+                <a:cs typeface="+mn-cs"/>
+              </a:rPr>
+              <a:pPr marL="0" marR="0" lvl="0" indent="0" algn="r" defTabSz="1219170" rtl="0" eaLnBrk="1" fontAlgn="auto" latinLnBrk="0" hangingPunct="1">
+                <a:lnSpc>
+                  <a:spcPct val="100000"/>
+                </a:lnSpc>
+                <a:spcBef>
+                  <a:spcPts val="0"/>
+                </a:spcBef>
+                <a:spcAft>
+                  <a:spcPts val="0"/>
+                </a:spcAft>
+                <a:buClrTx/>
+                <a:buSzTx/>
+                <a:buFontTx/>
+                <a:buNone/>
+                <a:tabLst/>
+                <a:defRPr/>
+              </a:pPr>
+              <a:t>9</a:t>
+            </a:fld>
+            <a:endParaRPr kumimoji="0" lang="en-US" sz="1200" b="0" i="0" u="none" strike="noStrike" kern="1200" cap="none" spc="0" normalizeH="0" baseline="0" noProof="0">
+              <a:ln>
+                <a:noFill/>
+              </a:ln>
+              <a:solidFill>
+                <a:prstClr val="black"/>
+              </a:solidFill>
+              <a:effectLst/>
+              <a:uLnTx/>
+              <a:uFillTx/>
+              <a:latin typeface="Calibri" panose="020F0502020204030204"/>
+              <a:ea typeface="+mn-ea"/>
+              <a:cs typeface="+mn-cs"/>
+            </a:endParaRPr>
+          </a:p>
+        </p:txBody>
+      </p:sp>
+    </p:spTree>
+    <p:extLst>
+      <p:ext uri="{BB962C8B-B14F-4D97-AF65-F5344CB8AC3E}">
+        <p14:creationId xmlns:p14="http://schemas.microsoft.com/office/powerpoint/2010/main" val="2257298792"/>
+      </p:ext>
+    </p:extLst>
+  </p:cSld>
+  <p:clrMapOvr>
+    <a:masterClrMapping/>
+  </p:clrMapOvr>
+</p:notes>
+</file>
+
+<file path=ppt/notesSlides/notesSlide9.xml><?xml version="1.0" encoding="utf-8"?>
 <p:notes xmlns:a="http://schemas.openxmlformats.org/drawingml/2006/main" xmlns:r="http://schemas.openxmlformats.org/officeDocument/2006/relationships" xmlns:p="http://schemas.openxmlformats.org/presentationml/2006/main">
   <p:cSld>
     <p:spTree>
@@ -1479,7 +2357,7 @@
                 <a:tabLst/>
                 <a:defRPr/>
               </a:pPr>
-              <a:t>7</a:t>
+              <a:t>10</a:t>
             </a:fld>
             <a:endParaRPr kumimoji="0" lang="en-US" sz="1200" b="0" i="0" u="none" strike="noStrike" kern="1200" cap="none" spc="0" normalizeH="0" baseline="0" noProof="0">
               <a:ln>
@@ -1502,356 +2380,6 @@
     <p:extLst>
       <p:ext uri="{BB962C8B-B14F-4D97-AF65-F5344CB8AC3E}">
         <p14:creationId xmlns:p14="http://schemas.microsoft.com/office/powerpoint/2010/main" val="3968230283"/>
-      </p:ext>
-    </p:extLst>
-  </p:cSld>
-  <p:clrMapOvr>
-    <a:masterClrMapping/>
-  </p:clrMapOvr>
-</p:notes>
-</file>
-
-<file path=ppt/notesSlides/notesSlide7.xml><?xml version="1.0" encoding="utf-8"?>
-<p:notes xmlns:a="http://schemas.openxmlformats.org/drawingml/2006/main" xmlns:r="http://schemas.openxmlformats.org/officeDocument/2006/relationships" xmlns:p="http://schemas.openxmlformats.org/presentationml/2006/main">
-  <p:cSld>
-    <p:spTree>
-      <p:nvGrpSpPr>
-        <p:cNvPr id="1" name="">
-          <a:extLst>
-            <a:ext uri="{FF2B5EF4-FFF2-40B4-BE49-F238E27FC236}">
-              <a16:creationId xmlns:a16="http://schemas.microsoft.com/office/drawing/2014/main" id="{7411B0E2-9DAD-B6EE-90DC-405AE9E420E8}"/>
-            </a:ext>
-          </a:extLst>
-        </p:cNvPr>
-        <p:cNvGrpSpPr/>
-        <p:nvPr/>
-      </p:nvGrpSpPr>
-      <p:grpSpPr>
-        <a:xfrm>
-          <a:off x="0" y="0"/>
-          <a:ext cx="0" cy="0"/>
-          <a:chOff x="0" y="0"/>
-          <a:chExt cx="0" cy="0"/>
-        </a:xfrm>
-      </p:grpSpPr>
-      <p:sp>
-        <p:nvSpPr>
-          <p:cNvPr id="2" name="投影片圖像版面配置區 1">
-            <a:extLst>
-              <a:ext uri="{FF2B5EF4-FFF2-40B4-BE49-F238E27FC236}">
-                <a16:creationId xmlns:a16="http://schemas.microsoft.com/office/drawing/2014/main" id="{9B198BAC-021C-C0B8-F7CE-57CC31AD206B}"/>
-              </a:ext>
-            </a:extLst>
-          </p:cNvPr>
-          <p:cNvSpPr>
-            <a:spLocks noGrp="1" noRot="1" noChangeAspect="1"/>
-          </p:cNvSpPr>
-          <p:nvPr>
-            <p:ph type="sldImg"/>
-          </p:nvPr>
-        </p:nvSpPr>
-        <p:spPr/>
-      </p:sp>
-      <p:sp>
-        <p:nvSpPr>
-          <p:cNvPr id="3" name="備忘稿版面配置區 2">
-            <a:extLst>
-              <a:ext uri="{FF2B5EF4-FFF2-40B4-BE49-F238E27FC236}">
-                <a16:creationId xmlns:a16="http://schemas.microsoft.com/office/drawing/2014/main" id="{BD6B908B-EB18-6544-A5D3-A637663E432D}"/>
-              </a:ext>
-            </a:extLst>
-          </p:cNvPr>
-          <p:cNvSpPr>
-            <a:spLocks noGrp="1"/>
-          </p:cNvSpPr>
-          <p:nvPr>
-            <p:ph type="body" idx="1"/>
-          </p:nvPr>
-        </p:nvSpPr>
-        <p:spPr/>
-        <p:txBody>
-          <a:bodyPr/>
-          <a:lstStyle/>
-          <a:p>
-            <a:r>
-              <a:rPr lang="en-US" altLang="zh-TW" dirty="0"/>
-              <a:t>30</a:t>
-            </a:r>
-            <a:r>
-              <a:rPr lang="zh-TW" altLang="en-US" dirty="0"/>
-              <a:t>項</a:t>
-            </a:r>
-          </a:p>
-        </p:txBody>
-      </p:sp>
-      <p:sp>
-        <p:nvSpPr>
-          <p:cNvPr id="4" name="投影片編號版面配置區 3">
-            <a:extLst>
-              <a:ext uri="{FF2B5EF4-FFF2-40B4-BE49-F238E27FC236}">
-                <a16:creationId xmlns:a16="http://schemas.microsoft.com/office/drawing/2014/main" id="{A22293A4-C3DA-4124-0C26-385BD6ED7EC0}"/>
-              </a:ext>
-            </a:extLst>
-          </p:cNvPr>
-          <p:cNvSpPr>
-            <a:spLocks noGrp="1"/>
-          </p:cNvSpPr>
-          <p:nvPr>
-            <p:ph type="sldNum" sz="quarter" idx="10"/>
-          </p:nvPr>
-        </p:nvSpPr>
-        <p:spPr/>
-        <p:txBody>
-          <a:bodyPr/>
-          <a:lstStyle/>
-          <a:p>
-            <a:pPr marL="0" marR="0" lvl="0" indent="0" algn="r" defTabSz="1219170" rtl="0" eaLnBrk="1" fontAlgn="auto" latinLnBrk="0" hangingPunct="1">
-              <a:lnSpc>
-                <a:spcPct val="100000"/>
-              </a:lnSpc>
-              <a:spcBef>
-                <a:spcPts val="0"/>
-              </a:spcBef>
-              <a:spcAft>
-                <a:spcPts val="0"/>
-              </a:spcAft>
-              <a:buClrTx/>
-              <a:buSzTx/>
-              <a:buFontTx/>
-              <a:buNone/>
-              <a:tabLst/>
-              <a:defRPr/>
-            </a:pPr>
-            <a:fld id="{BFF380C3-7D2B-43B9-A2FF-0551F6D200CF}" type="slidenum">
-              <a:rPr kumimoji="0" lang="en-US" sz="1200" b="0" i="0" u="none" strike="noStrike" kern="1200" cap="none" spc="0" normalizeH="0" baseline="0" noProof="0" smtClean="0">
-                <a:ln>
-                  <a:noFill/>
-                </a:ln>
-                <a:solidFill>
-                  <a:prstClr val="black"/>
-                </a:solidFill>
-                <a:effectLst/>
-                <a:uLnTx/>
-                <a:uFillTx/>
-                <a:latin typeface="Calibri" panose="020F0502020204030204"/>
-                <a:ea typeface="+mn-ea"/>
-                <a:cs typeface="+mn-cs"/>
-              </a:rPr>
-              <a:pPr marL="0" marR="0" lvl="0" indent="0" algn="r" defTabSz="1219170" rtl="0" eaLnBrk="1" fontAlgn="auto" latinLnBrk="0" hangingPunct="1">
-                <a:lnSpc>
-                  <a:spcPct val="100000"/>
-                </a:lnSpc>
-                <a:spcBef>
-                  <a:spcPts val="0"/>
-                </a:spcBef>
-                <a:spcAft>
-                  <a:spcPts val="0"/>
-                </a:spcAft>
-                <a:buClrTx/>
-                <a:buSzTx/>
-                <a:buFontTx/>
-                <a:buNone/>
-                <a:tabLst/>
-                <a:defRPr/>
-              </a:pPr>
-              <a:t>8</a:t>
-            </a:fld>
-            <a:endParaRPr kumimoji="0" lang="en-US" sz="1200" b="0" i="0" u="none" strike="noStrike" kern="1200" cap="none" spc="0" normalizeH="0" baseline="0" noProof="0">
-              <a:ln>
-                <a:noFill/>
-              </a:ln>
-              <a:solidFill>
-                <a:prstClr val="black"/>
-              </a:solidFill>
-              <a:effectLst/>
-              <a:uLnTx/>
-              <a:uFillTx/>
-              <a:latin typeface="Calibri" panose="020F0502020204030204"/>
-              <a:ea typeface="+mn-ea"/>
-              <a:cs typeface="+mn-cs"/>
-            </a:endParaRPr>
-          </a:p>
-        </p:txBody>
-      </p:sp>
-    </p:spTree>
-    <p:extLst>
-      <p:ext uri="{BB962C8B-B14F-4D97-AF65-F5344CB8AC3E}">
-        <p14:creationId xmlns:p14="http://schemas.microsoft.com/office/powerpoint/2010/main" val="1244657598"/>
-      </p:ext>
-    </p:extLst>
-  </p:cSld>
-  <p:clrMapOvr>
-    <a:masterClrMapping/>
-  </p:clrMapOvr>
-</p:notes>
-</file>
-
-<file path=ppt/notesSlides/notesSlide8.xml><?xml version="1.0" encoding="utf-8"?>
-<p:notes xmlns:a="http://schemas.openxmlformats.org/drawingml/2006/main" xmlns:r="http://schemas.openxmlformats.org/officeDocument/2006/relationships" xmlns:p="http://schemas.openxmlformats.org/presentationml/2006/main">
-  <p:cSld>
-    <p:spTree>
-      <p:nvGrpSpPr>
-        <p:cNvPr id="1" name="">
-          <a:extLst>
-            <a:ext uri="{FF2B5EF4-FFF2-40B4-BE49-F238E27FC236}">
-              <a16:creationId xmlns:a16="http://schemas.microsoft.com/office/drawing/2014/main" id="{948BE4CF-676B-A695-B6E5-994869753393}"/>
-            </a:ext>
-          </a:extLst>
-        </p:cNvPr>
-        <p:cNvGrpSpPr/>
-        <p:nvPr/>
-      </p:nvGrpSpPr>
-      <p:grpSpPr>
-        <a:xfrm>
-          <a:off x="0" y="0"/>
-          <a:ext cx="0" cy="0"/>
-          <a:chOff x="0" y="0"/>
-          <a:chExt cx="0" cy="0"/>
-        </a:xfrm>
-      </p:grpSpPr>
-      <p:sp>
-        <p:nvSpPr>
-          <p:cNvPr id="2" name="投影片圖像版面配置區 1">
-            <a:extLst>
-              <a:ext uri="{FF2B5EF4-FFF2-40B4-BE49-F238E27FC236}">
-                <a16:creationId xmlns:a16="http://schemas.microsoft.com/office/drawing/2014/main" id="{4A148959-A56A-B121-9AAC-8FE302D1F875}"/>
-              </a:ext>
-            </a:extLst>
-          </p:cNvPr>
-          <p:cNvSpPr>
-            <a:spLocks noGrp="1" noRot="1" noChangeAspect="1"/>
-          </p:cNvSpPr>
-          <p:nvPr>
-            <p:ph type="sldImg"/>
-          </p:nvPr>
-        </p:nvSpPr>
-        <p:spPr/>
-      </p:sp>
-      <p:sp>
-        <p:nvSpPr>
-          <p:cNvPr id="3" name="備忘稿版面配置區 2">
-            <a:extLst>
-              <a:ext uri="{FF2B5EF4-FFF2-40B4-BE49-F238E27FC236}">
-                <a16:creationId xmlns:a16="http://schemas.microsoft.com/office/drawing/2014/main" id="{63944723-52DC-7FD4-7D5D-68A52C4E51E6}"/>
-              </a:ext>
-            </a:extLst>
-          </p:cNvPr>
-          <p:cNvSpPr>
-            <a:spLocks noGrp="1"/>
-          </p:cNvSpPr>
-          <p:nvPr>
-            <p:ph type="body" idx="1"/>
-          </p:nvPr>
-        </p:nvSpPr>
-        <p:spPr/>
-        <p:txBody>
-          <a:bodyPr/>
-          <a:lstStyle/>
-          <a:p>
-            <a:r>
-              <a:rPr lang="en-US" altLang="zh-TW" dirty="0"/>
-              <a:t>30</a:t>
-            </a:r>
-            <a:r>
-              <a:rPr lang="zh-TW" altLang="en-US" dirty="0"/>
-              <a:t>項</a:t>
-            </a:r>
-          </a:p>
-        </p:txBody>
-      </p:sp>
-      <p:sp>
-        <p:nvSpPr>
-          <p:cNvPr id="4" name="投影片編號版面配置區 3">
-            <a:extLst>
-              <a:ext uri="{FF2B5EF4-FFF2-40B4-BE49-F238E27FC236}">
-                <a16:creationId xmlns:a16="http://schemas.microsoft.com/office/drawing/2014/main" id="{EA68918A-705E-C659-ED2E-9591C6709212}"/>
-              </a:ext>
-            </a:extLst>
-          </p:cNvPr>
-          <p:cNvSpPr>
-            <a:spLocks noGrp="1"/>
-          </p:cNvSpPr>
-          <p:nvPr>
-            <p:ph type="sldNum" sz="quarter" idx="10"/>
-          </p:nvPr>
-        </p:nvSpPr>
-        <p:spPr/>
-        <p:txBody>
-          <a:bodyPr/>
-          <a:lstStyle/>
-          <a:p>
-            <a:pPr marL="0" marR="0" lvl="0" indent="0" algn="r" defTabSz="1219170" rtl="0" eaLnBrk="1" fontAlgn="auto" latinLnBrk="0" hangingPunct="1">
-              <a:lnSpc>
-                <a:spcPct val="100000"/>
-              </a:lnSpc>
-              <a:spcBef>
-                <a:spcPts val="0"/>
-              </a:spcBef>
-              <a:spcAft>
-                <a:spcPts val="0"/>
-              </a:spcAft>
-              <a:buClrTx/>
-              <a:buSzTx/>
-              <a:buFontTx/>
-              <a:buNone/>
-              <a:tabLst/>
-              <a:defRPr/>
-            </a:pPr>
-            <a:fld id="{BFF380C3-7D2B-43B9-A2FF-0551F6D200CF}" type="slidenum">
-              <a:rPr kumimoji="0" lang="en-US" sz="1200" b="0" i="0" u="none" strike="noStrike" kern="1200" cap="none" spc="0" normalizeH="0" baseline="0" noProof="0" smtClean="0">
-                <a:ln>
-                  <a:noFill/>
-                </a:ln>
-                <a:solidFill>
-                  <a:prstClr val="black"/>
-                </a:solidFill>
-                <a:effectLst/>
-                <a:uLnTx/>
-                <a:uFillTx/>
-                <a:latin typeface="Calibri" panose="020F0502020204030204"/>
-                <a:ea typeface="+mn-ea"/>
-                <a:cs typeface="+mn-cs"/>
-              </a:rPr>
-              <a:pPr marL="0" marR="0" lvl="0" indent="0" algn="r" defTabSz="1219170" rtl="0" eaLnBrk="1" fontAlgn="auto" latinLnBrk="0" hangingPunct="1">
-                <a:lnSpc>
-                  <a:spcPct val="100000"/>
-                </a:lnSpc>
-                <a:spcBef>
-                  <a:spcPts val="0"/>
-                </a:spcBef>
-                <a:spcAft>
-                  <a:spcPts val="0"/>
-                </a:spcAft>
-                <a:buClrTx/>
-                <a:buSzTx/>
-                <a:buFontTx/>
-                <a:buNone/>
-                <a:tabLst/>
-                <a:defRPr/>
-              </a:pPr>
-              <a:t>9</a:t>
-            </a:fld>
-            <a:endParaRPr kumimoji="0" lang="en-US" sz="1200" b="0" i="0" u="none" strike="noStrike" kern="1200" cap="none" spc="0" normalizeH="0" baseline="0" noProof="0">
-              <a:ln>
-                <a:noFill/>
-              </a:ln>
-              <a:solidFill>
-                <a:prstClr val="black"/>
-              </a:solidFill>
-              <a:effectLst/>
-              <a:uLnTx/>
-              <a:uFillTx/>
-              <a:latin typeface="Calibri" panose="020F0502020204030204"/>
-              <a:ea typeface="+mn-ea"/>
-              <a:cs typeface="+mn-cs"/>
-            </a:endParaRPr>
-          </a:p>
-        </p:txBody>
-      </p:sp>
-    </p:spTree>
-    <p:extLst>
-      <p:ext uri="{BB962C8B-B14F-4D97-AF65-F5344CB8AC3E}">
-        <p14:creationId xmlns:p14="http://schemas.microsoft.com/office/powerpoint/2010/main" val="1638200618"/>
       </p:ext>
     </p:extLst>
   </p:cSld>
@@ -7336,7 +7864,7 @@
             </a:r>
             <a:r>
               <a:rPr lang="en-US" altLang="zh-TW" sz="1800" dirty="0"/>
-              <a:t>2026/3/12</a:t>
+              <a:t>2026/3/16</a:t>
             </a:r>
           </a:p>
         </p:txBody>
@@ -7397,6 +7925,1813 @@
 </file>
 
 <file path=ppt/slides/slide10.xml><?xml version="1.0" encoding="utf-8"?>
+<p:sld xmlns:a="http://schemas.openxmlformats.org/drawingml/2006/main" xmlns:r="http://schemas.openxmlformats.org/officeDocument/2006/relationships" xmlns:p="http://schemas.openxmlformats.org/presentationml/2006/main">
+  <p:cSld>
+    <p:spTree>
+      <p:nvGrpSpPr>
+        <p:cNvPr id="1" name="">
+          <a:extLst>
+            <a:ext uri="{FF2B5EF4-FFF2-40B4-BE49-F238E27FC236}">
+              <a16:creationId xmlns:a16="http://schemas.microsoft.com/office/drawing/2014/main" id="{888CCBA7-0506-C670-1535-B08FD3DB7191}"/>
+            </a:ext>
+          </a:extLst>
+        </p:cNvPr>
+        <p:cNvGrpSpPr/>
+        <p:nvPr/>
+      </p:nvGrpSpPr>
+      <p:grpSpPr>
+        <a:xfrm>
+          <a:off x="0" y="0"/>
+          <a:ext cx="0" cy="0"/>
+          <a:chOff x="0" y="0"/>
+          <a:chExt cx="0" cy="0"/>
+        </a:xfrm>
+      </p:grpSpPr>
+      <p:sp>
+        <p:nvSpPr>
+          <p:cNvPr id="3" name="標題 2">
+            <a:extLst>
+              <a:ext uri="{FF2B5EF4-FFF2-40B4-BE49-F238E27FC236}">
+                <a16:creationId xmlns:a16="http://schemas.microsoft.com/office/drawing/2014/main" id="{28074E02-8E7D-C833-0BFF-C2993072FFA4}"/>
+              </a:ext>
+            </a:extLst>
+          </p:cNvPr>
+          <p:cNvSpPr>
+            <a:spLocks noGrp="1"/>
+          </p:cNvSpPr>
+          <p:nvPr>
+            <p:ph type="title"/>
+          </p:nvPr>
+        </p:nvSpPr>
+        <p:spPr>
+          <a:xfrm>
+            <a:off x="319892" y="107816"/>
+            <a:ext cx="11379200" cy="461659"/>
+          </a:xfrm>
+        </p:spPr>
+        <p:txBody>
+          <a:bodyPr>
+            <a:noAutofit/>
+          </a:bodyPr>
+          <a:lstStyle/>
+          <a:p>
+            <a:r>
+              <a:rPr lang="zh-TW" altLang="en-US" sz="2800" dirty="0"/>
+              <a:t>物料主檔管理 </a:t>
+            </a:r>
+            <a:r>
+              <a:rPr lang="en-US" altLang="zh-TW" sz="2800" dirty="0"/>
+              <a:t>(Material Master) - </a:t>
+            </a:r>
+            <a:r>
+              <a:rPr lang="zh-TW" altLang="en-US" sz="2800" dirty="0"/>
+              <a:t>限 </a:t>
+            </a:r>
+            <a:r>
+              <a:rPr lang="en-US" altLang="zh-TW" sz="2800" dirty="0"/>
+              <a:t>Level 1 &amp; 2</a:t>
+            </a:r>
+          </a:p>
+        </p:txBody>
+      </p:sp>
+      <p:sp>
+        <p:nvSpPr>
+          <p:cNvPr id="53" name="標題 2">
+            <a:extLst>
+              <a:ext uri="{FF2B5EF4-FFF2-40B4-BE49-F238E27FC236}">
+                <a16:creationId xmlns:a16="http://schemas.microsoft.com/office/drawing/2014/main" id="{DD32D693-B9CD-C627-7DB5-BC71BD85CCD9}"/>
+              </a:ext>
+            </a:extLst>
+          </p:cNvPr>
+          <p:cNvSpPr txBox="1">
+            <a:spLocks/>
+          </p:cNvSpPr>
+          <p:nvPr/>
+        </p:nvSpPr>
+        <p:spPr>
+          <a:xfrm>
+            <a:off x="217952" y="1200293"/>
+            <a:ext cx="5511319" cy="461659"/>
+          </a:xfrm>
+          <a:prstGeom prst="rect">
+            <a:avLst/>
+          </a:prstGeom>
+        </p:spPr>
+        <p:txBody>
+          <a:bodyPr vert="horz" lIns="0" tIns="45720" rIns="0" bIns="45720" rtlCol="0" anchor="t">
+            <a:noAutofit/>
+          </a:bodyPr>
+          <a:lstStyle>
+            <a:lvl1pPr algn="ctr" defTabSz="685783" rtl="0" eaLnBrk="1" latinLnBrk="0" hangingPunct="1">
+              <a:lnSpc>
+                <a:spcPct val="90000"/>
+              </a:lnSpc>
+              <a:spcBef>
+                <a:spcPct val="0"/>
+              </a:spcBef>
+              <a:buNone/>
+              <a:defRPr sz="2400" b="1" kern="1200">
+                <a:solidFill>
+                  <a:schemeClr val="tx2"/>
+                </a:solidFill>
+                <a:latin typeface="+mj-lt"/>
+                <a:ea typeface="+mj-ea"/>
+                <a:cs typeface="+mj-cs"/>
+              </a:defRPr>
+            </a:lvl1pPr>
+          </a:lstStyle>
+          <a:p>
+            <a:pPr algn="l"/>
+            <a:r>
+              <a:rPr lang="en-US" altLang="zh-TW" sz="1800" dirty="0">
+                <a:solidFill>
+                  <a:srgbClr val="0000FF"/>
+                </a:solidFill>
+              </a:rPr>
+              <a:t>1.</a:t>
+            </a:r>
+            <a:r>
+              <a:rPr lang="zh-TW" altLang="en-US" sz="1800" dirty="0">
+                <a:solidFill>
+                  <a:srgbClr val="0000FF"/>
+                </a:solidFill>
+              </a:rPr>
+              <a:t>編輯</a:t>
+            </a:r>
+            <a:r>
+              <a:rPr lang="en-US" altLang="zh-TW" sz="1800" dirty="0">
+                <a:solidFill>
+                  <a:srgbClr val="0000FF"/>
+                </a:solidFill>
+              </a:rPr>
+              <a:t>/</a:t>
+            </a:r>
+            <a:r>
+              <a:rPr lang="zh-TW" altLang="en-US" sz="1800" dirty="0">
+                <a:solidFill>
+                  <a:srgbClr val="0000FF"/>
+                </a:solidFill>
+              </a:rPr>
+              <a:t>刪除物料</a:t>
+            </a:r>
+          </a:p>
+        </p:txBody>
+      </p:sp>
+      <p:sp>
+        <p:nvSpPr>
+          <p:cNvPr id="22" name="標題 2">
+            <a:extLst>
+              <a:ext uri="{FF2B5EF4-FFF2-40B4-BE49-F238E27FC236}">
+                <a16:creationId xmlns:a16="http://schemas.microsoft.com/office/drawing/2014/main" id="{537198B6-A9EA-3949-A249-B7B54A2D2385}"/>
+              </a:ext>
+            </a:extLst>
+          </p:cNvPr>
+          <p:cNvSpPr txBox="1">
+            <a:spLocks/>
+          </p:cNvSpPr>
+          <p:nvPr/>
+        </p:nvSpPr>
+        <p:spPr>
+          <a:xfrm>
+            <a:off x="537039" y="1661952"/>
+            <a:ext cx="9192749" cy="1005790"/>
+          </a:xfrm>
+          <a:prstGeom prst="rect">
+            <a:avLst/>
+          </a:prstGeom>
+        </p:spPr>
+        <p:txBody>
+          <a:bodyPr vert="horz" lIns="0" tIns="45720" rIns="0" bIns="45720" rtlCol="0" anchor="t">
+            <a:noAutofit/>
+          </a:bodyPr>
+          <a:lstStyle>
+            <a:lvl1pPr algn="ctr" defTabSz="685783" rtl="0" eaLnBrk="1" latinLnBrk="0" hangingPunct="1">
+              <a:lnSpc>
+                <a:spcPct val="90000"/>
+              </a:lnSpc>
+              <a:spcBef>
+                <a:spcPct val="0"/>
+              </a:spcBef>
+              <a:buNone/>
+              <a:defRPr sz="2400" b="1" kern="1200">
+                <a:solidFill>
+                  <a:schemeClr val="tx2"/>
+                </a:solidFill>
+                <a:latin typeface="+mj-lt"/>
+                <a:ea typeface="+mj-ea"/>
+                <a:cs typeface="+mj-cs"/>
+              </a:defRPr>
+            </a:lvl1pPr>
+          </a:lstStyle>
+          <a:p>
+            <a:pPr marL="342900" indent="-342900" algn="l">
+              <a:buFont typeface="+mj-lt"/>
+              <a:buAutoNum type="arabicPeriod"/>
+            </a:pPr>
+            <a:r>
+              <a:rPr lang="zh-TW" altLang="en-US" sz="1800" dirty="0">
+                <a:solidFill>
+                  <a:srgbClr val="002060"/>
+                </a:solidFill>
+              </a:rPr>
+              <a:t>料號：不可更改。</a:t>
+            </a:r>
+            <a:endParaRPr lang="en-US" altLang="zh-TW" sz="1800" dirty="0">
+              <a:solidFill>
+                <a:srgbClr val="002060"/>
+              </a:solidFill>
+            </a:endParaRPr>
+          </a:p>
+          <a:p>
+            <a:pPr marL="342900" indent="-342900" algn="l">
+              <a:buFont typeface="+mj-lt"/>
+              <a:buAutoNum type="arabicPeriod"/>
+            </a:pPr>
+            <a:r>
+              <a:rPr lang="zh-TW" altLang="en-US" sz="1800" dirty="0">
+                <a:solidFill>
+                  <a:srgbClr val="002060"/>
+                </a:solidFill>
+              </a:rPr>
+              <a:t>品名 </a:t>
+            </a:r>
+            <a:r>
+              <a:rPr lang="en-US" altLang="zh-TW" sz="1800" dirty="0">
+                <a:solidFill>
+                  <a:srgbClr val="002060"/>
+                </a:solidFill>
+              </a:rPr>
+              <a:t>: </a:t>
+            </a:r>
+            <a:r>
+              <a:rPr lang="zh-TW" altLang="en-US" sz="1800" dirty="0">
+                <a:solidFill>
+                  <a:srgbClr val="002060"/>
+                </a:solidFill>
+              </a:rPr>
+              <a:t>自定義名稱。</a:t>
+            </a:r>
+            <a:endParaRPr lang="en-US" altLang="zh-TW" sz="1800" dirty="0">
+              <a:solidFill>
+                <a:srgbClr val="002060"/>
+              </a:solidFill>
+            </a:endParaRPr>
+          </a:p>
+          <a:p>
+            <a:pPr marL="342900" indent="-342900" algn="l">
+              <a:buFont typeface="+mj-lt"/>
+              <a:buAutoNum type="arabicPeriod"/>
+            </a:pPr>
+            <a:r>
+              <a:rPr lang="zh-TW" altLang="en-US" sz="1800" dirty="0">
+                <a:solidFill>
+                  <a:srgbClr val="002060"/>
+                </a:solidFill>
+              </a:rPr>
+              <a:t>規格</a:t>
+            </a:r>
+            <a:r>
+              <a:rPr lang="en-US" altLang="zh-TW" sz="1800" dirty="0">
+                <a:solidFill>
+                  <a:srgbClr val="002060"/>
+                </a:solidFill>
+              </a:rPr>
+              <a:t>/</a:t>
+            </a:r>
+            <a:r>
+              <a:rPr lang="zh-TW" altLang="en-US" sz="1800" dirty="0">
+                <a:solidFill>
+                  <a:srgbClr val="002060"/>
+                </a:solidFill>
+              </a:rPr>
+              <a:t>型號 </a:t>
+            </a:r>
+            <a:r>
+              <a:rPr lang="en-US" altLang="zh-TW" sz="1800" dirty="0">
+                <a:solidFill>
+                  <a:srgbClr val="002060"/>
+                </a:solidFill>
+              </a:rPr>
+              <a:t>: </a:t>
+            </a:r>
+            <a:r>
+              <a:rPr lang="zh-TW" altLang="en-US" sz="1800" dirty="0">
+                <a:solidFill>
+                  <a:srgbClr val="002060"/>
+                </a:solidFill>
+              </a:rPr>
+              <a:t>自定義敘述。</a:t>
+            </a:r>
+            <a:endParaRPr lang="en-US" altLang="zh-TW" sz="1800" dirty="0">
+              <a:solidFill>
+                <a:srgbClr val="002060"/>
+              </a:solidFill>
+            </a:endParaRPr>
+          </a:p>
+          <a:p>
+            <a:pPr marL="342900" indent="-342900" algn="l">
+              <a:buFont typeface="+mj-lt"/>
+              <a:buAutoNum type="arabicPeriod"/>
+            </a:pPr>
+            <a:r>
+              <a:rPr lang="zh-TW" altLang="en-US" sz="1800" dirty="0">
+                <a:solidFill>
+                  <a:srgbClr val="002060"/>
+                </a:solidFill>
+              </a:rPr>
+              <a:t>安全庫存：設定此零件的最低安全總量。</a:t>
+            </a:r>
+            <a:endParaRPr lang="en-US" altLang="zh-TW" sz="1800" dirty="0">
+              <a:solidFill>
+                <a:srgbClr val="002060"/>
+              </a:solidFill>
+            </a:endParaRPr>
+          </a:p>
+          <a:p>
+            <a:pPr marL="342900" indent="-342900" algn="l">
+              <a:buFont typeface="+mj-lt"/>
+              <a:buAutoNum type="arabicPeriod"/>
+            </a:pPr>
+            <a:r>
+              <a:rPr lang="zh-TW" altLang="en-US" sz="1800" dirty="0">
+                <a:solidFill>
+                  <a:srgbClr val="002060"/>
+                </a:solidFill>
+              </a:rPr>
+              <a:t>採購交期：設定補貨所需天數。</a:t>
+            </a:r>
+            <a:endParaRPr lang="en-US" altLang="zh-TW" sz="1800" dirty="0">
+              <a:solidFill>
+                <a:srgbClr val="002060"/>
+              </a:solidFill>
+            </a:endParaRPr>
+          </a:p>
+          <a:p>
+            <a:pPr marL="342900" indent="-342900" algn="l">
+              <a:buFont typeface="+mj-lt"/>
+              <a:buAutoNum type="arabicPeriod"/>
+            </a:pPr>
+            <a:r>
+              <a:rPr lang="zh-TW" altLang="en-US" sz="1800" dirty="0">
+                <a:solidFill>
+                  <a:srgbClr val="002060"/>
+                </a:solidFill>
+              </a:rPr>
+              <a:t>主要供應商 </a:t>
+            </a:r>
+            <a:r>
+              <a:rPr lang="en-US" altLang="zh-TW" sz="1800" dirty="0">
+                <a:solidFill>
+                  <a:srgbClr val="002060"/>
+                </a:solidFill>
+              </a:rPr>
+              <a:t>:</a:t>
+            </a:r>
+            <a:r>
+              <a:rPr lang="zh-TW" altLang="en-US" sz="1800" dirty="0">
+                <a:solidFill>
+                  <a:srgbClr val="002060"/>
+                </a:solidFill>
+              </a:rPr>
+              <a:t> 供應商名稱。</a:t>
+            </a:r>
+            <a:endParaRPr lang="en-US" altLang="zh-TW" sz="1800" dirty="0">
+              <a:solidFill>
+                <a:srgbClr val="002060"/>
+              </a:solidFill>
+            </a:endParaRPr>
+          </a:p>
+          <a:p>
+            <a:pPr marL="342900" indent="-342900" algn="l">
+              <a:buFont typeface="+mj-lt"/>
+              <a:buAutoNum type="arabicPeriod"/>
+            </a:pPr>
+            <a:r>
+              <a:rPr lang="zh-TW" altLang="en-US" sz="1800" dirty="0">
+                <a:solidFill>
+                  <a:srgbClr val="002060"/>
+                </a:solidFill>
+              </a:rPr>
+              <a:t>製造商 </a:t>
+            </a:r>
+            <a:r>
+              <a:rPr lang="en-US" altLang="zh-TW" sz="1800" dirty="0">
+                <a:solidFill>
+                  <a:srgbClr val="002060"/>
+                </a:solidFill>
+              </a:rPr>
+              <a:t>:</a:t>
+            </a:r>
+            <a:r>
+              <a:rPr lang="zh-TW" altLang="en-US" sz="1800" dirty="0">
+                <a:solidFill>
+                  <a:srgbClr val="002060"/>
+                </a:solidFill>
+              </a:rPr>
+              <a:t> 製造商名稱。</a:t>
+            </a:r>
+            <a:endParaRPr lang="en-US" altLang="zh-TW" sz="1800" dirty="0">
+              <a:solidFill>
+                <a:srgbClr val="002060"/>
+              </a:solidFill>
+            </a:endParaRPr>
+          </a:p>
+          <a:p>
+            <a:pPr marL="342900" indent="-342900" algn="l">
+              <a:buFont typeface="+mj-lt"/>
+              <a:buAutoNum type="arabicPeriod"/>
+            </a:pPr>
+            <a:r>
+              <a:rPr lang="zh-TW" altLang="en-US" sz="1800" dirty="0">
+                <a:solidFill>
+                  <a:srgbClr val="002060"/>
+                </a:solidFill>
+              </a:rPr>
+              <a:t>期初在庫數量 </a:t>
+            </a:r>
+            <a:r>
+              <a:rPr lang="en-US" altLang="zh-TW" sz="1800" dirty="0">
+                <a:solidFill>
+                  <a:srgbClr val="002060"/>
+                </a:solidFill>
+              </a:rPr>
+              <a:t>: </a:t>
+            </a:r>
+            <a:r>
+              <a:rPr lang="zh-TW" altLang="en-US" sz="1800" dirty="0">
+                <a:solidFill>
+                  <a:srgbClr val="002060"/>
+                </a:solidFill>
+              </a:rPr>
+              <a:t>目前庫存</a:t>
+            </a:r>
+            <a:endParaRPr lang="en-US" altLang="zh-TW" sz="1800" dirty="0">
+              <a:solidFill>
+                <a:srgbClr val="002060"/>
+              </a:solidFill>
+            </a:endParaRPr>
+          </a:p>
+          <a:p>
+            <a:pPr marL="342900" indent="-342900" algn="l">
+              <a:buFont typeface="+mj-lt"/>
+              <a:buAutoNum type="arabicPeriod"/>
+            </a:pPr>
+            <a:r>
+              <a:rPr lang="zh-TW" altLang="en-US" sz="1800" dirty="0">
+                <a:solidFill>
+                  <a:srgbClr val="002060"/>
+                </a:solidFill>
+              </a:rPr>
+              <a:t>附件 </a:t>
+            </a:r>
+            <a:r>
+              <a:rPr lang="en-US" altLang="zh-TW" sz="1800" dirty="0">
+                <a:solidFill>
+                  <a:srgbClr val="002060"/>
+                </a:solidFill>
+              </a:rPr>
+              <a:t>:</a:t>
+            </a:r>
+            <a:r>
+              <a:rPr lang="zh-TW" altLang="en-US" sz="1800" dirty="0">
+                <a:solidFill>
+                  <a:srgbClr val="002060"/>
+                </a:solidFill>
+              </a:rPr>
+              <a:t> 僅支援</a:t>
+            </a:r>
+            <a:r>
+              <a:rPr lang="en-US" altLang="zh-TW" sz="1800" dirty="0">
+                <a:solidFill>
+                  <a:srgbClr val="002060"/>
+                </a:solidFill>
+              </a:rPr>
+              <a:t>PDF</a:t>
+            </a:r>
+            <a:r>
+              <a:rPr lang="zh-TW" altLang="en-US" sz="1800" dirty="0">
+                <a:solidFill>
+                  <a:srgbClr val="002060"/>
+                </a:solidFill>
+              </a:rPr>
+              <a:t>檔，一個料號最多兩個附件</a:t>
+            </a:r>
+          </a:p>
+        </p:txBody>
+      </p:sp>
+      <p:sp>
+        <p:nvSpPr>
+          <p:cNvPr id="2" name="標題 2">
+            <a:extLst>
+              <a:ext uri="{FF2B5EF4-FFF2-40B4-BE49-F238E27FC236}">
+                <a16:creationId xmlns:a16="http://schemas.microsoft.com/office/drawing/2014/main" id="{1E1055AF-5024-F161-5AF8-BD0BD30461A0}"/>
+              </a:ext>
+            </a:extLst>
+          </p:cNvPr>
+          <p:cNvSpPr txBox="1">
+            <a:spLocks/>
+          </p:cNvSpPr>
+          <p:nvPr/>
+        </p:nvSpPr>
+        <p:spPr>
+          <a:xfrm>
+            <a:off x="537039" y="546476"/>
+            <a:ext cx="11162053" cy="1005790"/>
+          </a:xfrm>
+          <a:prstGeom prst="rect">
+            <a:avLst/>
+          </a:prstGeom>
+        </p:spPr>
+        <p:txBody>
+          <a:bodyPr vert="horz" lIns="0" tIns="45720" rIns="0" bIns="45720" rtlCol="0" anchor="t">
+            <a:noAutofit/>
+          </a:bodyPr>
+          <a:lstStyle>
+            <a:lvl1pPr algn="ctr" defTabSz="685783" rtl="0" eaLnBrk="1" latinLnBrk="0" hangingPunct="1">
+              <a:lnSpc>
+                <a:spcPct val="90000"/>
+              </a:lnSpc>
+              <a:spcBef>
+                <a:spcPct val="0"/>
+              </a:spcBef>
+              <a:buNone/>
+              <a:defRPr sz="2400" b="1" kern="1200">
+                <a:solidFill>
+                  <a:schemeClr val="tx2"/>
+                </a:solidFill>
+                <a:latin typeface="+mj-lt"/>
+                <a:ea typeface="+mj-ea"/>
+                <a:cs typeface="+mj-cs"/>
+              </a:defRPr>
+            </a:lvl1pPr>
+          </a:lstStyle>
+          <a:p>
+            <a:pPr marL="285750" indent="-285750" algn="l">
+              <a:buFont typeface="Wingdings" panose="05000000000000000000" pitchFamily="2" charset="2"/>
+              <a:buChar char="u"/>
+            </a:pPr>
+            <a:r>
+              <a:rPr lang="zh-TW" altLang="en-US" sz="1800" dirty="0">
+                <a:solidFill>
+                  <a:srgbClr val="002060"/>
+                </a:solidFill>
+              </a:rPr>
+              <a:t>編輯或刪除零件的基礎資訊，在庫存查詢中對要編輯或刪除的物料點右鍵即可出現選單。</a:t>
+            </a:r>
+          </a:p>
+        </p:txBody>
+      </p:sp>
+      <p:pic>
+        <p:nvPicPr>
+          <p:cNvPr id="5" name="圖片 4" descr="TES&#10;&#10;AI 產生的內容可能不正確。">
+            <a:extLst>
+              <a:ext uri="{FF2B5EF4-FFF2-40B4-BE49-F238E27FC236}">
+                <a16:creationId xmlns:a16="http://schemas.microsoft.com/office/drawing/2014/main" id="{2815E343-2EDF-B1A2-25BB-25D5C0BEC1BB}"/>
+              </a:ext>
+            </a:extLst>
+          </p:cNvPr>
+          <p:cNvPicPr>
+            <a:picLocks noChangeAspect="1"/>
+          </p:cNvPicPr>
+          <p:nvPr/>
+        </p:nvPicPr>
+        <p:blipFill>
+          <a:blip r:embed="rId3"/>
+          <a:stretch>
+            <a:fillRect/>
+          </a:stretch>
+        </p:blipFill>
+        <p:spPr>
+          <a:xfrm>
+            <a:off x="5005633" y="4148812"/>
+            <a:ext cx="2507084" cy="2379497"/>
+          </a:xfrm>
+          <a:prstGeom prst="rect">
+            <a:avLst/>
+          </a:prstGeom>
+        </p:spPr>
+      </p:pic>
+      <p:pic>
+        <p:nvPicPr>
+          <p:cNvPr id="8" name="圖片 7" descr="The image shows a software interface with fields for product details, including barcode, product number, product code, inventory, purchase cycle, supplier, manufacturer, initial inventory, and a section for attaching up to two PDF documents.&#10;&#10;AI 產生的內容可能不正確。">
+            <a:extLst>
+              <a:ext uri="{FF2B5EF4-FFF2-40B4-BE49-F238E27FC236}">
+                <a16:creationId xmlns:a16="http://schemas.microsoft.com/office/drawing/2014/main" id="{401EEA9F-A006-0C37-EB86-444A75DD97F2}"/>
+              </a:ext>
+            </a:extLst>
+          </p:cNvPr>
+          <p:cNvPicPr>
+            <a:picLocks noChangeAspect="1"/>
+          </p:cNvPicPr>
+          <p:nvPr/>
+        </p:nvPicPr>
+        <p:blipFill>
+          <a:blip r:embed="rId4"/>
+          <a:stretch>
+            <a:fillRect/>
+          </a:stretch>
+        </p:blipFill>
+        <p:spPr>
+          <a:xfrm>
+            <a:off x="7589538" y="1008135"/>
+            <a:ext cx="4280500" cy="5745638"/>
+          </a:xfrm>
+          <a:prstGeom prst="rect">
+            <a:avLst/>
+          </a:prstGeom>
+        </p:spPr>
+      </p:pic>
+      <p:sp>
+        <p:nvSpPr>
+          <p:cNvPr id="9" name="標題 2">
+            <a:extLst>
+              <a:ext uri="{FF2B5EF4-FFF2-40B4-BE49-F238E27FC236}">
+                <a16:creationId xmlns:a16="http://schemas.microsoft.com/office/drawing/2014/main" id="{5B29FD1B-F5FB-0EC9-D33C-F7F83BA4F595}"/>
+              </a:ext>
+            </a:extLst>
+          </p:cNvPr>
+          <p:cNvSpPr txBox="1">
+            <a:spLocks/>
+          </p:cNvSpPr>
+          <p:nvPr/>
+        </p:nvSpPr>
+        <p:spPr>
+          <a:xfrm>
+            <a:off x="217952" y="4148812"/>
+            <a:ext cx="5511319" cy="1224466"/>
+          </a:xfrm>
+          <a:prstGeom prst="rect">
+            <a:avLst/>
+          </a:prstGeom>
+        </p:spPr>
+        <p:txBody>
+          <a:bodyPr vert="horz" lIns="0" tIns="45720" rIns="0" bIns="45720" rtlCol="0" anchor="t">
+            <a:noAutofit/>
+          </a:bodyPr>
+          <a:lstStyle>
+            <a:lvl1pPr algn="ctr" defTabSz="685783" rtl="0" eaLnBrk="1" latinLnBrk="0" hangingPunct="1">
+              <a:lnSpc>
+                <a:spcPct val="90000"/>
+              </a:lnSpc>
+              <a:spcBef>
+                <a:spcPct val="0"/>
+              </a:spcBef>
+              <a:buNone/>
+              <a:defRPr sz="2400" b="1" kern="1200">
+                <a:solidFill>
+                  <a:schemeClr val="tx2"/>
+                </a:solidFill>
+                <a:latin typeface="+mj-lt"/>
+                <a:ea typeface="+mj-ea"/>
+                <a:cs typeface="+mj-cs"/>
+              </a:defRPr>
+            </a:lvl1pPr>
+          </a:lstStyle>
+          <a:p>
+            <a:pPr algn="l"/>
+            <a:r>
+              <a:rPr lang="en-US" altLang="zh-TW" sz="1800" dirty="0">
+                <a:solidFill>
+                  <a:srgbClr val="0000FF"/>
+                </a:solidFill>
+              </a:rPr>
+              <a:t>2.</a:t>
+            </a:r>
+            <a:r>
+              <a:rPr lang="zh-TW" altLang="en-US" sz="1800" dirty="0">
+                <a:solidFill>
+                  <a:srgbClr val="0000FF"/>
+                </a:solidFill>
+              </a:rPr>
+              <a:t>領料</a:t>
+            </a:r>
+          </a:p>
+        </p:txBody>
+      </p:sp>
+      <p:sp>
+        <p:nvSpPr>
+          <p:cNvPr id="11" name="標題 2">
+            <a:extLst>
+              <a:ext uri="{FF2B5EF4-FFF2-40B4-BE49-F238E27FC236}">
+                <a16:creationId xmlns:a16="http://schemas.microsoft.com/office/drawing/2014/main" id="{F180A0E3-15B1-4F5E-274B-6D1D616FA348}"/>
+              </a:ext>
+            </a:extLst>
+          </p:cNvPr>
+          <p:cNvSpPr txBox="1">
+            <a:spLocks/>
+          </p:cNvSpPr>
+          <p:nvPr/>
+        </p:nvSpPr>
+        <p:spPr>
+          <a:xfrm>
+            <a:off x="537039" y="4610471"/>
+            <a:ext cx="9192749" cy="1005790"/>
+          </a:xfrm>
+          <a:prstGeom prst="rect">
+            <a:avLst/>
+          </a:prstGeom>
+        </p:spPr>
+        <p:txBody>
+          <a:bodyPr vert="horz" lIns="0" tIns="45720" rIns="0" bIns="45720" rtlCol="0" anchor="t">
+            <a:noAutofit/>
+          </a:bodyPr>
+          <a:lstStyle>
+            <a:lvl1pPr algn="ctr" defTabSz="685783" rtl="0" eaLnBrk="1" latinLnBrk="0" hangingPunct="1">
+              <a:lnSpc>
+                <a:spcPct val="90000"/>
+              </a:lnSpc>
+              <a:spcBef>
+                <a:spcPct val="0"/>
+              </a:spcBef>
+              <a:buNone/>
+              <a:defRPr sz="2400" b="1" kern="1200">
+                <a:solidFill>
+                  <a:schemeClr val="tx2"/>
+                </a:solidFill>
+                <a:latin typeface="+mj-lt"/>
+                <a:ea typeface="+mj-ea"/>
+                <a:cs typeface="+mj-cs"/>
+              </a:defRPr>
+            </a:lvl1pPr>
+          </a:lstStyle>
+          <a:p>
+            <a:pPr marL="342900" indent="-342900" algn="l">
+              <a:buFont typeface="+mj-lt"/>
+              <a:buAutoNum type="arabicPeriod"/>
+            </a:pPr>
+            <a:r>
+              <a:rPr lang="zh-TW" altLang="en-US" sz="1800" dirty="0">
+                <a:solidFill>
+                  <a:srgbClr val="002060"/>
+                </a:solidFill>
+              </a:rPr>
+              <a:t>點擊領料會自動將料號帶入領料視窗。</a:t>
+            </a:r>
+            <a:endParaRPr lang="en-US" altLang="zh-TW" sz="1800" dirty="0">
+              <a:solidFill>
+                <a:srgbClr val="002060"/>
+              </a:solidFill>
+            </a:endParaRPr>
+          </a:p>
+        </p:txBody>
+      </p:sp>
+    </p:spTree>
+    <p:extLst>
+      <p:ext uri="{BB962C8B-B14F-4D97-AF65-F5344CB8AC3E}">
+        <p14:creationId xmlns:p14="http://schemas.microsoft.com/office/powerpoint/2010/main" val="319827598"/>
+      </p:ext>
+    </p:extLst>
+  </p:cSld>
+  <p:clrMapOvr>
+    <a:masterClrMapping/>
+  </p:clrMapOvr>
+</p:sld>
+</file>
+
+<file path=ppt/slides/slide11.xml><?xml version="1.0" encoding="utf-8"?>
+<p:sld xmlns:a="http://schemas.openxmlformats.org/drawingml/2006/main" xmlns:r="http://schemas.openxmlformats.org/officeDocument/2006/relationships" xmlns:p="http://schemas.openxmlformats.org/presentationml/2006/main">
+  <p:cSld>
+    <p:spTree>
+      <p:nvGrpSpPr>
+        <p:cNvPr id="1" name="">
+          <a:extLst>
+            <a:ext uri="{FF2B5EF4-FFF2-40B4-BE49-F238E27FC236}">
+              <a16:creationId xmlns:a16="http://schemas.microsoft.com/office/drawing/2014/main" id="{9087C49E-ACCC-CC16-7516-4D97DD300EFB}"/>
+            </a:ext>
+          </a:extLst>
+        </p:cNvPr>
+        <p:cNvGrpSpPr/>
+        <p:nvPr/>
+      </p:nvGrpSpPr>
+      <p:grpSpPr>
+        <a:xfrm>
+          <a:off x="0" y="0"/>
+          <a:ext cx="0" cy="0"/>
+          <a:chOff x="0" y="0"/>
+          <a:chExt cx="0" cy="0"/>
+        </a:xfrm>
+      </p:grpSpPr>
+      <p:pic>
+        <p:nvPicPr>
+          <p:cNvPr id="7" name="圖片 6" descr="The image displays a table with columns for stock check, key words, product name, model number, supplier, manufacturer, warehouse, and stock levels, with two product entries TEST1 and TEST2.&#10;&#10;AI 產生的內容可能不正確。">
+            <a:extLst>
+              <a:ext uri="{FF2B5EF4-FFF2-40B4-BE49-F238E27FC236}">
+                <a16:creationId xmlns:a16="http://schemas.microsoft.com/office/drawing/2014/main" id="{2D127AB8-9627-C403-B136-CC266976870A}"/>
+              </a:ext>
+            </a:extLst>
+          </p:cNvPr>
+          <p:cNvPicPr>
+            <a:picLocks noChangeAspect="1"/>
+          </p:cNvPicPr>
+          <p:nvPr/>
+        </p:nvPicPr>
+        <p:blipFill>
+          <a:blip r:embed="rId3"/>
+          <a:stretch>
+            <a:fillRect/>
+          </a:stretch>
+        </p:blipFill>
+        <p:spPr>
+          <a:xfrm>
+            <a:off x="290584" y="3429000"/>
+            <a:ext cx="11654961" cy="2339674"/>
+          </a:xfrm>
+          <a:prstGeom prst="rect">
+            <a:avLst/>
+          </a:prstGeom>
+        </p:spPr>
+      </p:pic>
+      <p:sp>
+        <p:nvSpPr>
+          <p:cNvPr id="3" name="標題 2">
+            <a:extLst>
+              <a:ext uri="{FF2B5EF4-FFF2-40B4-BE49-F238E27FC236}">
+                <a16:creationId xmlns:a16="http://schemas.microsoft.com/office/drawing/2014/main" id="{B7F30EA8-14CA-0337-626E-936AC979D801}"/>
+              </a:ext>
+            </a:extLst>
+          </p:cNvPr>
+          <p:cNvSpPr>
+            <a:spLocks noGrp="1"/>
+          </p:cNvSpPr>
+          <p:nvPr>
+            <p:ph type="title"/>
+          </p:nvPr>
+        </p:nvSpPr>
+        <p:spPr>
+          <a:xfrm>
+            <a:off x="319892" y="107816"/>
+            <a:ext cx="11379200" cy="461659"/>
+          </a:xfrm>
+        </p:spPr>
+        <p:txBody>
+          <a:bodyPr>
+            <a:noAutofit/>
+          </a:bodyPr>
+          <a:lstStyle/>
+          <a:p>
+            <a:r>
+              <a:rPr lang="zh-TW" altLang="en-US" sz="2800" dirty="0"/>
+              <a:t>庫存查詢看板 </a:t>
+            </a:r>
+            <a:r>
+              <a:rPr lang="en-US" altLang="zh-TW" sz="2800" dirty="0"/>
+              <a:t>(Inventory Monitoring)</a:t>
+            </a:r>
+          </a:p>
+        </p:txBody>
+      </p:sp>
+      <p:sp>
+        <p:nvSpPr>
+          <p:cNvPr id="53" name="標題 2">
+            <a:extLst>
+              <a:ext uri="{FF2B5EF4-FFF2-40B4-BE49-F238E27FC236}">
+                <a16:creationId xmlns:a16="http://schemas.microsoft.com/office/drawing/2014/main" id="{B596482B-6D93-EDE6-9CE4-8F0026113B93}"/>
+              </a:ext>
+            </a:extLst>
+          </p:cNvPr>
+          <p:cNvSpPr txBox="1">
+            <a:spLocks/>
+          </p:cNvSpPr>
+          <p:nvPr/>
+        </p:nvSpPr>
+        <p:spPr>
+          <a:xfrm>
+            <a:off x="217952" y="1200293"/>
+            <a:ext cx="5511319" cy="461659"/>
+          </a:xfrm>
+          <a:prstGeom prst="rect">
+            <a:avLst/>
+          </a:prstGeom>
+        </p:spPr>
+        <p:txBody>
+          <a:bodyPr vert="horz" lIns="0" tIns="45720" rIns="0" bIns="45720" rtlCol="0" anchor="t">
+            <a:noAutofit/>
+          </a:bodyPr>
+          <a:lstStyle>
+            <a:lvl1pPr algn="ctr" defTabSz="685783" rtl="0" eaLnBrk="1" latinLnBrk="0" hangingPunct="1">
+              <a:lnSpc>
+                <a:spcPct val="90000"/>
+              </a:lnSpc>
+              <a:spcBef>
+                <a:spcPct val="0"/>
+              </a:spcBef>
+              <a:buNone/>
+              <a:defRPr sz="2400" b="1" kern="1200">
+                <a:solidFill>
+                  <a:schemeClr val="tx2"/>
+                </a:solidFill>
+                <a:latin typeface="+mj-lt"/>
+                <a:ea typeface="+mj-ea"/>
+                <a:cs typeface="+mj-cs"/>
+              </a:defRPr>
+            </a:lvl1pPr>
+          </a:lstStyle>
+          <a:p>
+            <a:pPr algn="l"/>
+            <a:r>
+              <a:rPr lang="en-US" altLang="zh-TW" sz="1800" dirty="0">
+                <a:solidFill>
+                  <a:srgbClr val="0000FF"/>
+                </a:solidFill>
+              </a:rPr>
+              <a:t>1.</a:t>
+            </a:r>
+            <a:r>
+              <a:rPr lang="zh-TW" altLang="en-US" sz="1800" dirty="0">
+                <a:solidFill>
+                  <a:srgbClr val="0000FF"/>
+                </a:solidFill>
+              </a:rPr>
+              <a:t>庫存查詢</a:t>
+            </a:r>
+          </a:p>
+        </p:txBody>
+      </p:sp>
+      <p:sp>
+        <p:nvSpPr>
+          <p:cNvPr id="22" name="標題 2">
+            <a:extLst>
+              <a:ext uri="{FF2B5EF4-FFF2-40B4-BE49-F238E27FC236}">
+                <a16:creationId xmlns:a16="http://schemas.microsoft.com/office/drawing/2014/main" id="{F4FEE48A-F7EC-3CCD-4683-59A177514EE8}"/>
+              </a:ext>
+            </a:extLst>
+          </p:cNvPr>
+          <p:cNvSpPr txBox="1">
+            <a:spLocks/>
+          </p:cNvSpPr>
+          <p:nvPr/>
+        </p:nvSpPr>
+        <p:spPr>
+          <a:xfrm>
+            <a:off x="537039" y="1661952"/>
+            <a:ext cx="9192749" cy="1005790"/>
+          </a:xfrm>
+          <a:prstGeom prst="rect">
+            <a:avLst/>
+          </a:prstGeom>
+        </p:spPr>
+        <p:txBody>
+          <a:bodyPr vert="horz" lIns="0" tIns="45720" rIns="0" bIns="45720" rtlCol="0" anchor="t">
+            <a:noAutofit/>
+          </a:bodyPr>
+          <a:lstStyle>
+            <a:lvl1pPr algn="ctr" defTabSz="685783" rtl="0" eaLnBrk="1" latinLnBrk="0" hangingPunct="1">
+              <a:lnSpc>
+                <a:spcPct val="90000"/>
+              </a:lnSpc>
+              <a:spcBef>
+                <a:spcPct val="0"/>
+              </a:spcBef>
+              <a:buNone/>
+              <a:defRPr sz="2400" b="1" kern="1200">
+                <a:solidFill>
+                  <a:schemeClr val="tx2"/>
+                </a:solidFill>
+                <a:latin typeface="+mj-lt"/>
+                <a:ea typeface="+mj-ea"/>
+                <a:cs typeface="+mj-cs"/>
+              </a:defRPr>
+            </a:lvl1pPr>
+          </a:lstStyle>
+          <a:p>
+            <a:pPr marL="342900" indent="-342900" algn="l">
+              <a:buAutoNum type="arabicPeriod"/>
+            </a:pPr>
+            <a:r>
+              <a:rPr lang="zh-TW" altLang="en-US" sz="1800" dirty="0">
+                <a:solidFill>
+                  <a:srgbClr val="002060"/>
+                </a:solidFill>
+              </a:rPr>
+              <a:t>輸入關鍵字按查詢可搜尋物料名稱、規格</a:t>
+            </a:r>
+            <a:r>
+              <a:rPr lang="en-US" altLang="zh-TW" sz="1800" dirty="0">
+                <a:solidFill>
+                  <a:srgbClr val="002060"/>
+                </a:solidFill>
+              </a:rPr>
+              <a:t>/</a:t>
+            </a:r>
+            <a:r>
+              <a:rPr lang="zh-TW" altLang="en-US" sz="1800" dirty="0">
+                <a:solidFill>
+                  <a:srgbClr val="002060"/>
+                </a:solidFill>
+              </a:rPr>
+              <a:t>型號、料號。</a:t>
+            </a:r>
+            <a:endParaRPr lang="en-US" altLang="zh-TW" sz="1800" dirty="0">
+              <a:solidFill>
+                <a:srgbClr val="002060"/>
+              </a:solidFill>
+            </a:endParaRPr>
+          </a:p>
+          <a:p>
+            <a:pPr marL="342900" indent="-342900" algn="l">
+              <a:buAutoNum type="arabicPeriod"/>
+            </a:pPr>
+            <a:r>
+              <a:rPr lang="zh-TW" altLang="en-US" sz="1800" dirty="0">
+                <a:solidFill>
+                  <a:srgbClr val="002060"/>
+                </a:solidFill>
+              </a:rPr>
+              <a:t>按顯示全部可以顯示所有庫存</a:t>
+            </a:r>
+            <a:endParaRPr lang="en-US" altLang="zh-TW" sz="1800" dirty="0">
+              <a:solidFill>
+                <a:srgbClr val="002060"/>
+              </a:solidFill>
+            </a:endParaRPr>
+          </a:p>
+        </p:txBody>
+      </p:sp>
+      <p:sp>
+        <p:nvSpPr>
+          <p:cNvPr id="2" name="標題 2">
+            <a:extLst>
+              <a:ext uri="{FF2B5EF4-FFF2-40B4-BE49-F238E27FC236}">
+                <a16:creationId xmlns:a16="http://schemas.microsoft.com/office/drawing/2014/main" id="{4289CD50-EC92-01C2-856A-A0B1D73CC3CA}"/>
+              </a:ext>
+            </a:extLst>
+          </p:cNvPr>
+          <p:cNvSpPr txBox="1">
+            <a:spLocks/>
+          </p:cNvSpPr>
+          <p:nvPr/>
+        </p:nvSpPr>
+        <p:spPr>
+          <a:xfrm>
+            <a:off x="537039" y="546476"/>
+            <a:ext cx="11162053" cy="1005790"/>
+          </a:xfrm>
+          <a:prstGeom prst="rect">
+            <a:avLst/>
+          </a:prstGeom>
+        </p:spPr>
+        <p:txBody>
+          <a:bodyPr vert="horz" lIns="0" tIns="45720" rIns="0" bIns="45720" rtlCol="0" anchor="t">
+            <a:noAutofit/>
+          </a:bodyPr>
+          <a:lstStyle>
+            <a:lvl1pPr algn="ctr" defTabSz="685783" rtl="0" eaLnBrk="1" latinLnBrk="0" hangingPunct="1">
+              <a:lnSpc>
+                <a:spcPct val="90000"/>
+              </a:lnSpc>
+              <a:spcBef>
+                <a:spcPct val="0"/>
+              </a:spcBef>
+              <a:buNone/>
+              <a:defRPr sz="2400" b="1" kern="1200">
+                <a:solidFill>
+                  <a:schemeClr val="tx2"/>
+                </a:solidFill>
+                <a:latin typeface="+mj-lt"/>
+                <a:ea typeface="+mj-ea"/>
+                <a:cs typeface="+mj-cs"/>
+              </a:defRPr>
+            </a:lvl1pPr>
+          </a:lstStyle>
+          <a:p>
+            <a:pPr marL="285750" indent="-285750" algn="l">
+              <a:buFont typeface="Wingdings" panose="05000000000000000000" pitchFamily="2" charset="2"/>
+              <a:buChar char="u"/>
+            </a:pPr>
+            <a:r>
+              <a:rPr lang="zh-TW" altLang="en-US" sz="1800" dirty="0">
+                <a:solidFill>
+                  <a:srgbClr val="002060"/>
+                </a:solidFill>
+              </a:rPr>
+              <a:t>用來查詢庫存清單。</a:t>
+            </a:r>
+            <a:endParaRPr lang="en-US" altLang="zh-TW" sz="1800" dirty="0">
+              <a:solidFill>
+                <a:srgbClr val="002060"/>
+              </a:solidFill>
+            </a:endParaRPr>
+          </a:p>
+        </p:txBody>
+      </p:sp>
+      <p:grpSp>
+        <p:nvGrpSpPr>
+          <p:cNvPr id="6" name="群組 5">
+            <a:extLst>
+              <a:ext uri="{FF2B5EF4-FFF2-40B4-BE49-F238E27FC236}">
+                <a16:creationId xmlns:a16="http://schemas.microsoft.com/office/drawing/2014/main" id="{CE215241-EEC4-8622-786C-235339509618}"/>
+              </a:ext>
+            </a:extLst>
+          </p:cNvPr>
+          <p:cNvGrpSpPr/>
+          <p:nvPr/>
+        </p:nvGrpSpPr>
+        <p:grpSpPr>
+          <a:xfrm>
+            <a:off x="357559" y="3806684"/>
+            <a:ext cx="4289855" cy="605107"/>
+            <a:chOff x="7688062" y="4473437"/>
+            <a:chExt cx="2041726" cy="711122"/>
+          </a:xfrm>
+        </p:grpSpPr>
+        <p:sp>
+          <p:nvSpPr>
+            <p:cNvPr id="8" name="矩形 7">
+              <a:extLst>
+                <a:ext uri="{FF2B5EF4-FFF2-40B4-BE49-F238E27FC236}">
+                  <a16:creationId xmlns:a16="http://schemas.microsoft.com/office/drawing/2014/main" id="{77569B9B-F6B6-65C1-8F27-66905B080C28}"/>
+                </a:ext>
+              </a:extLst>
+            </p:cNvPr>
+            <p:cNvSpPr/>
+            <p:nvPr/>
+          </p:nvSpPr>
+          <p:spPr>
+            <a:xfrm>
+              <a:off x="7688062" y="4500979"/>
+              <a:ext cx="2041726" cy="683580"/>
+            </a:xfrm>
+            <a:prstGeom prst="rect">
+              <a:avLst/>
+            </a:prstGeom>
+            <a:noFill/>
+            <a:ln>
+              <a:solidFill>
+                <a:srgbClr val="FF0000"/>
+              </a:solidFill>
+            </a:ln>
+          </p:spPr>
+          <p:style>
+            <a:lnRef idx="2">
+              <a:schemeClr val="accent1">
+                <a:shade val="50000"/>
+              </a:schemeClr>
+            </a:lnRef>
+            <a:fillRef idx="1">
+              <a:schemeClr val="accent1"/>
+            </a:fillRef>
+            <a:effectRef idx="0">
+              <a:schemeClr val="accent1"/>
+            </a:effectRef>
+            <a:fontRef idx="minor">
+              <a:schemeClr val="lt1"/>
+            </a:fontRef>
+          </p:style>
+          <p:txBody>
+            <a:bodyPr rtlCol="0" anchor="ctr"/>
+            <a:lstStyle/>
+            <a:p>
+              <a:pPr algn="ctr"/>
+              <a:endParaRPr lang="zh-TW" altLang="en-US" sz="1400" b="1" dirty="0"/>
+            </a:p>
+          </p:txBody>
+        </p:sp>
+        <p:sp>
+          <p:nvSpPr>
+            <p:cNvPr id="9" name="文字方塊 8">
+              <a:extLst>
+                <a:ext uri="{FF2B5EF4-FFF2-40B4-BE49-F238E27FC236}">
+                  <a16:creationId xmlns:a16="http://schemas.microsoft.com/office/drawing/2014/main" id="{682DB426-07CB-8C72-8DED-A2A98203AF8C}"/>
+                </a:ext>
+              </a:extLst>
+            </p:cNvPr>
+            <p:cNvSpPr txBox="1"/>
+            <p:nvPr/>
+          </p:nvSpPr>
+          <p:spPr>
+            <a:xfrm>
+              <a:off x="9416882" y="4473437"/>
+              <a:ext cx="233271" cy="342014"/>
+            </a:xfrm>
+            <a:prstGeom prst="rect">
+              <a:avLst/>
+            </a:prstGeom>
+            <a:noFill/>
+          </p:spPr>
+          <p:txBody>
+            <a:bodyPr wrap="none" rtlCol="0">
+              <a:spAutoFit/>
+            </a:bodyPr>
+            <a:lstStyle/>
+            <a:p>
+              <a:r>
+                <a:rPr lang="en-US" altLang="zh-TW" b="1" dirty="0">
+                  <a:solidFill>
+                    <a:srgbClr val="FF0000"/>
+                  </a:solidFill>
+                </a:rPr>
+                <a:t>1</a:t>
+              </a:r>
+              <a:endParaRPr lang="zh-TW" altLang="en-US" b="1" dirty="0">
+                <a:solidFill>
+                  <a:srgbClr val="FF0000"/>
+                </a:solidFill>
+              </a:endParaRPr>
+            </a:p>
+          </p:txBody>
+        </p:sp>
+      </p:grpSp>
+      <p:grpSp>
+        <p:nvGrpSpPr>
+          <p:cNvPr id="10" name="群組 9">
+            <a:extLst>
+              <a:ext uri="{FF2B5EF4-FFF2-40B4-BE49-F238E27FC236}">
+                <a16:creationId xmlns:a16="http://schemas.microsoft.com/office/drawing/2014/main" id="{32F369C7-05F9-7B5B-C9B5-94215FE304DB}"/>
+              </a:ext>
+            </a:extLst>
+          </p:cNvPr>
+          <p:cNvGrpSpPr/>
+          <p:nvPr/>
+        </p:nvGrpSpPr>
+        <p:grpSpPr>
+          <a:xfrm>
+            <a:off x="4676681" y="3806684"/>
+            <a:ext cx="1400465" cy="565009"/>
+            <a:chOff x="7688062" y="4473437"/>
+            <a:chExt cx="2108579" cy="711122"/>
+          </a:xfrm>
+        </p:grpSpPr>
+        <p:sp>
+          <p:nvSpPr>
+            <p:cNvPr id="11" name="矩形 10">
+              <a:extLst>
+                <a:ext uri="{FF2B5EF4-FFF2-40B4-BE49-F238E27FC236}">
+                  <a16:creationId xmlns:a16="http://schemas.microsoft.com/office/drawing/2014/main" id="{1DCEEAA0-3D59-C6F2-544B-468C29669FDD}"/>
+                </a:ext>
+              </a:extLst>
+            </p:cNvPr>
+            <p:cNvSpPr/>
+            <p:nvPr/>
+          </p:nvSpPr>
+          <p:spPr>
+            <a:xfrm>
+              <a:off x="7688062" y="4500979"/>
+              <a:ext cx="2041726" cy="683580"/>
+            </a:xfrm>
+            <a:prstGeom prst="rect">
+              <a:avLst/>
+            </a:prstGeom>
+            <a:noFill/>
+            <a:ln>
+              <a:solidFill>
+                <a:srgbClr val="FF0000"/>
+              </a:solidFill>
+            </a:ln>
+          </p:spPr>
+          <p:style>
+            <a:lnRef idx="2">
+              <a:schemeClr val="accent1">
+                <a:shade val="50000"/>
+              </a:schemeClr>
+            </a:lnRef>
+            <a:fillRef idx="1">
+              <a:schemeClr val="accent1"/>
+            </a:fillRef>
+            <a:effectRef idx="0">
+              <a:schemeClr val="accent1"/>
+            </a:effectRef>
+            <a:fontRef idx="minor">
+              <a:schemeClr val="lt1"/>
+            </a:fontRef>
+          </p:style>
+          <p:txBody>
+            <a:bodyPr rtlCol="0" anchor="ctr"/>
+            <a:lstStyle/>
+            <a:p>
+              <a:pPr algn="ctr"/>
+              <a:endParaRPr lang="zh-TW" altLang="en-US" sz="1400" b="1" dirty="0"/>
+            </a:p>
+          </p:txBody>
+        </p:sp>
+        <p:sp>
+          <p:nvSpPr>
+            <p:cNvPr id="12" name="文字方塊 11">
+              <a:extLst>
+                <a:ext uri="{FF2B5EF4-FFF2-40B4-BE49-F238E27FC236}">
+                  <a16:creationId xmlns:a16="http://schemas.microsoft.com/office/drawing/2014/main" id="{11951813-B9EF-D7FD-B2C3-510394065010}"/>
+                </a:ext>
+              </a:extLst>
+            </p:cNvPr>
+            <p:cNvSpPr txBox="1"/>
+            <p:nvPr/>
+          </p:nvSpPr>
+          <p:spPr>
+            <a:xfrm>
+              <a:off x="9416882" y="4473437"/>
+              <a:ext cx="379759" cy="342014"/>
+            </a:xfrm>
+            <a:prstGeom prst="rect">
+              <a:avLst/>
+            </a:prstGeom>
+            <a:noFill/>
+          </p:spPr>
+          <p:txBody>
+            <a:bodyPr wrap="none" rtlCol="0">
+              <a:spAutoFit/>
+            </a:bodyPr>
+            <a:lstStyle/>
+            <a:p>
+              <a:r>
+                <a:rPr lang="en-US" altLang="zh-TW" b="1" dirty="0">
+                  <a:solidFill>
+                    <a:srgbClr val="FF0000"/>
+                  </a:solidFill>
+                </a:rPr>
+                <a:t>2</a:t>
+              </a:r>
+              <a:endParaRPr lang="zh-TW" altLang="en-US" b="1" dirty="0">
+                <a:solidFill>
+                  <a:srgbClr val="FF0000"/>
+                </a:solidFill>
+              </a:endParaRPr>
+            </a:p>
+          </p:txBody>
+        </p:sp>
+      </p:grpSp>
+    </p:spTree>
+    <p:extLst>
+      <p:ext uri="{BB962C8B-B14F-4D97-AF65-F5344CB8AC3E}">
+        <p14:creationId xmlns:p14="http://schemas.microsoft.com/office/powerpoint/2010/main" val="3848321853"/>
+      </p:ext>
+    </p:extLst>
+  </p:cSld>
+  <p:clrMapOvr>
+    <a:masterClrMapping/>
+  </p:clrMapOvr>
+</p:sld>
+</file>
+
+<file path=ppt/slides/slide12.xml><?xml version="1.0" encoding="utf-8"?>
+<p:sld xmlns:a="http://schemas.openxmlformats.org/drawingml/2006/main" xmlns:r="http://schemas.openxmlformats.org/officeDocument/2006/relationships" xmlns:p="http://schemas.openxmlformats.org/presentationml/2006/main">
+  <p:cSld>
+    <p:spTree>
+      <p:nvGrpSpPr>
+        <p:cNvPr id="1" name="">
+          <a:extLst>
+            <a:ext uri="{FF2B5EF4-FFF2-40B4-BE49-F238E27FC236}">
+              <a16:creationId xmlns:a16="http://schemas.microsoft.com/office/drawing/2014/main" id="{58E51442-6BD6-C6F0-1F69-EC6F14626D62}"/>
+            </a:ext>
+          </a:extLst>
+        </p:cNvPr>
+        <p:cNvGrpSpPr/>
+        <p:nvPr/>
+      </p:nvGrpSpPr>
+      <p:grpSpPr>
+        <a:xfrm>
+          <a:off x="0" y="0"/>
+          <a:ext cx="0" cy="0"/>
+          <a:chOff x="0" y="0"/>
+          <a:chExt cx="0" cy="0"/>
+        </a:xfrm>
+      </p:grpSpPr>
+      <p:sp>
+        <p:nvSpPr>
+          <p:cNvPr id="3" name="標題 2">
+            <a:extLst>
+              <a:ext uri="{FF2B5EF4-FFF2-40B4-BE49-F238E27FC236}">
+                <a16:creationId xmlns:a16="http://schemas.microsoft.com/office/drawing/2014/main" id="{F0EA1FF4-D808-25AD-DB91-0D15317D4E6F}"/>
+              </a:ext>
+            </a:extLst>
+          </p:cNvPr>
+          <p:cNvSpPr>
+            <a:spLocks noGrp="1"/>
+          </p:cNvSpPr>
+          <p:nvPr>
+            <p:ph type="title"/>
+          </p:nvPr>
+        </p:nvSpPr>
+        <p:spPr>
+          <a:xfrm>
+            <a:off x="319892" y="107816"/>
+            <a:ext cx="11379200" cy="461659"/>
+          </a:xfrm>
+        </p:spPr>
+        <p:txBody>
+          <a:bodyPr>
+            <a:noAutofit/>
+          </a:bodyPr>
+          <a:lstStyle/>
+          <a:p>
+            <a:r>
+              <a:rPr lang="zh-TW" altLang="en-US" sz="2800" dirty="0"/>
+              <a:t>低安全庫存監控 </a:t>
+            </a:r>
+            <a:r>
+              <a:rPr lang="en-US" altLang="zh-TW" sz="2800" dirty="0"/>
+              <a:t>(Low Safety Stock Monitoring)</a:t>
+            </a:r>
+          </a:p>
+        </p:txBody>
+      </p:sp>
+      <p:sp>
+        <p:nvSpPr>
+          <p:cNvPr id="53" name="標題 2">
+            <a:extLst>
+              <a:ext uri="{FF2B5EF4-FFF2-40B4-BE49-F238E27FC236}">
+                <a16:creationId xmlns:a16="http://schemas.microsoft.com/office/drawing/2014/main" id="{69CA39BF-1A32-AAD9-66FB-E7B28B423FD4}"/>
+              </a:ext>
+            </a:extLst>
+          </p:cNvPr>
+          <p:cNvSpPr txBox="1">
+            <a:spLocks/>
+          </p:cNvSpPr>
+          <p:nvPr/>
+        </p:nvSpPr>
+        <p:spPr>
+          <a:xfrm>
+            <a:off x="217952" y="1200293"/>
+            <a:ext cx="5511319" cy="461659"/>
+          </a:xfrm>
+          <a:prstGeom prst="rect">
+            <a:avLst/>
+          </a:prstGeom>
+        </p:spPr>
+        <p:txBody>
+          <a:bodyPr vert="horz" lIns="0" tIns="45720" rIns="0" bIns="45720" rtlCol="0" anchor="t">
+            <a:noAutofit/>
+          </a:bodyPr>
+          <a:lstStyle>
+            <a:lvl1pPr algn="ctr" defTabSz="685783" rtl="0" eaLnBrk="1" latinLnBrk="0" hangingPunct="1">
+              <a:lnSpc>
+                <a:spcPct val="90000"/>
+              </a:lnSpc>
+              <a:spcBef>
+                <a:spcPct val="0"/>
+              </a:spcBef>
+              <a:buNone/>
+              <a:defRPr sz="2400" b="1" kern="1200">
+                <a:solidFill>
+                  <a:schemeClr val="tx2"/>
+                </a:solidFill>
+                <a:latin typeface="+mj-lt"/>
+                <a:ea typeface="+mj-ea"/>
+                <a:cs typeface="+mj-cs"/>
+              </a:defRPr>
+            </a:lvl1pPr>
+          </a:lstStyle>
+          <a:p>
+            <a:pPr algn="l"/>
+            <a:r>
+              <a:rPr lang="en-US" altLang="zh-TW" sz="1800" dirty="0">
+                <a:solidFill>
+                  <a:srgbClr val="0000FF"/>
+                </a:solidFill>
+              </a:rPr>
+              <a:t>1.</a:t>
+            </a:r>
+            <a:r>
+              <a:rPr lang="zh-TW" altLang="en-US" sz="1800" dirty="0">
+                <a:solidFill>
+                  <a:srgbClr val="0000FF"/>
+                </a:solidFill>
+              </a:rPr>
+              <a:t>低安全庫存警報</a:t>
+            </a:r>
+          </a:p>
+        </p:txBody>
+      </p:sp>
+      <p:sp>
+        <p:nvSpPr>
+          <p:cNvPr id="22" name="標題 2">
+            <a:extLst>
+              <a:ext uri="{FF2B5EF4-FFF2-40B4-BE49-F238E27FC236}">
+                <a16:creationId xmlns:a16="http://schemas.microsoft.com/office/drawing/2014/main" id="{883D75F4-F8CB-CCBB-9215-C21AF251BD35}"/>
+              </a:ext>
+            </a:extLst>
+          </p:cNvPr>
+          <p:cNvSpPr txBox="1">
+            <a:spLocks/>
+          </p:cNvSpPr>
+          <p:nvPr/>
+        </p:nvSpPr>
+        <p:spPr>
+          <a:xfrm>
+            <a:off x="537039" y="1661952"/>
+            <a:ext cx="9192749" cy="1005790"/>
+          </a:xfrm>
+          <a:prstGeom prst="rect">
+            <a:avLst/>
+          </a:prstGeom>
+        </p:spPr>
+        <p:txBody>
+          <a:bodyPr vert="horz" lIns="0" tIns="45720" rIns="0" bIns="45720" rtlCol="0" anchor="t">
+            <a:noAutofit/>
+          </a:bodyPr>
+          <a:lstStyle>
+            <a:lvl1pPr algn="ctr" defTabSz="685783" rtl="0" eaLnBrk="1" latinLnBrk="0" hangingPunct="1">
+              <a:lnSpc>
+                <a:spcPct val="90000"/>
+              </a:lnSpc>
+              <a:spcBef>
+                <a:spcPct val="0"/>
+              </a:spcBef>
+              <a:buNone/>
+              <a:defRPr sz="2400" b="1" kern="1200">
+                <a:solidFill>
+                  <a:schemeClr val="tx2"/>
+                </a:solidFill>
+                <a:latin typeface="+mj-lt"/>
+                <a:ea typeface="+mj-ea"/>
+                <a:cs typeface="+mj-cs"/>
+              </a:defRPr>
+            </a:lvl1pPr>
+          </a:lstStyle>
+          <a:p>
+            <a:pPr marL="285750" indent="-285750" algn="l">
+              <a:buFont typeface="Wingdings" panose="05000000000000000000" pitchFamily="2" charset="2"/>
+              <a:buChar char="u"/>
+            </a:pPr>
+            <a:r>
+              <a:rPr lang="zh-TW" altLang="en-US" sz="1800" dirty="0">
+                <a:solidFill>
+                  <a:srgbClr val="002060"/>
+                </a:solidFill>
+              </a:rPr>
+              <a:t>領料後若剩餘庫存低於安全庫存則會發出警報。</a:t>
+            </a:r>
+            <a:endParaRPr lang="en-US" altLang="zh-TW" sz="1800" dirty="0">
+              <a:solidFill>
+                <a:srgbClr val="002060"/>
+              </a:solidFill>
+            </a:endParaRPr>
+          </a:p>
+        </p:txBody>
+      </p:sp>
+      <p:sp>
+        <p:nvSpPr>
+          <p:cNvPr id="35" name="標題 2">
+            <a:extLst>
+              <a:ext uri="{FF2B5EF4-FFF2-40B4-BE49-F238E27FC236}">
+                <a16:creationId xmlns:a16="http://schemas.microsoft.com/office/drawing/2014/main" id="{414A5CC3-D0FF-379E-B150-99D2AAA1AA1B}"/>
+              </a:ext>
+            </a:extLst>
+          </p:cNvPr>
+          <p:cNvSpPr txBox="1">
+            <a:spLocks/>
+          </p:cNvSpPr>
+          <p:nvPr/>
+        </p:nvSpPr>
+        <p:spPr>
+          <a:xfrm>
+            <a:off x="217952" y="2799753"/>
+            <a:ext cx="5511319" cy="461659"/>
+          </a:xfrm>
+          <a:prstGeom prst="rect">
+            <a:avLst/>
+          </a:prstGeom>
+        </p:spPr>
+        <p:txBody>
+          <a:bodyPr vert="horz" lIns="0" tIns="45720" rIns="0" bIns="45720" rtlCol="0" anchor="t">
+            <a:noAutofit/>
+          </a:bodyPr>
+          <a:lstStyle>
+            <a:lvl1pPr algn="ctr" defTabSz="685783" rtl="0" eaLnBrk="1" latinLnBrk="0" hangingPunct="1">
+              <a:lnSpc>
+                <a:spcPct val="90000"/>
+              </a:lnSpc>
+              <a:spcBef>
+                <a:spcPct val="0"/>
+              </a:spcBef>
+              <a:buNone/>
+              <a:defRPr sz="2400" b="1" kern="1200">
+                <a:solidFill>
+                  <a:schemeClr val="tx2"/>
+                </a:solidFill>
+                <a:latin typeface="+mj-lt"/>
+                <a:ea typeface="+mj-ea"/>
+                <a:cs typeface="+mj-cs"/>
+              </a:defRPr>
+            </a:lvl1pPr>
+          </a:lstStyle>
+          <a:p>
+            <a:pPr algn="l"/>
+            <a:r>
+              <a:rPr lang="en-US" altLang="zh-TW" sz="1800" dirty="0">
+                <a:solidFill>
+                  <a:srgbClr val="0000FF"/>
+                </a:solidFill>
+              </a:rPr>
+              <a:t>2.</a:t>
+            </a:r>
+            <a:r>
+              <a:rPr lang="zh-TW" altLang="en-US" sz="1800" dirty="0">
+                <a:solidFill>
+                  <a:srgbClr val="0000FF"/>
+                </a:solidFill>
+              </a:rPr>
+              <a:t>全廠低安全庫存看板</a:t>
+            </a:r>
+          </a:p>
+        </p:txBody>
+      </p:sp>
+      <p:sp>
+        <p:nvSpPr>
+          <p:cNvPr id="43" name="標題 2">
+            <a:extLst>
+              <a:ext uri="{FF2B5EF4-FFF2-40B4-BE49-F238E27FC236}">
+                <a16:creationId xmlns:a16="http://schemas.microsoft.com/office/drawing/2014/main" id="{BE249722-073E-AC22-8A27-BD6475EB42BE}"/>
+              </a:ext>
+            </a:extLst>
+          </p:cNvPr>
+          <p:cNvSpPr txBox="1">
+            <a:spLocks/>
+          </p:cNvSpPr>
+          <p:nvPr/>
+        </p:nvSpPr>
+        <p:spPr>
+          <a:xfrm>
+            <a:off x="537039" y="3261412"/>
+            <a:ext cx="9192749" cy="1005790"/>
+          </a:xfrm>
+          <a:prstGeom prst="rect">
+            <a:avLst/>
+          </a:prstGeom>
+        </p:spPr>
+        <p:txBody>
+          <a:bodyPr vert="horz" lIns="0" tIns="45720" rIns="0" bIns="45720" rtlCol="0" anchor="t">
+            <a:noAutofit/>
+          </a:bodyPr>
+          <a:lstStyle>
+            <a:lvl1pPr algn="ctr" defTabSz="685783" rtl="0" eaLnBrk="1" latinLnBrk="0" hangingPunct="1">
+              <a:lnSpc>
+                <a:spcPct val="90000"/>
+              </a:lnSpc>
+              <a:spcBef>
+                <a:spcPct val="0"/>
+              </a:spcBef>
+              <a:buNone/>
+              <a:defRPr sz="2400" b="1" kern="1200">
+                <a:solidFill>
+                  <a:schemeClr val="tx2"/>
+                </a:solidFill>
+                <a:latin typeface="+mj-lt"/>
+                <a:ea typeface="+mj-ea"/>
+                <a:cs typeface="+mj-cs"/>
+              </a:defRPr>
+            </a:lvl1pPr>
+          </a:lstStyle>
+          <a:p>
+            <a:pPr marL="285750" indent="-285750" algn="l">
+              <a:buFont typeface="Wingdings" panose="05000000000000000000" pitchFamily="2" charset="2"/>
+              <a:buChar char="u"/>
+            </a:pPr>
+            <a:r>
+              <a:rPr lang="zh-TW" altLang="en-US" sz="1800" dirty="0">
+                <a:solidFill>
+                  <a:srgbClr val="002060"/>
+                </a:solidFill>
+              </a:rPr>
+              <a:t>打開可看到所有目前庫存低於安全庫存的物料。</a:t>
+            </a:r>
+            <a:endParaRPr lang="en-US" altLang="zh-TW" sz="1800" dirty="0">
+              <a:solidFill>
+                <a:srgbClr val="002060"/>
+              </a:solidFill>
+            </a:endParaRPr>
+          </a:p>
+        </p:txBody>
+      </p:sp>
+      <p:sp>
+        <p:nvSpPr>
+          <p:cNvPr id="2" name="標題 2">
+            <a:extLst>
+              <a:ext uri="{FF2B5EF4-FFF2-40B4-BE49-F238E27FC236}">
+                <a16:creationId xmlns:a16="http://schemas.microsoft.com/office/drawing/2014/main" id="{95F584EF-6D8A-328D-8364-D6A254D4972F}"/>
+              </a:ext>
+            </a:extLst>
+          </p:cNvPr>
+          <p:cNvSpPr txBox="1">
+            <a:spLocks/>
+          </p:cNvSpPr>
+          <p:nvPr/>
+        </p:nvSpPr>
+        <p:spPr>
+          <a:xfrm>
+            <a:off x="537039" y="546476"/>
+            <a:ext cx="11162053" cy="1005790"/>
+          </a:xfrm>
+          <a:prstGeom prst="rect">
+            <a:avLst/>
+          </a:prstGeom>
+        </p:spPr>
+        <p:txBody>
+          <a:bodyPr vert="horz" lIns="0" tIns="45720" rIns="0" bIns="45720" rtlCol="0" anchor="t">
+            <a:noAutofit/>
+          </a:bodyPr>
+          <a:lstStyle>
+            <a:lvl1pPr algn="ctr" defTabSz="685783" rtl="0" eaLnBrk="1" latinLnBrk="0" hangingPunct="1">
+              <a:lnSpc>
+                <a:spcPct val="90000"/>
+              </a:lnSpc>
+              <a:spcBef>
+                <a:spcPct val="0"/>
+              </a:spcBef>
+              <a:buNone/>
+              <a:defRPr sz="2400" b="1" kern="1200">
+                <a:solidFill>
+                  <a:schemeClr val="tx2"/>
+                </a:solidFill>
+                <a:latin typeface="+mj-lt"/>
+                <a:ea typeface="+mj-ea"/>
+                <a:cs typeface="+mj-cs"/>
+              </a:defRPr>
+            </a:lvl1pPr>
+          </a:lstStyle>
+          <a:p>
+            <a:pPr marL="285750" indent="-285750" algn="l">
+              <a:buFont typeface="Wingdings" panose="05000000000000000000" pitchFamily="2" charset="2"/>
+              <a:buChar char="u"/>
+            </a:pPr>
+            <a:r>
+              <a:rPr lang="zh-TW" altLang="en-US" sz="1800" dirty="0">
+                <a:solidFill>
+                  <a:srgbClr val="002060"/>
+                </a:solidFill>
+              </a:rPr>
+              <a:t>用以監控低於安全庫存的物料。</a:t>
+            </a:r>
+            <a:endParaRPr lang="en-US" altLang="zh-TW" sz="1800" dirty="0">
+              <a:solidFill>
+                <a:srgbClr val="002060"/>
+              </a:solidFill>
+            </a:endParaRPr>
+          </a:p>
+        </p:txBody>
+      </p:sp>
+      <p:pic>
+        <p:nvPicPr>
+          <p:cNvPr id="9" name="圖片 8" descr="The image shows a factory's low safety stock status table, listing item numbers, descriptions, specifications, and current and safe stock levels.&#10;&#10;AI 產生的內容可能不正確。">
+            <a:extLst>
+              <a:ext uri="{FF2B5EF4-FFF2-40B4-BE49-F238E27FC236}">
+                <a16:creationId xmlns:a16="http://schemas.microsoft.com/office/drawing/2014/main" id="{EA2A33F6-98E9-8069-3FE3-ACF655920218}"/>
+              </a:ext>
+            </a:extLst>
+          </p:cNvPr>
+          <p:cNvPicPr>
+            <a:picLocks noChangeAspect="1"/>
+          </p:cNvPicPr>
+          <p:nvPr/>
+        </p:nvPicPr>
+        <p:blipFill>
+          <a:blip r:embed="rId3"/>
+          <a:stretch>
+            <a:fillRect/>
+          </a:stretch>
+        </p:blipFill>
+        <p:spPr>
+          <a:xfrm>
+            <a:off x="319892" y="3958849"/>
+            <a:ext cx="11391900" cy="2352675"/>
+          </a:xfrm>
+          <a:prstGeom prst="rect">
+            <a:avLst/>
+          </a:prstGeom>
+        </p:spPr>
+      </p:pic>
+      <p:pic>
+        <p:nvPicPr>
+          <p:cNvPr id="11" name="圖片 10" descr="The image shows a red background with Chinese text indicating a factory's total stock has only 3 units left and reaching safe water levels, followed by an acknowledgment message.&#10;&#10;AI 產生的內容可能不正確。">
+            <a:extLst>
+              <a:ext uri="{FF2B5EF4-FFF2-40B4-BE49-F238E27FC236}">
+                <a16:creationId xmlns:a16="http://schemas.microsoft.com/office/drawing/2014/main" id="{678C1D68-5705-E580-7E50-C78B3FDF7E18}"/>
+              </a:ext>
+            </a:extLst>
+          </p:cNvPr>
+          <p:cNvPicPr>
+            <a:picLocks noChangeAspect="1"/>
+          </p:cNvPicPr>
+          <p:nvPr/>
+        </p:nvPicPr>
+        <p:blipFill>
+          <a:blip r:embed="rId4"/>
+          <a:stretch>
+            <a:fillRect/>
+          </a:stretch>
+        </p:blipFill>
+        <p:spPr>
+          <a:xfrm>
+            <a:off x="6711519" y="1008135"/>
+            <a:ext cx="3785494" cy="2520852"/>
+          </a:xfrm>
+          <a:prstGeom prst="rect">
+            <a:avLst/>
+          </a:prstGeom>
+        </p:spPr>
+      </p:pic>
+    </p:spTree>
+    <p:extLst>
+      <p:ext uri="{BB962C8B-B14F-4D97-AF65-F5344CB8AC3E}">
+        <p14:creationId xmlns:p14="http://schemas.microsoft.com/office/powerpoint/2010/main" val="3320506873"/>
+      </p:ext>
+    </p:extLst>
+  </p:cSld>
+  <p:clrMapOvr>
+    <a:masterClrMapping/>
+  </p:clrMapOvr>
+</p:sld>
+</file>
+
+<file path=ppt/slides/slide13.xml><?xml version="1.0" encoding="utf-8"?>
 <p:sld xmlns:a="http://schemas.openxmlformats.org/drawingml/2006/main" xmlns:r="http://schemas.openxmlformats.org/officeDocument/2006/relationships" xmlns:p="http://schemas.openxmlformats.org/presentationml/2006/main">
   <p:cSld>
     <p:spTree>
@@ -8090,6 +10425,1269 @@
 </file>
 
 <file path=ppt/slides/slide3.xml><?xml version="1.0" encoding="utf-8"?>
+<p:sld xmlns:a="http://schemas.openxmlformats.org/drawingml/2006/main" xmlns:r="http://schemas.openxmlformats.org/officeDocument/2006/relationships" xmlns:p="http://schemas.openxmlformats.org/presentationml/2006/main">
+  <p:cSld>
+    <p:spTree>
+      <p:nvGrpSpPr>
+        <p:cNvPr id="1" name="">
+          <a:extLst>
+            <a:ext uri="{FF2B5EF4-FFF2-40B4-BE49-F238E27FC236}">
+              <a16:creationId xmlns:a16="http://schemas.microsoft.com/office/drawing/2014/main" id="{267652B4-DD50-90DD-1372-1BAAADC3ADDF}"/>
+            </a:ext>
+          </a:extLst>
+        </p:cNvPr>
+        <p:cNvGrpSpPr/>
+        <p:nvPr/>
+      </p:nvGrpSpPr>
+      <p:grpSpPr>
+        <a:xfrm>
+          <a:off x="0" y="0"/>
+          <a:ext cx="0" cy="0"/>
+          <a:chOff x="0" y="0"/>
+          <a:chExt cx="0" cy="0"/>
+        </a:xfrm>
+      </p:grpSpPr>
+      <p:sp>
+        <p:nvSpPr>
+          <p:cNvPr id="3" name="標題 2">
+            <a:extLst>
+              <a:ext uri="{FF2B5EF4-FFF2-40B4-BE49-F238E27FC236}">
+                <a16:creationId xmlns:a16="http://schemas.microsoft.com/office/drawing/2014/main" id="{67D0F314-0F7B-9255-14A5-96ECDE8DE331}"/>
+              </a:ext>
+            </a:extLst>
+          </p:cNvPr>
+          <p:cNvSpPr>
+            <a:spLocks noGrp="1"/>
+          </p:cNvSpPr>
+          <p:nvPr>
+            <p:ph type="title"/>
+          </p:nvPr>
+        </p:nvSpPr>
+        <p:spPr>
+          <a:xfrm>
+            <a:off x="319892" y="107816"/>
+            <a:ext cx="11379200" cy="461659"/>
+          </a:xfrm>
+        </p:spPr>
+        <p:txBody>
+          <a:bodyPr>
+            <a:noAutofit/>
+          </a:bodyPr>
+          <a:lstStyle/>
+          <a:p>
+            <a:r>
+              <a:rPr lang="zh-TW" altLang="en-US" sz="2800" dirty="0"/>
+              <a:t>系統設定</a:t>
+            </a:r>
+            <a:r>
+              <a:rPr lang="en-US" altLang="zh-TW" sz="2800" dirty="0"/>
+              <a:t>(System Setting)</a:t>
+            </a:r>
+            <a:endParaRPr lang="zh-TW" altLang="en-US" sz="2800" dirty="0"/>
+          </a:p>
+        </p:txBody>
+      </p:sp>
+      <p:sp>
+        <p:nvSpPr>
+          <p:cNvPr id="53" name="標題 2">
+            <a:extLst>
+              <a:ext uri="{FF2B5EF4-FFF2-40B4-BE49-F238E27FC236}">
+                <a16:creationId xmlns:a16="http://schemas.microsoft.com/office/drawing/2014/main" id="{F1D58291-492B-EB1C-A0F8-D422A13FC50F}"/>
+              </a:ext>
+            </a:extLst>
+          </p:cNvPr>
+          <p:cNvSpPr txBox="1">
+            <a:spLocks/>
+          </p:cNvSpPr>
+          <p:nvPr/>
+        </p:nvSpPr>
+        <p:spPr>
+          <a:xfrm>
+            <a:off x="217952" y="1200293"/>
+            <a:ext cx="5511319" cy="461659"/>
+          </a:xfrm>
+          <a:prstGeom prst="rect">
+            <a:avLst/>
+          </a:prstGeom>
+        </p:spPr>
+        <p:txBody>
+          <a:bodyPr vert="horz" lIns="0" tIns="45720" rIns="0" bIns="45720" rtlCol="0" anchor="t">
+            <a:noAutofit/>
+          </a:bodyPr>
+          <a:lstStyle>
+            <a:lvl1pPr algn="ctr" defTabSz="685783" rtl="0" eaLnBrk="1" latinLnBrk="0" hangingPunct="1">
+              <a:lnSpc>
+                <a:spcPct val="90000"/>
+              </a:lnSpc>
+              <a:spcBef>
+                <a:spcPct val="0"/>
+              </a:spcBef>
+              <a:buNone/>
+              <a:defRPr sz="2400" b="1" kern="1200">
+                <a:solidFill>
+                  <a:schemeClr val="tx2"/>
+                </a:solidFill>
+                <a:latin typeface="+mj-lt"/>
+                <a:ea typeface="+mj-ea"/>
+                <a:cs typeface="+mj-cs"/>
+              </a:defRPr>
+            </a:lvl1pPr>
+          </a:lstStyle>
+          <a:p>
+            <a:pPr algn="l"/>
+            <a:r>
+              <a:rPr lang="en-US" altLang="zh-TW" sz="1800" dirty="0">
+                <a:solidFill>
+                  <a:srgbClr val="0000FF"/>
+                </a:solidFill>
+              </a:rPr>
+              <a:t>1.</a:t>
+            </a:r>
+            <a:r>
+              <a:rPr lang="zh-TW" altLang="en-US" sz="1800" dirty="0">
+                <a:solidFill>
+                  <a:srgbClr val="0000FF"/>
+                </a:solidFill>
+              </a:rPr>
+              <a:t>後端服務 </a:t>
+            </a:r>
+            <a:r>
+              <a:rPr lang="en-US" altLang="zh-TW" sz="1800" dirty="0">
+                <a:solidFill>
+                  <a:srgbClr val="0000FF"/>
+                </a:solidFill>
+              </a:rPr>
+              <a:t>(API Server)</a:t>
+            </a:r>
+            <a:endParaRPr lang="zh-TW" altLang="en-US" sz="1800" dirty="0">
+              <a:solidFill>
+                <a:srgbClr val="0000FF"/>
+              </a:solidFill>
+            </a:endParaRPr>
+          </a:p>
+        </p:txBody>
+      </p:sp>
+      <p:sp>
+        <p:nvSpPr>
+          <p:cNvPr id="22" name="標題 2">
+            <a:extLst>
+              <a:ext uri="{FF2B5EF4-FFF2-40B4-BE49-F238E27FC236}">
+                <a16:creationId xmlns:a16="http://schemas.microsoft.com/office/drawing/2014/main" id="{9D0186C0-3D2B-922E-87F0-681CFEAC529D}"/>
+              </a:ext>
+            </a:extLst>
+          </p:cNvPr>
+          <p:cNvSpPr txBox="1">
+            <a:spLocks/>
+          </p:cNvSpPr>
+          <p:nvPr/>
+        </p:nvSpPr>
+        <p:spPr>
+          <a:xfrm>
+            <a:off x="537039" y="1661952"/>
+            <a:ext cx="9192749" cy="1005790"/>
+          </a:xfrm>
+          <a:prstGeom prst="rect">
+            <a:avLst/>
+          </a:prstGeom>
+        </p:spPr>
+        <p:txBody>
+          <a:bodyPr vert="horz" lIns="0" tIns="45720" rIns="0" bIns="45720" rtlCol="0" anchor="t">
+            <a:noAutofit/>
+          </a:bodyPr>
+          <a:lstStyle>
+            <a:lvl1pPr algn="ctr" defTabSz="685783" rtl="0" eaLnBrk="1" latinLnBrk="0" hangingPunct="1">
+              <a:lnSpc>
+                <a:spcPct val="90000"/>
+              </a:lnSpc>
+              <a:spcBef>
+                <a:spcPct val="0"/>
+              </a:spcBef>
+              <a:buNone/>
+              <a:defRPr sz="2400" b="1" kern="1200">
+                <a:solidFill>
+                  <a:schemeClr val="tx2"/>
+                </a:solidFill>
+                <a:latin typeface="+mj-lt"/>
+                <a:ea typeface="+mj-ea"/>
+                <a:cs typeface="+mj-cs"/>
+              </a:defRPr>
+            </a:lvl1pPr>
+          </a:lstStyle>
+          <a:p>
+            <a:pPr marL="285750" indent="-285750" algn="l">
+              <a:buFont typeface="Wingdings" panose="05000000000000000000" pitchFamily="2" charset="2"/>
+              <a:buChar char="u"/>
+            </a:pPr>
+            <a:r>
+              <a:rPr lang="zh-TW" altLang="en-US" sz="1800" dirty="0">
+                <a:solidFill>
+                  <a:srgbClr val="002060"/>
+                </a:solidFill>
+              </a:rPr>
+              <a:t>後端服務主要在管理資料庫，接收用戶端的連線需求，整個工廠只應存在一台。</a:t>
+            </a:r>
+            <a:endParaRPr lang="en-US" altLang="zh-TW" sz="1800" dirty="0">
+              <a:solidFill>
+                <a:srgbClr val="002060"/>
+              </a:solidFill>
+            </a:endParaRPr>
+          </a:p>
+          <a:p>
+            <a:pPr marL="285750" indent="-285750" algn="l">
+              <a:buFont typeface="Wingdings" panose="05000000000000000000" pitchFamily="2" charset="2"/>
+              <a:buChar char="u"/>
+            </a:pPr>
+            <a:r>
+              <a:rPr lang="zh-TW" altLang="en-US" sz="1800" dirty="0">
+                <a:solidFill>
+                  <a:srgbClr val="002060"/>
+                </a:solidFill>
+              </a:rPr>
+              <a:t>後端設定檔位於資料夾內</a:t>
+            </a:r>
+            <a:r>
+              <a:rPr lang="en-US" altLang="zh-TW" sz="1800" dirty="0">
+                <a:solidFill>
+                  <a:srgbClr val="002060"/>
+                </a:solidFill>
+              </a:rPr>
+              <a:t>Config.ini</a:t>
+            </a:r>
+          </a:p>
+          <a:p>
+            <a:pPr marL="285750" indent="-285750" algn="l">
+              <a:buFont typeface="Wingdings" panose="05000000000000000000" pitchFamily="2" charset="2"/>
+              <a:buChar char="u"/>
+            </a:pPr>
+            <a:r>
+              <a:rPr lang="en-US" altLang="zh-TW" sz="1800" dirty="0" err="1">
+                <a:solidFill>
+                  <a:srgbClr val="002060"/>
+                </a:solidFill>
+              </a:rPr>
+              <a:t>DefaultConnection</a:t>
+            </a:r>
+            <a:r>
+              <a:rPr lang="en-US" altLang="zh-TW" sz="1800" dirty="0">
+                <a:solidFill>
+                  <a:srgbClr val="002060"/>
+                </a:solidFill>
+              </a:rPr>
+              <a:t>=Data Source : </a:t>
+            </a:r>
+            <a:r>
+              <a:rPr lang="en-US" altLang="zh-TW" sz="1800" dirty="0" err="1">
+                <a:solidFill>
+                  <a:srgbClr val="002060"/>
+                </a:solidFill>
+              </a:rPr>
+              <a:t>DataBase</a:t>
+            </a:r>
+            <a:r>
+              <a:rPr lang="zh-TW" altLang="en-US" sz="1800" dirty="0">
+                <a:solidFill>
+                  <a:srgbClr val="002060"/>
+                </a:solidFill>
+              </a:rPr>
+              <a:t>存放位置</a:t>
+            </a:r>
+            <a:endParaRPr lang="en-US" altLang="zh-TW" sz="1800" dirty="0">
+              <a:solidFill>
+                <a:srgbClr val="002060"/>
+              </a:solidFill>
+            </a:endParaRPr>
+          </a:p>
+          <a:p>
+            <a:pPr marL="285750" indent="-285750" algn="l">
+              <a:buFont typeface="Wingdings" panose="05000000000000000000" pitchFamily="2" charset="2"/>
+              <a:buChar char="u"/>
+            </a:pPr>
+            <a:r>
+              <a:rPr lang="en-US" altLang="zh-TW" sz="1800" dirty="0" err="1">
+                <a:solidFill>
+                  <a:srgbClr val="002060"/>
+                </a:solidFill>
+              </a:rPr>
+              <a:t>Urls</a:t>
+            </a:r>
+            <a:r>
+              <a:rPr lang="en-US" altLang="zh-TW" sz="1800" dirty="0">
+                <a:solidFill>
+                  <a:srgbClr val="002060"/>
+                </a:solidFill>
+              </a:rPr>
+              <a:t> : </a:t>
+            </a:r>
+            <a:r>
+              <a:rPr lang="zh-TW" altLang="en-US" sz="1800" dirty="0">
+                <a:solidFill>
+                  <a:srgbClr val="002060"/>
+                </a:solidFill>
+              </a:rPr>
+              <a:t>後端允許連線位置，正常設為</a:t>
+            </a:r>
+            <a:r>
+              <a:rPr lang="en-US" altLang="zh-TW" sz="1800" dirty="0">
+                <a:solidFill>
+                  <a:srgbClr val="002060"/>
+                </a:solidFill>
+                <a:hlinkClick r:id="rId3"/>
+              </a:rPr>
+              <a:t>http://0.0.0.0:5000</a:t>
+            </a:r>
+            <a:r>
+              <a:rPr lang="zh-TW" altLang="en-US" sz="1800" dirty="0">
+                <a:solidFill>
+                  <a:srgbClr val="002060"/>
+                </a:solidFill>
+              </a:rPr>
+              <a:t>無須更動</a:t>
+            </a:r>
+            <a:endParaRPr lang="en-US" altLang="zh-TW" sz="1800" dirty="0">
+              <a:solidFill>
+                <a:srgbClr val="002060"/>
+              </a:solidFill>
+            </a:endParaRPr>
+          </a:p>
+          <a:p>
+            <a:pPr marL="285750" indent="-285750" algn="l">
+              <a:buFont typeface="Wingdings" panose="05000000000000000000" pitchFamily="2" charset="2"/>
+              <a:buChar char="u"/>
+            </a:pPr>
+            <a:r>
+              <a:rPr lang="en-US" altLang="zh-TW" sz="1800" dirty="0">
+                <a:solidFill>
+                  <a:srgbClr val="002060"/>
+                </a:solidFill>
+              </a:rPr>
+              <a:t>Language : </a:t>
+            </a:r>
+            <a:r>
+              <a:rPr lang="zh-TW" altLang="en-US" sz="1800" dirty="0">
+                <a:solidFill>
+                  <a:srgbClr val="002060"/>
+                </a:solidFill>
+              </a:rPr>
+              <a:t>系統語系設定，目前支援中文</a:t>
+            </a:r>
+            <a:r>
+              <a:rPr lang="en-US" altLang="zh-TW" sz="1800" dirty="0">
+                <a:solidFill>
+                  <a:srgbClr val="002060"/>
+                </a:solidFill>
+              </a:rPr>
+              <a:t>(</a:t>
+            </a:r>
+            <a:r>
+              <a:rPr lang="en-US" altLang="zh-TW" sz="1800" dirty="0" err="1">
+                <a:solidFill>
+                  <a:srgbClr val="002060"/>
+                </a:solidFill>
+              </a:rPr>
+              <a:t>zh</a:t>
+            </a:r>
+            <a:r>
+              <a:rPr lang="en-US" altLang="zh-TW" sz="1800" dirty="0">
+                <a:solidFill>
+                  <a:srgbClr val="002060"/>
+                </a:solidFill>
+              </a:rPr>
+              <a:t>-TW)</a:t>
+            </a:r>
+            <a:r>
+              <a:rPr lang="zh-TW" altLang="en-US" sz="1800" dirty="0">
+                <a:solidFill>
+                  <a:srgbClr val="002060"/>
+                </a:solidFill>
+              </a:rPr>
+              <a:t>、英文</a:t>
+            </a:r>
+            <a:r>
+              <a:rPr lang="en-US" altLang="zh-TW" sz="1800" dirty="0">
+                <a:solidFill>
+                  <a:srgbClr val="002060"/>
+                </a:solidFill>
+              </a:rPr>
+              <a:t>(</a:t>
+            </a:r>
+            <a:r>
+              <a:rPr lang="en-US" altLang="zh-TW" sz="1800" dirty="0" err="1">
+                <a:solidFill>
+                  <a:srgbClr val="002060"/>
+                </a:solidFill>
+              </a:rPr>
+              <a:t>en</a:t>
+            </a:r>
+            <a:r>
+              <a:rPr lang="en-US" altLang="zh-TW" sz="1800" dirty="0">
+                <a:solidFill>
+                  <a:srgbClr val="002060"/>
+                </a:solidFill>
+              </a:rPr>
+              <a:t>)</a:t>
+            </a:r>
+            <a:r>
+              <a:rPr lang="zh-TW" altLang="en-US" sz="1800" dirty="0">
+                <a:solidFill>
+                  <a:srgbClr val="002060"/>
+                </a:solidFill>
+              </a:rPr>
+              <a:t>、德文</a:t>
+            </a:r>
+            <a:r>
+              <a:rPr lang="en-US" altLang="zh-TW" sz="1800" dirty="0">
+                <a:solidFill>
+                  <a:srgbClr val="002060"/>
+                </a:solidFill>
+              </a:rPr>
+              <a:t>(de)</a:t>
+            </a:r>
+          </a:p>
+          <a:p>
+            <a:pPr marL="285750" indent="-285750" algn="l">
+              <a:buFont typeface="Wingdings" panose="05000000000000000000" pitchFamily="2" charset="2"/>
+              <a:buChar char="u"/>
+            </a:pPr>
+            <a:r>
+              <a:rPr lang="en-US" altLang="zh-TW" sz="1800" dirty="0" err="1">
+                <a:solidFill>
+                  <a:srgbClr val="002060"/>
+                </a:solidFill>
+              </a:rPr>
+              <a:t>AttachmentPath</a:t>
+            </a:r>
+            <a:r>
+              <a:rPr lang="en-US" altLang="zh-TW" sz="1800" dirty="0">
+                <a:solidFill>
+                  <a:srgbClr val="002060"/>
+                </a:solidFill>
+              </a:rPr>
+              <a:t> : </a:t>
+            </a:r>
+            <a:r>
+              <a:rPr lang="zh-TW" altLang="en-US" sz="1800" dirty="0">
+                <a:solidFill>
+                  <a:srgbClr val="002060"/>
+                </a:solidFill>
+              </a:rPr>
+              <a:t>料號附件的存放位置</a:t>
+            </a:r>
+            <a:endParaRPr lang="en-US" altLang="zh-TW" sz="1800" dirty="0">
+              <a:solidFill>
+                <a:srgbClr val="002060"/>
+              </a:solidFill>
+            </a:endParaRPr>
+          </a:p>
+          <a:p>
+            <a:pPr marL="285750" indent="-285750" algn="l">
+              <a:buFont typeface="Wingdings" panose="05000000000000000000" pitchFamily="2" charset="2"/>
+              <a:buChar char="u"/>
+            </a:pPr>
+            <a:endParaRPr lang="en-US" altLang="zh-TW" sz="1800" dirty="0">
+              <a:solidFill>
+                <a:srgbClr val="002060"/>
+              </a:solidFill>
+            </a:endParaRPr>
+          </a:p>
+        </p:txBody>
+      </p:sp>
+      <p:sp>
+        <p:nvSpPr>
+          <p:cNvPr id="2" name="標題 2">
+            <a:extLst>
+              <a:ext uri="{FF2B5EF4-FFF2-40B4-BE49-F238E27FC236}">
+                <a16:creationId xmlns:a16="http://schemas.microsoft.com/office/drawing/2014/main" id="{66E8546D-9B80-CE49-B7FC-AF751685F5AE}"/>
+              </a:ext>
+            </a:extLst>
+          </p:cNvPr>
+          <p:cNvSpPr txBox="1">
+            <a:spLocks/>
+          </p:cNvSpPr>
+          <p:nvPr/>
+        </p:nvSpPr>
+        <p:spPr>
+          <a:xfrm>
+            <a:off x="537039" y="546476"/>
+            <a:ext cx="11162053" cy="1005790"/>
+          </a:xfrm>
+          <a:prstGeom prst="rect">
+            <a:avLst/>
+          </a:prstGeom>
+        </p:spPr>
+        <p:txBody>
+          <a:bodyPr vert="horz" lIns="0" tIns="45720" rIns="0" bIns="45720" rtlCol="0" anchor="t">
+            <a:noAutofit/>
+          </a:bodyPr>
+          <a:lstStyle>
+            <a:lvl1pPr algn="ctr" defTabSz="685783" rtl="0" eaLnBrk="1" latinLnBrk="0" hangingPunct="1">
+              <a:lnSpc>
+                <a:spcPct val="90000"/>
+              </a:lnSpc>
+              <a:spcBef>
+                <a:spcPct val="0"/>
+              </a:spcBef>
+              <a:buNone/>
+              <a:defRPr sz="2400" b="1" kern="1200">
+                <a:solidFill>
+                  <a:schemeClr val="tx2"/>
+                </a:solidFill>
+                <a:latin typeface="+mj-lt"/>
+                <a:ea typeface="+mj-ea"/>
+                <a:cs typeface="+mj-cs"/>
+              </a:defRPr>
+            </a:lvl1pPr>
+          </a:lstStyle>
+          <a:p>
+            <a:pPr marL="285750" indent="-285750" algn="l">
+              <a:buFont typeface="Wingdings" panose="05000000000000000000" pitchFamily="2" charset="2"/>
+              <a:buChar char="u"/>
+            </a:pPr>
+            <a:r>
+              <a:rPr lang="zh-TW" altLang="en-US" sz="1800" dirty="0">
+                <a:solidFill>
+                  <a:srgbClr val="002060"/>
+                </a:solidFill>
+              </a:rPr>
+              <a:t>本系統分為「後端服務 </a:t>
+            </a:r>
+            <a:r>
+              <a:rPr lang="en-US" altLang="zh-TW" sz="1800" dirty="0">
+                <a:solidFill>
+                  <a:srgbClr val="002060"/>
+                </a:solidFill>
+              </a:rPr>
+              <a:t>(API Server)</a:t>
+            </a:r>
+            <a:r>
+              <a:rPr lang="zh-TW" altLang="en-US" sz="1800" dirty="0">
+                <a:solidFill>
+                  <a:srgbClr val="002060"/>
+                </a:solidFill>
+              </a:rPr>
+              <a:t>」與「用戶端</a:t>
+            </a:r>
+            <a:r>
+              <a:rPr lang="en-US" altLang="zh-TW" sz="1800" dirty="0">
+                <a:solidFill>
+                  <a:srgbClr val="002060"/>
+                </a:solidFill>
+              </a:rPr>
+              <a:t>(Client)</a:t>
+            </a:r>
+            <a:r>
+              <a:rPr lang="zh-TW" altLang="en-US" sz="1800" dirty="0">
+                <a:solidFill>
+                  <a:srgbClr val="002060"/>
+                </a:solidFill>
+              </a:rPr>
+              <a:t>」。為了確保作業不中斷，後端服務已設定為自動化管理。</a:t>
+            </a:r>
+            <a:endParaRPr lang="en-US" altLang="zh-TW" sz="1800" dirty="0">
+              <a:solidFill>
+                <a:srgbClr val="002060"/>
+              </a:solidFill>
+            </a:endParaRPr>
+          </a:p>
+        </p:txBody>
+      </p:sp>
+      <p:pic>
+        <p:nvPicPr>
+          <p:cNvPr id="5" name="圖片 4" descr="The image displays a configuration for a PartsManager API server, including connection strings, network information, and system settings.&#10;&#10;AI 產生的內容可能不正確。">
+            <a:extLst>
+              <a:ext uri="{FF2B5EF4-FFF2-40B4-BE49-F238E27FC236}">
+                <a16:creationId xmlns:a16="http://schemas.microsoft.com/office/drawing/2014/main" id="{30DD1355-25C1-9CCB-9F31-EA07E4A124A8}"/>
+              </a:ext>
+            </a:extLst>
+          </p:cNvPr>
+          <p:cNvPicPr>
+            <a:picLocks noChangeAspect="1"/>
+          </p:cNvPicPr>
+          <p:nvPr/>
+        </p:nvPicPr>
+        <p:blipFill>
+          <a:blip r:embed="rId4"/>
+          <a:stretch>
+            <a:fillRect/>
+          </a:stretch>
+        </p:blipFill>
+        <p:spPr>
+          <a:xfrm>
+            <a:off x="2496312" y="3429000"/>
+            <a:ext cx="6065429" cy="3067573"/>
+          </a:xfrm>
+          <a:prstGeom prst="rect">
+            <a:avLst/>
+          </a:prstGeom>
+        </p:spPr>
+      </p:pic>
+    </p:spTree>
+    <p:extLst>
+      <p:ext uri="{BB962C8B-B14F-4D97-AF65-F5344CB8AC3E}">
+        <p14:creationId xmlns:p14="http://schemas.microsoft.com/office/powerpoint/2010/main" val="665868171"/>
+      </p:ext>
+    </p:extLst>
+  </p:cSld>
+  <p:clrMapOvr>
+    <a:masterClrMapping/>
+  </p:clrMapOvr>
+</p:sld>
+</file>
+
+<file path=ppt/slides/slide4.xml><?xml version="1.0" encoding="utf-8"?>
+<p:sld xmlns:a="http://schemas.openxmlformats.org/drawingml/2006/main" xmlns:r="http://schemas.openxmlformats.org/officeDocument/2006/relationships" xmlns:p="http://schemas.openxmlformats.org/presentationml/2006/main">
+  <p:cSld>
+    <p:spTree>
+      <p:nvGrpSpPr>
+        <p:cNvPr id="1" name="">
+          <a:extLst>
+            <a:ext uri="{FF2B5EF4-FFF2-40B4-BE49-F238E27FC236}">
+              <a16:creationId xmlns:a16="http://schemas.microsoft.com/office/drawing/2014/main" id="{5119ADCA-4CFD-C13B-388C-A44B35EBA70E}"/>
+            </a:ext>
+          </a:extLst>
+        </p:cNvPr>
+        <p:cNvGrpSpPr/>
+        <p:nvPr/>
+      </p:nvGrpSpPr>
+      <p:grpSpPr>
+        <a:xfrm>
+          <a:off x="0" y="0"/>
+          <a:ext cx="0" cy="0"/>
+          <a:chOff x="0" y="0"/>
+          <a:chExt cx="0" cy="0"/>
+        </a:xfrm>
+      </p:grpSpPr>
+      <p:sp>
+        <p:nvSpPr>
+          <p:cNvPr id="3" name="標題 2">
+            <a:extLst>
+              <a:ext uri="{FF2B5EF4-FFF2-40B4-BE49-F238E27FC236}">
+                <a16:creationId xmlns:a16="http://schemas.microsoft.com/office/drawing/2014/main" id="{FEC18BF5-3A91-0ECF-C96D-B8A2F7881E4F}"/>
+              </a:ext>
+            </a:extLst>
+          </p:cNvPr>
+          <p:cNvSpPr>
+            <a:spLocks noGrp="1"/>
+          </p:cNvSpPr>
+          <p:nvPr>
+            <p:ph type="title"/>
+          </p:nvPr>
+        </p:nvSpPr>
+        <p:spPr>
+          <a:xfrm>
+            <a:off x="319892" y="107816"/>
+            <a:ext cx="11379200" cy="461659"/>
+          </a:xfrm>
+        </p:spPr>
+        <p:txBody>
+          <a:bodyPr>
+            <a:noAutofit/>
+          </a:bodyPr>
+          <a:lstStyle/>
+          <a:p>
+            <a:r>
+              <a:rPr lang="zh-TW" altLang="en-US" sz="2800" dirty="0"/>
+              <a:t>系統設定</a:t>
+            </a:r>
+            <a:r>
+              <a:rPr lang="en-US" altLang="zh-TW" sz="2800" dirty="0"/>
+              <a:t>(System Setting)</a:t>
+            </a:r>
+            <a:endParaRPr lang="zh-TW" altLang="en-US" sz="2800" dirty="0"/>
+          </a:p>
+        </p:txBody>
+      </p:sp>
+      <p:sp>
+        <p:nvSpPr>
+          <p:cNvPr id="35" name="標題 2">
+            <a:extLst>
+              <a:ext uri="{FF2B5EF4-FFF2-40B4-BE49-F238E27FC236}">
+                <a16:creationId xmlns:a16="http://schemas.microsoft.com/office/drawing/2014/main" id="{E0B6479F-9213-480E-0CD6-CFF621C1323D}"/>
+              </a:ext>
+            </a:extLst>
+          </p:cNvPr>
+          <p:cNvSpPr txBox="1">
+            <a:spLocks/>
+          </p:cNvSpPr>
+          <p:nvPr/>
+        </p:nvSpPr>
+        <p:spPr>
+          <a:xfrm>
+            <a:off x="208525" y="1193390"/>
+            <a:ext cx="5511319" cy="461659"/>
+          </a:xfrm>
+          <a:prstGeom prst="rect">
+            <a:avLst/>
+          </a:prstGeom>
+        </p:spPr>
+        <p:txBody>
+          <a:bodyPr vert="horz" lIns="0" tIns="45720" rIns="0" bIns="45720" rtlCol="0" anchor="t">
+            <a:noAutofit/>
+          </a:bodyPr>
+          <a:lstStyle>
+            <a:lvl1pPr algn="ctr" defTabSz="685783" rtl="0" eaLnBrk="1" latinLnBrk="0" hangingPunct="1">
+              <a:lnSpc>
+                <a:spcPct val="90000"/>
+              </a:lnSpc>
+              <a:spcBef>
+                <a:spcPct val="0"/>
+              </a:spcBef>
+              <a:buNone/>
+              <a:defRPr sz="2400" b="1" kern="1200">
+                <a:solidFill>
+                  <a:schemeClr val="tx2"/>
+                </a:solidFill>
+                <a:latin typeface="+mj-lt"/>
+                <a:ea typeface="+mj-ea"/>
+                <a:cs typeface="+mj-cs"/>
+              </a:defRPr>
+            </a:lvl1pPr>
+          </a:lstStyle>
+          <a:p>
+            <a:pPr algn="l"/>
+            <a:r>
+              <a:rPr lang="en-US" altLang="zh-TW" sz="1800" dirty="0">
+                <a:solidFill>
+                  <a:srgbClr val="0000FF"/>
+                </a:solidFill>
+              </a:rPr>
+              <a:t>2.</a:t>
+            </a:r>
+            <a:r>
+              <a:rPr lang="zh-TW" altLang="en-US" sz="1800" dirty="0">
+                <a:solidFill>
+                  <a:srgbClr val="002060"/>
+                </a:solidFill>
+              </a:rPr>
+              <a:t> </a:t>
+            </a:r>
+            <a:r>
+              <a:rPr lang="zh-TW" altLang="en-US" sz="1800" dirty="0">
+                <a:solidFill>
+                  <a:srgbClr val="0000FF"/>
+                </a:solidFill>
+              </a:rPr>
+              <a:t>用戶端</a:t>
+            </a:r>
+            <a:r>
+              <a:rPr lang="en-US" altLang="zh-TW" sz="1800" dirty="0">
+                <a:solidFill>
+                  <a:srgbClr val="0000FF"/>
+                </a:solidFill>
+              </a:rPr>
+              <a:t>(Client)</a:t>
+            </a:r>
+            <a:endParaRPr lang="zh-TW" altLang="en-US" sz="1800" dirty="0">
+              <a:solidFill>
+                <a:srgbClr val="0000FF"/>
+              </a:solidFill>
+            </a:endParaRPr>
+          </a:p>
+        </p:txBody>
+      </p:sp>
+      <p:sp>
+        <p:nvSpPr>
+          <p:cNvPr id="2" name="標題 2">
+            <a:extLst>
+              <a:ext uri="{FF2B5EF4-FFF2-40B4-BE49-F238E27FC236}">
+                <a16:creationId xmlns:a16="http://schemas.microsoft.com/office/drawing/2014/main" id="{1587DF81-3F7D-51ED-BC05-B5333DB43B43}"/>
+              </a:ext>
+            </a:extLst>
+          </p:cNvPr>
+          <p:cNvSpPr txBox="1">
+            <a:spLocks/>
+          </p:cNvSpPr>
+          <p:nvPr/>
+        </p:nvSpPr>
+        <p:spPr>
+          <a:xfrm>
+            <a:off x="537039" y="546476"/>
+            <a:ext cx="11162053" cy="1005790"/>
+          </a:xfrm>
+          <a:prstGeom prst="rect">
+            <a:avLst/>
+          </a:prstGeom>
+        </p:spPr>
+        <p:txBody>
+          <a:bodyPr vert="horz" lIns="0" tIns="45720" rIns="0" bIns="45720" rtlCol="0" anchor="t">
+            <a:noAutofit/>
+          </a:bodyPr>
+          <a:lstStyle>
+            <a:lvl1pPr algn="ctr" defTabSz="685783" rtl="0" eaLnBrk="1" latinLnBrk="0" hangingPunct="1">
+              <a:lnSpc>
+                <a:spcPct val="90000"/>
+              </a:lnSpc>
+              <a:spcBef>
+                <a:spcPct val="0"/>
+              </a:spcBef>
+              <a:buNone/>
+              <a:defRPr sz="2400" b="1" kern="1200">
+                <a:solidFill>
+                  <a:schemeClr val="tx2"/>
+                </a:solidFill>
+                <a:latin typeface="+mj-lt"/>
+                <a:ea typeface="+mj-ea"/>
+                <a:cs typeface="+mj-cs"/>
+              </a:defRPr>
+            </a:lvl1pPr>
+          </a:lstStyle>
+          <a:p>
+            <a:pPr marL="285750" indent="-285750" algn="l">
+              <a:buFont typeface="Wingdings" panose="05000000000000000000" pitchFamily="2" charset="2"/>
+              <a:buChar char="u"/>
+            </a:pPr>
+            <a:r>
+              <a:rPr lang="zh-TW" altLang="en-US" sz="1800" dirty="0">
+                <a:solidFill>
+                  <a:srgbClr val="002060"/>
+                </a:solidFill>
+              </a:rPr>
+              <a:t>本系統分為「後端服務 </a:t>
+            </a:r>
+            <a:r>
+              <a:rPr lang="en-US" altLang="zh-TW" sz="1800" dirty="0">
+                <a:solidFill>
+                  <a:srgbClr val="002060"/>
+                </a:solidFill>
+              </a:rPr>
+              <a:t>(API Server)</a:t>
+            </a:r>
+            <a:r>
+              <a:rPr lang="zh-TW" altLang="en-US" sz="1800" dirty="0">
+                <a:solidFill>
+                  <a:srgbClr val="002060"/>
+                </a:solidFill>
+              </a:rPr>
+              <a:t>」與「用戶端</a:t>
+            </a:r>
+            <a:r>
+              <a:rPr lang="en-US" altLang="zh-TW" sz="1800" dirty="0">
+                <a:solidFill>
+                  <a:srgbClr val="002060"/>
+                </a:solidFill>
+              </a:rPr>
+              <a:t>(Client)</a:t>
+            </a:r>
+            <a:r>
+              <a:rPr lang="zh-TW" altLang="en-US" sz="1800" dirty="0">
+                <a:solidFill>
+                  <a:srgbClr val="002060"/>
+                </a:solidFill>
+              </a:rPr>
+              <a:t>」。為了確保作業不中斷，後端服務已設定為自動化管理。</a:t>
+            </a:r>
+            <a:endParaRPr lang="en-US" altLang="zh-TW" sz="1800" dirty="0">
+              <a:solidFill>
+                <a:srgbClr val="002060"/>
+              </a:solidFill>
+            </a:endParaRPr>
+          </a:p>
+        </p:txBody>
+      </p:sp>
+      <p:pic>
+        <p:nvPicPr>
+          <p:cNvPr id="6" name="圖片 5" descr="The diagram shows a configuration for a Parts Manager Client with network settings, system language, and inventory options.&#10;&#10;AI 產生的內容可能不正確。">
+            <a:extLst>
+              <a:ext uri="{FF2B5EF4-FFF2-40B4-BE49-F238E27FC236}">
+                <a16:creationId xmlns:a16="http://schemas.microsoft.com/office/drawing/2014/main" id="{6CB2BC96-D29D-2635-95F9-9FD0C02A1B4C}"/>
+              </a:ext>
+            </a:extLst>
+          </p:cNvPr>
+          <p:cNvPicPr>
+            <a:picLocks noChangeAspect="1"/>
+          </p:cNvPicPr>
+          <p:nvPr/>
+        </p:nvPicPr>
+        <p:blipFill>
+          <a:blip r:embed="rId3"/>
+          <a:stretch>
+            <a:fillRect/>
+          </a:stretch>
+        </p:blipFill>
+        <p:spPr>
+          <a:xfrm>
+            <a:off x="6555396" y="3056510"/>
+            <a:ext cx="5143696" cy="3614489"/>
+          </a:xfrm>
+          <a:prstGeom prst="rect">
+            <a:avLst/>
+          </a:prstGeom>
+        </p:spPr>
+      </p:pic>
+      <p:sp>
+        <p:nvSpPr>
+          <p:cNvPr id="7" name="標題 2">
+            <a:extLst>
+              <a:ext uri="{FF2B5EF4-FFF2-40B4-BE49-F238E27FC236}">
+                <a16:creationId xmlns:a16="http://schemas.microsoft.com/office/drawing/2014/main" id="{BAF6F0C8-5D97-98DC-6943-1B49F09C40A5}"/>
+              </a:ext>
+            </a:extLst>
+          </p:cNvPr>
+          <p:cNvSpPr txBox="1">
+            <a:spLocks/>
+          </p:cNvSpPr>
+          <p:nvPr/>
+        </p:nvSpPr>
+        <p:spPr>
+          <a:xfrm>
+            <a:off x="537039" y="1661952"/>
+            <a:ext cx="9192749" cy="1005790"/>
+          </a:xfrm>
+          <a:prstGeom prst="rect">
+            <a:avLst/>
+          </a:prstGeom>
+        </p:spPr>
+        <p:txBody>
+          <a:bodyPr vert="horz" lIns="0" tIns="45720" rIns="0" bIns="45720" rtlCol="0" anchor="t">
+            <a:noAutofit/>
+          </a:bodyPr>
+          <a:lstStyle>
+            <a:lvl1pPr algn="ctr" defTabSz="685783" rtl="0" eaLnBrk="1" latinLnBrk="0" hangingPunct="1">
+              <a:lnSpc>
+                <a:spcPct val="90000"/>
+              </a:lnSpc>
+              <a:spcBef>
+                <a:spcPct val="0"/>
+              </a:spcBef>
+              <a:buNone/>
+              <a:defRPr sz="2400" b="1" kern="1200">
+                <a:solidFill>
+                  <a:schemeClr val="tx2"/>
+                </a:solidFill>
+                <a:latin typeface="+mj-lt"/>
+                <a:ea typeface="+mj-ea"/>
+                <a:cs typeface="+mj-cs"/>
+              </a:defRPr>
+            </a:lvl1pPr>
+          </a:lstStyle>
+          <a:p>
+            <a:pPr marL="285750" indent="-285750" algn="l">
+              <a:buFont typeface="Wingdings" panose="05000000000000000000" pitchFamily="2" charset="2"/>
+              <a:buChar char="u"/>
+            </a:pPr>
+            <a:r>
+              <a:rPr lang="zh-TW" altLang="en-US" sz="1800" dirty="0">
+                <a:solidFill>
+                  <a:srgbClr val="002060"/>
+                </a:solidFill>
+              </a:rPr>
+              <a:t>用戶端主要在提供介面執行領料、入庫等作業行為，整個工廠可存在多台。</a:t>
+            </a:r>
+            <a:endParaRPr lang="en-US" altLang="zh-TW" sz="1800" dirty="0">
+              <a:solidFill>
+                <a:srgbClr val="002060"/>
+              </a:solidFill>
+            </a:endParaRPr>
+          </a:p>
+          <a:p>
+            <a:pPr marL="285750" indent="-285750" algn="l">
+              <a:buFont typeface="Wingdings" panose="05000000000000000000" pitchFamily="2" charset="2"/>
+              <a:buChar char="u"/>
+            </a:pPr>
+            <a:r>
+              <a:rPr lang="zh-TW" altLang="en-US" sz="1800" dirty="0">
+                <a:solidFill>
+                  <a:srgbClr val="002060"/>
+                </a:solidFill>
+              </a:rPr>
+              <a:t>用戶端設定檔位於資料夾內</a:t>
+            </a:r>
+            <a:r>
+              <a:rPr lang="en-US" altLang="zh-TW" sz="1800" dirty="0">
+                <a:solidFill>
+                  <a:srgbClr val="002060"/>
+                </a:solidFill>
+              </a:rPr>
+              <a:t>Config.ini</a:t>
+            </a:r>
+          </a:p>
+          <a:p>
+            <a:pPr marL="285750" indent="-285750" algn="l">
+              <a:buFont typeface="Wingdings" panose="05000000000000000000" pitchFamily="2" charset="2"/>
+              <a:buChar char="u"/>
+            </a:pPr>
+            <a:r>
+              <a:rPr lang="en-US" altLang="zh-TW" sz="1800" dirty="0" err="1">
+                <a:solidFill>
+                  <a:srgbClr val="002060"/>
+                </a:solidFill>
+              </a:rPr>
+              <a:t>ServerIP</a:t>
+            </a:r>
+            <a:r>
+              <a:rPr lang="en-US" altLang="zh-TW" sz="1800" dirty="0">
+                <a:solidFill>
+                  <a:srgbClr val="002060"/>
+                </a:solidFill>
+              </a:rPr>
+              <a:t> : </a:t>
+            </a:r>
+            <a:r>
+              <a:rPr lang="zh-TW" altLang="en-US" sz="1800" dirty="0">
+                <a:solidFill>
+                  <a:srgbClr val="002060"/>
+                </a:solidFill>
+              </a:rPr>
+              <a:t>後端</a:t>
+            </a:r>
+            <a:r>
+              <a:rPr lang="en-US" altLang="zh-TW" sz="1800" dirty="0">
+                <a:solidFill>
+                  <a:srgbClr val="002060"/>
+                </a:solidFill>
+              </a:rPr>
+              <a:t>Server</a:t>
+            </a:r>
+            <a:r>
+              <a:rPr lang="zh-TW" altLang="en-US" sz="1800" dirty="0">
+                <a:solidFill>
+                  <a:srgbClr val="002060"/>
+                </a:solidFill>
+              </a:rPr>
+              <a:t>的</a:t>
+            </a:r>
+            <a:r>
+              <a:rPr lang="en-US" altLang="zh-TW" sz="1800" dirty="0">
+                <a:solidFill>
+                  <a:srgbClr val="002060"/>
+                </a:solidFill>
+              </a:rPr>
+              <a:t>IP</a:t>
+            </a:r>
+          </a:p>
+          <a:p>
+            <a:pPr marL="285750" indent="-285750" algn="l">
+              <a:buFont typeface="Wingdings" panose="05000000000000000000" pitchFamily="2" charset="2"/>
+              <a:buChar char="u"/>
+            </a:pPr>
+            <a:r>
+              <a:rPr lang="en-US" altLang="zh-TW" sz="1800" dirty="0" err="1">
+                <a:solidFill>
+                  <a:srgbClr val="002060"/>
+                </a:solidFill>
+              </a:rPr>
+              <a:t>ServerPort</a:t>
+            </a:r>
+            <a:r>
+              <a:rPr lang="en-US" altLang="zh-TW" sz="1800" dirty="0">
+                <a:solidFill>
+                  <a:srgbClr val="002060"/>
+                </a:solidFill>
+              </a:rPr>
+              <a:t> : </a:t>
+            </a:r>
+            <a:r>
+              <a:rPr lang="zh-TW" altLang="en-US" sz="1800" dirty="0">
+                <a:solidFill>
+                  <a:srgbClr val="002060"/>
+                </a:solidFill>
+              </a:rPr>
+              <a:t>後端</a:t>
+            </a:r>
+            <a:r>
+              <a:rPr lang="en-US" altLang="zh-TW" sz="1800" dirty="0">
+                <a:solidFill>
+                  <a:srgbClr val="002060"/>
+                </a:solidFill>
+              </a:rPr>
+              <a:t>Server</a:t>
+            </a:r>
+            <a:r>
+              <a:rPr lang="zh-TW" altLang="en-US" sz="1800" dirty="0">
+                <a:solidFill>
+                  <a:srgbClr val="002060"/>
+                </a:solidFill>
+              </a:rPr>
+              <a:t>的</a:t>
+            </a:r>
+            <a:r>
+              <a:rPr lang="en-US" altLang="zh-TW" sz="1800" dirty="0">
+                <a:solidFill>
+                  <a:srgbClr val="002060"/>
+                </a:solidFill>
+              </a:rPr>
+              <a:t>Port</a:t>
+            </a:r>
+            <a:r>
+              <a:rPr lang="zh-TW" altLang="en-US" sz="1800" dirty="0">
+                <a:solidFill>
+                  <a:srgbClr val="002060"/>
+                </a:solidFill>
+              </a:rPr>
+              <a:t>，預設是</a:t>
+            </a:r>
+            <a:r>
+              <a:rPr lang="en-US" altLang="zh-TW" sz="1800" dirty="0">
+                <a:solidFill>
+                  <a:srgbClr val="002060"/>
+                </a:solidFill>
+              </a:rPr>
+              <a:t>5000</a:t>
+            </a:r>
+          </a:p>
+          <a:p>
+            <a:pPr marL="285750" indent="-285750" algn="l">
+              <a:buFont typeface="Wingdings" panose="05000000000000000000" pitchFamily="2" charset="2"/>
+              <a:buChar char="u"/>
+            </a:pPr>
+            <a:r>
+              <a:rPr lang="en-US" altLang="zh-TW" sz="1800" dirty="0">
+                <a:solidFill>
+                  <a:srgbClr val="002060"/>
+                </a:solidFill>
+              </a:rPr>
+              <a:t>Language : </a:t>
+            </a:r>
+            <a:r>
+              <a:rPr lang="zh-TW" altLang="en-US" sz="1800" dirty="0">
+                <a:solidFill>
+                  <a:srgbClr val="002060"/>
+                </a:solidFill>
+              </a:rPr>
+              <a:t>系統語系設定，目前支援中文</a:t>
+            </a:r>
+            <a:r>
+              <a:rPr lang="en-US" altLang="zh-TW" sz="1800" dirty="0">
+                <a:solidFill>
+                  <a:srgbClr val="002060"/>
+                </a:solidFill>
+              </a:rPr>
+              <a:t>(</a:t>
+            </a:r>
+            <a:r>
+              <a:rPr lang="en-US" altLang="zh-TW" sz="1800" dirty="0" err="1">
+                <a:solidFill>
+                  <a:srgbClr val="002060"/>
+                </a:solidFill>
+              </a:rPr>
+              <a:t>zh</a:t>
+            </a:r>
+            <a:r>
+              <a:rPr lang="en-US" altLang="zh-TW" sz="1800" dirty="0">
+                <a:solidFill>
+                  <a:srgbClr val="002060"/>
+                </a:solidFill>
+              </a:rPr>
+              <a:t>-TW)</a:t>
+            </a:r>
+            <a:r>
+              <a:rPr lang="zh-TW" altLang="en-US" sz="1800" dirty="0">
+                <a:solidFill>
+                  <a:srgbClr val="002060"/>
+                </a:solidFill>
+              </a:rPr>
+              <a:t>、英文</a:t>
+            </a:r>
+            <a:r>
+              <a:rPr lang="en-US" altLang="zh-TW" sz="1800" dirty="0">
+                <a:solidFill>
+                  <a:srgbClr val="002060"/>
+                </a:solidFill>
+              </a:rPr>
+              <a:t>(</a:t>
+            </a:r>
+            <a:r>
+              <a:rPr lang="en-US" altLang="zh-TW" sz="1800" dirty="0" err="1">
+                <a:solidFill>
+                  <a:srgbClr val="002060"/>
+                </a:solidFill>
+              </a:rPr>
+              <a:t>en</a:t>
+            </a:r>
+            <a:r>
+              <a:rPr lang="en-US" altLang="zh-TW" sz="1800" dirty="0">
+                <a:solidFill>
+                  <a:srgbClr val="002060"/>
+                </a:solidFill>
+              </a:rPr>
+              <a:t>)</a:t>
+            </a:r>
+            <a:r>
+              <a:rPr lang="zh-TW" altLang="en-US" sz="1800" dirty="0">
+                <a:solidFill>
+                  <a:srgbClr val="002060"/>
+                </a:solidFill>
+              </a:rPr>
+              <a:t>、德文</a:t>
+            </a:r>
+            <a:r>
+              <a:rPr lang="en-US" altLang="zh-TW" sz="1800" dirty="0">
+                <a:solidFill>
+                  <a:srgbClr val="002060"/>
+                </a:solidFill>
+              </a:rPr>
+              <a:t>(de)</a:t>
+            </a:r>
+          </a:p>
+          <a:p>
+            <a:pPr marL="285750" indent="-285750" algn="l">
+              <a:buFont typeface="Wingdings" panose="05000000000000000000" pitchFamily="2" charset="2"/>
+              <a:buChar char="u"/>
+            </a:pPr>
+            <a:r>
+              <a:rPr lang="en-US" altLang="zh-TW" sz="1800" dirty="0" err="1">
+                <a:solidFill>
+                  <a:srgbClr val="002060"/>
+                </a:solidFill>
+              </a:rPr>
+              <a:t>AutoLogoutMinutes</a:t>
+            </a:r>
+            <a:r>
+              <a:rPr lang="zh-TW" altLang="en-US" sz="1800" dirty="0">
+                <a:solidFill>
+                  <a:srgbClr val="002060"/>
+                </a:solidFill>
+              </a:rPr>
+              <a:t> </a:t>
+            </a:r>
+            <a:r>
+              <a:rPr lang="en-US" altLang="zh-TW" sz="1800" dirty="0">
+                <a:solidFill>
+                  <a:srgbClr val="002060"/>
+                </a:solidFill>
+              </a:rPr>
+              <a:t>:</a:t>
+            </a:r>
+            <a:r>
+              <a:rPr lang="zh-TW" altLang="en-US" sz="1800" dirty="0">
+                <a:solidFill>
+                  <a:srgbClr val="002060"/>
+                </a:solidFill>
+              </a:rPr>
+              <a:t> 閒置多久後自動登出</a:t>
+            </a:r>
+            <a:endParaRPr lang="en-US" altLang="zh-TW" sz="1800" dirty="0">
+              <a:solidFill>
+                <a:srgbClr val="002060"/>
+              </a:solidFill>
+            </a:endParaRPr>
+          </a:p>
+          <a:p>
+            <a:pPr marL="285750" indent="-285750" algn="l">
+              <a:buFont typeface="Wingdings" panose="05000000000000000000" pitchFamily="2" charset="2"/>
+              <a:buChar char="u"/>
+            </a:pPr>
+            <a:endParaRPr lang="en-US" altLang="zh-TW" sz="1800" dirty="0">
+              <a:solidFill>
+                <a:srgbClr val="002060"/>
+              </a:solidFill>
+            </a:endParaRPr>
+          </a:p>
+        </p:txBody>
+      </p:sp>
+    </p:spTree>
+    <p:extLst>
+      <p:ext uri="{BB962C8B-B14F-4D97-AF65-F5344CB8AC3E}">
+        <p14:creationId xmlns:p14="http://schemas.microsoft.com/office/powerpoint/2010/main" val="1582073006"/>
+      </p:ext>
+    </p:extLst>
+  </p:cSld>
+  <p:clrMapOvr>
+    <a:masterClrMapping/>
+  </p:clrMapOvr>
+</p:sld>
+</file>
+
+<file path=ppt/slides/slide5.xml><?xml version="1.0" encoding="utf-8"?>
 <p:sld xmlns:a="http://schemas.openxmlformats.org/drawingml/2006/main" xmlns:r="http://schemas.openxmlformats.org/officeDocument/2006/relationships" xmlns:p="http://schemas.openxmlformats.org/presentationml/2006/main">
   <p:cSld>
     <p:spTree>
@@ -9307,7 +12905,7 @@
 </p:sld>
 </file>
 
-<file path=ppt/slides/slide4.xml><?xml version="1.0" encoding="utf-8"?>
+<file path=ppt/slides/slide6.xml><?xml version="1.0" encoding="utf-8"?>
 <p:sld xmlns:a="http://schemas.openxmlformats.org/drawingml/2006/main" xmlns:r="http://schemas.openxmlformats.org/officeDocument/2006/relationships" xmlns:p="http://schemas.openxmlformats.org/presentationml/2006/main">
   <p:cSld>
     <p:spTree>
@@ -9330,6 +12928,36 @@
           <a:chExt cx="0" cy="0"/>
         </a:xfrm>
       </p:grpSpPr>
+      <p:pic>
+        <p:nvPicPr>
+          <p:cNvPr id="4" name="圖片 3" descr="The image displays a Chinese interface for a Warehouse Management System, showing a form with fields for item name, specifications, current stock, and a barcode, along with a message indicating the system is ready and a notification that a service link is connected.&#10;&#10;AI 產生的內容可能不正確。">
+            <a:extLst>
+              <a:ext uri="{FF2B5EF4-FFF2-40B4-BE49-F238E27FC236}">
+                <a16:creationId xmlns:a16="http://schemas.microsoft.com/office/drawing/2014/main" id="{EAAC7EE6-EE61-487E-A817-347E638A69BD}"/>
+              </a:ext>
+            </a:extLst>
+          </p:cNvPr>
+          <p:cNvPicPr>
+            <a:picLocks noChangeAspect="1"/>
+          </p:cNvPicPr>
+          <p:nvPr/>
+        </p:nvPicPr>
+        <p:blipFill>
+          <a:blip r:embed="rId3"/>
+          <a:stretch>
+            <a:fillRect/>
+          </a:stretch>
+        </p:blipFill>
+        <p:spPr>
+          <a:xfrm>
+            <a:off x="7577392" y="1080937"/>
+            <a:ext cx="4295803" cy="5406685"/>
+          </a:xfrm>
+          <a:prstGeom prst="rect">
+            <a:avLst/>
+          </a:prstGeom>
+        </p:spPr>
+      </p:pic>
       <p:sp>
         <p:nvSpPr>
           <p:cNvPr id="3" name="標題 2">
@@ -9594,36 +13222,6 @@
           </a:p>
         </p:txBody>
       </p:sp>
-      <p:pic>
-        <p:nvPicPr>
-          <p:cNvPr id="5" name="圖片 4" descr="The image displays a Chinese language user interface for a parts management system, with sections for user management, adding materials, low stock alerts, and current stock levels, along with a confirmation button.&#10;&#10;AI 產生的內容可能不正確。">
-            <a:extLst>
-              <a:ext uri="{FF2B5EF4-FFF2-40B4-BE49-F238E27FC236}">
-                <a16:creationId xmlns:a16="http://schemas.microsoft.com/office/drawing/2014/main" id="{5373E9E3-B34B-9797-2D17-34821F2DCE00}"/>
-              </a:ext>
-            </a:extLst>
-          </p:cNvPr>
-          <p:cNvPicPr>
-            <a:picLocks noChangeAspect="1"/>
-          </p:cNvPicPr>
-          <p:nvPr/>
-        </p:nvPicPr>
-        <p:blipFill>
-          <a:blip r:embed="rId3"/>
-          <a:stretch>
-            <a:fillRect/>
-          </a:stretch>
-        </p:blipFill>
-        <p:spPr>
-          <a:xfrm>
-            <a:off x="7538603" y="1060913"/>
-            <a:ext cx="4160489" cy="5440049"/>
-          </a:xfrm>
-          <a:prstGeom prst="rect">
-            <a:avLst/>
-          </a:prstGeom>
-        </p:spPr>
-      </p:pic>
       <p:grpSp>
         <p:nvGrpSpPr>
           <p:cNvPr id="9" name="群組 8">
@@ -10105,7 +13703,7 @@
 </p:sld>
 </file>
 
-<file path=ppt/slides/slide5.xml><?xml version="1.0" encoding="utf-8"?>
+<file path=ppt/slides/slide7.xml><?xml version="1.0" encoding="utf-8"?>
 <p:sld xmlns:a="http://schemas.openxmlformats.org/drawingml/2006/main" xmlns:r="http://schemas.openxmlformats.org/officeDocument/2006/relationships" xmlns:p="http://schemas.openxmlformats.org/presentationml/2006/main">
   <p:cSld>
     <p:spTree>
@@ -10745,7 +14343,7 @@
 </p:sld>
 </file>
 
-<file path=ppt/slides/slide6.xml><?xml version="1.0" encoding="utf-8"?>
+<file path=ppt/slides/slide8.xml><?xml version="1.0" encoding="utf-8"?>
 <p:sld xmlns:a="http://schemas.openxmlformats.org/drawingml/2006/main" xmlns:r="http://schemas.openxmlformats.org/officeDocument/2006/relationships" xmlns:p="http://schemas.openxmlformats.org/presentationml/2006/main">
   <p:cSld>
     <p:spTree>
@@ -10898,8 +14496,8 @@
         </p:nvSpPr>
         <p:spPr>
           <a:xfrm>
-            <a:off x="537039" y="1661952"/>
-            <a:ext cx="9192749" cy="1005790"/>
+            <a:off x="537039" y="1661951"/>
+            <a:ext cx="5703505" cy="2269026"/>
           </a:xfrm>
           <a:prstGeom prst="rect">
             <a:avLst/>
@@ -10939,23 +14537,7 @@
                   <a:srgbClr val="002060"/>
                 </a:solidFill>
               </a:rPr>
-              <a:t>料號 </a:t>
-            </a:r>
-            <a:r>
-              <a:rPr lang="en-US" altLang="zh-TW" sz="1800" dirty="0">
-                <a:solidFill>
-                  <a:srgbClr val="002060"/>
-                </a:solidFill>
-              </a:rPr>
-              <a:t>(Part No)</a:t>
-            </a:r>
-            <a:r>
-              <a:rPr lang="zh-TW" altLang="en-US" sz="1800" dirty="0">
-                <a:solidFill>
-                  <a:srgbClr val="002060"/>
-                </a:solidFill>
-              </a:rPr>
-              <a:t>：唯一的識別碼，儲存後不可更改。</a:t>
+              <a:t>料號：唯一的識別碼，儲存後不可更改。</a:t>
             </a:r>
             <a:endParaRPr lang="en-US" altLang="zh-TW" sz="1800" dirty="0">
               <a:solidFill>
@@ -10974,7 +14556,7 @@
                   <a:srgbClr val="002060"/>
                 </a:solidFill>
               </a:rPr>
-              <a:t>名稱</a:t>
+              <a:t>品名 </a:t>
             </a:r>
             <a:r>
               <a:rPr lang="en-US" altLang="zh-TW" sz="1800" dirty="0">
@@ -10982,7 +14564,7 @@
                   <a:srgbClr val="002060"/>
                 </a:solidFill>
               </a:rPr>
-              <a:t>(Name) : </a:t>
+              <a:t>: </a:t>
             </a:r>
             <a:r>
               <a:rPr lang="zh-TW" altLang="en-US" sz="1800" dirty="0">
@@ -11017,7 +14599,23 @@
                   <a:srgbClr val="002060"/>
                 </a:solidFill>
               </a:rPr>
-              <a:t>(Specification) : </a:t>
+              <a:t>/</a:t>
+            </a:r>
+            <a:r>
+              <a:rPr lang="zh-TW" altLang="en-US" sz="1800" dirty="0">
+                <a:solidFill>
+                  <a:srgbClr val="002060"/>
+                </a:solidFill>
+              </a:rPr>
+              <a:t>型號 </a:t>
+            </a:r>
+            <a:r>
+              <a:rPr lang="en-US" altLang="zh-TW" sz="1800" dirty="0">
+                <a:solidFill>
+                  <a:srgbClr val="002060"/>
+                </a:solidFill>
+              </a:rPr>
+              <a:t>: </a:t>
             </a:r>
             <a:r>
               <a:rPr lang="zh-TW" altLang="en-US" sz="1800" dirty="0">
@@ -11044,23 +14642,7 @@
                   <a:srgbClr val="002060"/>
                 </a:solidFill>
               </a:rPr>
-              <a:t>安全庫存 </a:t>
-            </a:r>
-            <a:r>
-              <a:rPr lang="en-US" altLang="zh-TW" sz="1800" dirty="0">
-                <a:solidFill>
-                  <a:srgbClr val="002060"/>
-                </a:solidFill>
-              </a:rPr>
-              <a:t>(Safe Stock)</a:t>
-            </a:r>
-            <a:r>
-              <a:rPr lang="zh-TW" altLang="en-US" sz="1800" dirty="0">
-                <a:solidFill>
-                  <a:srgbClr val="002060"/>
-                </a:solidFill>
-              </a:rPr>
-              <a:t>：設定此零件的最低安全總量。</a:t>
+              <a:t>安全庫存：設定此零件的最低安全總量。</a:t>
             </a:r>
             <a:endParaRPr lang="en-US" altLang="zh-TW" sz="1800" dirty="0">
               <a:solidFill>
@@ -11079,23 +14661,7 @@
                   <a:srgbClr val="002060"/>
                 </a:solidFill>
               </a:rPr>
-              <a:t>交期 </a:t>
-            </a:r>
-            <a:r>
-              <a:rPr lang="en-US" altLang="zh-TW" sz="1800" dirty="0">
-                <a:solidFill>
-                  <a:srgbClr val="002060"/>
-                </a:solidFill>
-              </a:rPr>
-              <a:t>(Lead Days)</a:t>
-            </a:r>
-            <a:r>
-              <a:rPr lang="zh-TW" altLang="en-US" sz="1800" dirty="0">
-                <a:solidFill>
-                  <a:srgbClr val="002060"/>
-                </a:solidFill>
-              </a:rPr>
-              <a:t>：設定補貨所需天數。</a:t>
+              <a:t>採購交期：設定補貨所需天數。</a:t>
             </a:r>
             <a:endParaRPr lang="en-US" altLang="zh-TW" sz="1800" dirty="0">
               <a:solidFill>
@@ -11114,7 +14680,7 @@
                   <a:srgbClr val="002060"/>
                 </a:solidFill>
               </a:rPr>
-              <a:t>站別</a:t>
+              <a:t>主要供應商 </a:t>
             </a:r>
             <a:r>
               <a:rPr lang="en-US" altLang="zh-TW" sz="1800" dirty="0">
@@ -11122,7 +14688,7 @@
                   <a:srgbClr val="002060"/>
                 </a:solidFill>
               </a:rPr>
-              <a:t>(Station) : </a:t>
+              <a:t>:</a:t>
             </a:r>
             <a:r>
               <a:rPr lang="zh-TW" altLang="en-US" sz="1800" dirty="0">
@@ -11130,7 +14696,128 @@
                   <a:srgbClr val="002060"/>
                 </a:solidFill>
               </a:rPr>
-              <a:t>零件所屬站別，選填</a:t>
+              <a:t> 供應商名稱。</a:t>
+            </a:r>
+            <a:endParaRPr lang="en-US" altLang="zh-TW" sz="1800" dirty="0">
+              <a:solidFill>
+                <a:srgbClr val="002060"/>
+              </a:solidFill>
+            </a:endParaRPr>
+          </a:p>
+          <a:p>
+            <a:pPr marL="342900" indent="-342900" algn="l">
+              <a:buFont typeface="+mj-lt"/>
+              <a:buAutoNum type="arabicPeriod"/>
+            </a:pPr>
+            <a:r>
+              <a:rPr lang="zh-TW" altLang="en-US" sz="1800" dirty="0">
+                <a:solidFill>
+                  <a:srgbClr val="002060"/>
+                </a:solidFill>
+              </a:rPr>
+              <a:t>製造商 </a:t>
+            </a:r>
+            <a:r>
+              <a:rPr lang="en-US" altLang="zh-TW" sz="1800" dirty="0">
+                <a:solidFill>
+                  <a:srgbClr val="002060"/>
+                </a:solidFill>
+              </a:rPr>
+              <a:t>:</a:t>
+            </a:r>
+            <a:r>
+              <a:rPr lang="zh-TW" altLang="en-US" sz="1800" dirty="0">
+                <a:solidFill>
+                  <a:srgbClr val="002060"/>
+                </a:solidFill>
+              </a:rPr>
+              <a:t> 製造商名稱。</a:t>
+            </a:r>
+            <a:endParaRPr lang="en-US" altLang="zh-TW" sz="1800" dirty="0">
+              <a:solidFill>
+                <a:srgbClr val="002060"/>
+              </a:solidFill>
+            </a:endParaRPr>
+          </a:p>
+          <a:p>
+            <a:pPr marL="342900" indent="-342900" algn="l">
+              <a:buFont typeface="+mj-lt"/>
+              <a:buAutoNum type="arabicPeriod"/>
+            </a:pPr>
+            <a:r>
+              <a:rPr lang="zh-TW" altLang="en-US" sz="1800" dirty="0">
+                <a:solidFill>
+                  <a:srgbClr val="002060"/>
+                </a:solidFill>
+              </a:rPr>
+              <a:t>期初在庫數量 </a:t>
+            </a:r>
+            <a:r>
+              <a:rPr lang="en-US" altLang="zh-TW" sz="1800" dirty="0">
+                <a:solidFill>
+                  <a:srgbClr val="002060"/>
+                </a:solidFill>
+              </a:rPr>
+              <a:t>: </a:t>
+            </a:r>
+            <a:r>
+              <a:rPr lang="zh-TW" altLang="en-US" sz="1800" dirty="0">
+                <a:solidFill>
+                  <a:srgbClr val="002060"/>
+                </a:solidFill>
+              </a:rPr>
+              <a:t>目前庫存</a:t>
+            </a:r>
+            <a:endParaRPr lang="en-US" altLang="zh-TW" sz="1800" dirty="0">
+              <a:solidFill>
+                <a:srgbClr val="002060"/>
+              </a:solidFill>
+            </a:endParaRPr>
+          </a:p>
+          <a:p>
+            <a:pPr marL="342900" indent="-342900" algn="l">
+              <a:buFont typeface="+mj-lt"/>
+              <a:buAutoNum type="arabicPeriod"/>
+            </a:pPr>
+            <a:r>
+              <a:rPr lang="zh-TW" altLang="en-US" sz="1800" dirty="0">
+                <a:solidFill>
+                  <a:srgbClr val="002060"/>
+                </a:solidFill>
+              </a:rPr>
+              <a:t>附件 </a:t>
+            </a:r>
+            <a:r>
+              <a:rPr lang="en-US" altLang="zh-TW" sz="1800" dirty="0">
+                <a:solidFill>
+                  <a:srgbClr val="002060"/>
+                </a:solidFill>
+              </a:rPr>
+              <a:t>:</a:t>
+            </a:r>
+            <a:r>
+              <a:rPr lang="zh-TW" altLang="en-US" sz="1800" dirty="0">
+                <a:solidFill>
+                  <a:srgbClr val="002060"/>
+                </a:solidFill>
+              </a:rPr>
+              <a:t> 僅支援</a:t>
+            </a:r>
+            <a:r>
+              <a:rPr lang="en-US" altLang="zh-TW" sz="1800" dirty="0">
+                <a:solidFill>
+                  <a:srgbClr val="002060"/>
+                </a:solidFill>
+              </a:rPr>
+              <a:t>PDF</a:t>
+            </a:r>
+            <a:r>
+              <a:rPr lang="zh-TW" altLang="en-US" sz="1800" dirty="0">
+                <a:solidFill>
+                  <a:srgbClr val="002060"/>
+                </a:solidFill>
+              </a:rPr>
+              <a:t>檔，一個料號最多兩個附件</a:t>
             </a:r>
           </a:p>
         </p:txBody>
@@ -11192,17 +14879,17 @@
                   <a:srgbClr val="002060"/>
                 </a:solidFill>
               </a:rPr>
-              <a:t>建立或編輯零件的基礎資訊。</a:t>
+              <a:t>建立零件的基礎資訊。</a:t>
             </a:r>
           </a:p>
         </p:txBody>
       </p:sp>
       <p:pic>
         <p:nvPicPr>
-          <p:cNvPr id="8" name="圖片 7" descr="The image displays a form with fields for Part Number, Name, Specification, Safety Stock, Lead Days, Station, and buttons for Save and Cancel.&#10;&#10;AI 產生的內容可能不正確。">
+          <p:cNvPr id="5" name="圖片 4" descr="The image shows a document with fields for material details, inventory, supplier, manufacturer, initial stock, storage warehouse, and an attachment area for up to two PDFs.&#10;&#10;AI 產生的內容可能不正確。">
             <a:extLst>
               <a:ext uri="{FF2B5EF4-FFF2-40B4-BE49-F238E27FC236}">
-                <a16:creationId xmlns:a16="http://schemas.microsoft.com/office/drawing/2014/main" id="{11DB298A-A487-8E73-81FF-8A80526822D4}"/>
+                <a16:creationId xmlns:a16="http://schemas.microsoft.com/office/drawing/2014/main" id="{613F2EB8-A068-AC25-F67E-698C40DB62A0}"/>
               </a:ext>
             </a:extLst>
           </p:cNvPr>
@@ -11219,8 +14906,8 @@
         </p:blipFill>
         <p:spPr>
           <a:xfrm>
-            <a:off x="6741726" y="1792467"/>
-            <a:ext cx="4969675" cy="4370116"/>
+            <a:off x="7274510" y="757233"/>
+            <a:ext cx="4380451" cy="5893378"/>
           </a:xfrm>
           <a:prstGeom prst="rect">
             <a:avLst/>
@@ -11240,7 +14927,7 @@
 </p:sld>
 </file>
 
-<file path=ppt/slides/slide7.xml><?xml version="1.0" encoding="utf-8"?>
+<file path=ppt/slides/slide9.xml><?xml version="1.0" encoding="utf-8"?>
 <p:sld xmlns:a="http://schemas.openxmlformats.org/drawingml/2006/main" xmlns:r="http://schemas.openxmlformats.org/officeDocument/2006/relationships" xmlns:p="http://schemas.openxmlformats.org/presentationml/2006/main">
   <p:cSld>
     <p:spTree>
@@ -11248,7 +14935,7 @@
         <p:cNvPr id="1" name="">
           <a:extLst>
             <a:ext uri="{FF2B5EF4-FFF2-40B4-BE49-F238E27FC236}">
-              <a16:creationId xmlns:a16="http://schemas.microsoft.com/office/drawing/2014/main" id="{888CCBA7-0506-C670-1535-B08FD3DB7191}"/>
+              <a16:creationId xmlns:a16="http://schemas.microsoft.com/office/drawing/2014/main" id="{1B04A490-AFC0-0EA3-F444-4F34D190A031}"/>
             </a:ext>
           </a:extLst>
         </p:cNvPr>
@@ -11268,7 +14955,7 @@
           <p:cNvPr id="3" name="標題 2">
             <a:extLst>
               <a:ext uri="{FF2B5EF4-FFF2-40B4-BE49-F238E27FC236}">
-                <a16:creationId xmlns:a16="http://schemas.microsoft.com/office/drawing/2014/main" id="{28074E02-8E7D-C833-0BFF-C2993072FFA4}"/>
+                <a16:creationId xmlns:a16="http://schemas.microsoft.com/office/drawing/2014/main" id="{470860C4-560A-7D3C-B577-198DA450D664}"/>
               </a:ext>
             </a:extLst>
           </p:cNvPr>
@@ -11315,7 +15002,7 @@
           <p:cNvPr id="53" name="標題 2">
             <a:extLst>
               <a:ext uri="{FF2B5EF4-FFF2-40B4-BE49-F238E27FC236}">
-                <a16:creationId xmlns:a16="http://schemas.microsoft.com/office/drawing/2014/main" id="{DD32D693-B9CD-C627-7DB5-BC71BD85CCD9}"/>
+                <a16:creationId xmlns:a16="http://schemas.microsoft.com/office/drawing/2014/main" id="{9FF7B84F-902C-20F5-F348-2781EDB663A7}"/>
               </a:ext>
             </a:extLst>
           </p:cNvPr>
@@ -11372,23 +15059,7 @@
                   <a:srgbClr val="0000FF"/>
                 </a:solidFill>
               </a:rPr>
-              <a:t>編輯</a:t>
-            </a:r>
-            <a:r>
-              <a:rPr lang="en-US" altLang="zh-TW" sz="1800" dirty="0">
-                <a:solidFill>
-                  <a:srgbClr val="0000FF"/>
-                </a:solidFill>
-              </a:rPr>
-              <a:t>/</a:t>
-            </a:r>
-            <a:r>
-              <a:rPr lang="zh-TW" altLang="en-US" sz="1800" dirty="0">
-                <a:solidFill>
-                  <a:srgbClr val="0000FF"/>
-                </a:solidFill>
-              </a:rPr>
-              <a:t>刪除物料</a:t>
+              <a:t>批次新增物料</a:t>
             </a:r>
           </a:p>
         </p:txBody>
@@ -11398,7 +15069,7 @@
           <p:cNvPr id="22" name="標題 2">
             <a:extLst>
               <a:ext uri="{FF2B5EF4-FFF2-40B4-BE49-F238E27FC236}">
-                <a16:creationId xmlns:a16="http://schemas.microsoft.com/office/drawing/2014/main" id="{537198B6-A9EA-3949-A249-B7B54A2D2385}"/>
+                <a16:creationId xmlns:a16="http://schemas.microsoft.com/office/drawing/2014/main" id="{BEA47B21-B138-F05A-89BF-DB492F5ACE61}"/>
               </a:ext>
             </a:extLst>
           </p:cNvPr>
@@ -11409,8 +15080,8 @@
         </p:nvSpPr>
         <p:spPr>
           <a:xfrm>
-            <a:off x="537039" y="1661952"/>
-            <a:ext cx="9192749" cy="1005790"/>
+            <a:off x="537040" y="1661951"/>
+            <a:ext cx="5192232" cy="2269026"/>
           </a:xfrm>
           <a:prstGeom prst="rect">
             <a:avLst/>
@@ -11450,7 +15121,7 @@
                   <a:srgbClr val="002060"/>
                 </a:solidFill>
               </a:rPr>
-              <a:t>料號 </a:t>
+              <a:t>產生匯入格式 </a:t>
             </a:r>
             <a:r>
               <a:rPr lang="en-US" altLang="zh-TW" sz="1800" dirty="0">
@@ -11458,7 +15129,7 @@
                   <a:srgbClr val="002060"/>
                 </a:solidFill>
               </a:rPr>
-              <a:t>(Part No)</a:t>
+              <a:t>:</a:t>
             </a:r>
             <a:r>
               <a:rPr lang="zh-TW" altLang="en-US" sz="1800" dirty="0">
@@ -11466,7 +15137,23 @@
                   <a:srgbClr val="002060"/>
                 </a:solidFill>
               </a:rPr>
-              <a:t>：不可更改。</a:t>
+              <a:t> 下載一個批次匯入的</a:t>
+            </a:r>
+            <a:r>
+              <a:rPr lang="en-US" altLang="zh-TW" sz="1800" dirty="0">
+                <a:solidFill>
+                  <a:srgbClr val="002060"/>
+                </a:solidFill>
+              </a:rPr>
+              <a:t>Excel</a:t>
+            </a:r>
+            <a:r>
+              <a:rPr lang="zh-TW" altLang="en-US" sz="1800" dirty="0">
+                <a:solidFill>
+                  <a:srgbClr val="002060"/>
+                </a:solidFill>
+              </a:rPr>
+              <a:t>表格。</a:t>
             </a:r>
             <a:endParaRPr lang="en-US" altLang="zh-TW" sz="1800" dirty="0">
               <a:solidFill>
@@ -11485,7 +15172,7 @@
                   <a:srgbClr val="002060"/>
                 </a:solidFill>
               </a:rPr>
-              <a:t>名稱</a:t>
+              <a:t>匯入物料檔案 </a:t>
             </a:r>
             <a:r>
               <a:rPr lang="en-US" altLang="zh-TW" sz="1800" dirty="0">
@@ -11493,7 +15180,7 @@
                   <a:srgbClr val="002060"/>
                 </a:solidFill>
               </a:rPr>
-              <a:t>(Name) : </a:t>
+              <a:t>:</a:t>
             </a:r>
             <a:r>
               <a:rPr lang="zh-TW" altLang="en-US" sz="1800" dirty="0">
@@ -11501,148 +15188,29 @@
                   <a:srgbClr val="002060"/>
                 </a:solidFill>
               </a:rPr>
-              <a:t>自定義名稱。</a:t>
+              <a:t> 匯入</a:t>
+            </a:r>
+            <a:r>
+              <a:rPr lang="en-US" altLang="zh-TW" sz="1800" dirty="0">
+                <a:solidFill>
+                  <a:srgbClr val="002060"/>
+                </a:solidFill>
+              </a:rPr>
+              <a:t>Excel</a:t>
+            </a:r>
+            <a:r>
+              <a:rPr lang="zh-TW" altLang="en-US" sz="1800" dirty="0">
+                <a:solidFill>
+                  <a:srgbClr val="002060"/>
+                </a:solidFill>
+              </a:rPr>
+              <a:t>表格，若料號已存在或缺少資料會跳過該筆資料。</a:t>
             </a:r>
             <a:endParaRPr lang="en-US" altLang="zh-TW" sz="1800" dirty="0">
               <a:solidFill>
                 <a:srgbClr val="002060"/>
               </a:solidFill>
             </a:endParaRPr>
-          </a:p>
-          <a:p>
-            <a:pPr marL="342900" indent="-342900" algn="l">
-              <a:buFont typeface="+mj-lt"/>
-              <a:buAutoNum type="arabicPeriod"/>
-            </a:pPr>
-            <a:r>
-              <a:rPr lang="zh-TW" altLang="en-US" sz="1800" dirty="0">
-                <a:solidFill>
-                  <a:srgbClr val="002060"/>
-                </a:solidFill>
-              </a:rPr>
-              <a:t>規格</a:t>
-            </a:r>
-            <a:r>
-              <a:rPr lang="en-US" altLang="zh-TW" sz="1800" dirty="0">
-                <a:solidFill>
-                  <a:srgbClr val="002060"/>
-                </a:solidFill>
-              </a:rPr>
-              <a:t>(Specification) : </a:t>
-            </a:r>
-            <a:r>
-              <a:rPr lang="zh-TW" altLang="en-US" sz="1800" dirty="0">
-                <a:solidFill>
-                  <a:srgbClr val="002060"/>
-                </a:solidFill>
-              </a:rPr>
-              <a:t>自定義敘述。</a:t>
-            </a:r>
-            <a:endParaRPr lang="en-US" altLang="zh-TW" sz="1800" dirty="0">
-              <a:solidFill>
-                <a:srgbClr val="002060"/>
-              </a:solidFill>
-            </a:endParaRPr>
-          </a:p>
-          <a:p>
-            <a:pPr marL="342900" indent="-342900" algn="l">
-              <a:buFont typeface="+mj-lt"/>
-              <a:buAutoNum type="arabicPeriod"/>
-            </a:pPr>
-            <a:r>
-              <a:rPr lang="zh-TW" altLang="en-US" sz="1800" dirty="0">
-                <a:solidFill>
-                  <a:srgbClr val="002060"/>
-                </a:solidFill>
-              </a:rPr>
-              <a:t>安全庫存 </a:t>
-            </a:r>
-            <a:r>
-              <a:rPr lang="en-US" altLang="zh-TW" sz="1800" dirty="0">
-                <a:solidFill>
-                  <a:srgbClr val="002060"/>
-                </a:solidFill>
-              </a:rPr>
-              <a:t>(Safe Stock)</a:t>
-            </a:r>
-            <a:r>
-              <a:rPr lang="zh-TW" altLang="en-US" sz="1800" dirty="0">
-                <a:solidFill>
-                  <a:srgbClr val="002060"/>
-                </a:solidFill>
-              </a:rPr>
-              <a:t>：設定此零件的最低安全總量。</a:t>
-            </a:r>
-            <a:endParaRPr lang="en-US" altLang="zh-TW" sz="1800" dirty="0">
-              <a:solidFill>
-                <a:srgbClr val="002060"/>
-              </a:solidFill>
-            </a:endParaRPr>
-          </a:p>
-          <a:p>
-            <a:pPr marL="342900" indent="-342900" algn="l">
-              <a:buFont typeface="+mj-lt"/>
-              <a:buAutoNum type="arabicPeriod"/>
-            </a:pPr>
-            <a:r>
-              <a:rPr lang="zh-TW" altLang="en-US" sz="1800" dirty="0">
-                <a:solidFill>
-                  <a:srgbClr val="002060"/>
-                </a:solidFill>
-              </a:rPr>
-              <a:t>交期 </a:t>
-            </a:r>
-            <a:r>
-              <a:rPr lang="en-US" altLang="zh-TW" sz="1800" dirty="0">
-                <a:solidFill>
-                  <a:srgbClr val="002060"/>
-                </a:solidFill>
-              </a:rPr>
-              <a:t>(Lead Days)</a:t>
-            </a:r>
-            <a:r>
-              <a:rPr lang="zh-TW" altLang="en-US" sz="1800" dirty="0">
-                <a:solidFill>
-                  <a:srgbClr val="002060"/>
-                </a:solidFill>
-              </a:rPr>
-              <a:t>：設定補貨所需天數。</a:t>
-            </a:r>
-            <a:endParaRPr lang="en-US" altLang="zh-TW" sz="1800" dirty="0">
-              <a:solidFill>
-                <a:srgbClr val="002060"/>
-              </a:solidFill>
-            </a:endParaRPr>
-          </a:p>
-          <a:p>
-            <a:pPr marL="342900" indent="-342900" algn="l">
-              <a:buFont typeface="+mj-lt"/>
-              <a:buAutoNum type="arabicPeriod"/>
-            </a:pPr>
-            <a:r>
-              <a:rPr lang="zh-TW" altLang="en-US" sz="1800" dirty="0">
-                <a:solidFill>
-                  <a:srgbClr val="002060"/>
-                </a:solidFill>
-              </a:rPr>
-              <a:t>站別</a:t>
-            </a:r>
-            <a:r>
-              <a:rPr lang="en-US" altLang="zh-TW" sz="1800" dirty="0">
-                <a:solidFill>
-                  <a:srgbClr val="002060"/>
-                </a:solidFill>
-              </a:rPr>
-              <a:t>(Station) : </a:t>
-            </a:r>
-            <a:r>
-              <a:rPr lang="zh-TW" altLang="en-US" sz="1800" dirty="0">
-                <a:solidFill>
-                  <a:srgbClr val="002060"/>
-                </a:solidFill>
-              </a:rPr>
-              <a:t>零件所屬站別，選填</a:t>
-            </a:r>
           </a:p>
         </p:txBody>
       </p:sp>
@@ -11651,7 +15219,7 @@
           <p:cNvPr id="2" name="標題 2">
             <a:extLst>
               <a:ext uri="{FF2B5EF4-FFF2-40B4-BE49-F238E27FC236}">
-                <a16:creationId xmlns:a16="http://schemas.microsoft.com/office/drawing/2014/main" id="{1E1055AF-5024-F161-5AF8-BD0BD30461A0}"/>
+                <a16:creationId xmlns:a16="http://schemas.microsoft.com/office/drawing/2014/main" id="{8767E269-9CFF-5A14-052F-328B4EEFC91C}"/>
               </a:ext>
             </a:extLst>
           </p:cNvPr>
@@ -11703,17 +15271,17 @@
                   <a:srgbClr val="002060"/>
                 </a:solidFill>
               </a:rPr>
-              <a:t>編輯或刪除零件的基礎資訊，在庫存查詢中對要編輯或刪除的物料點右鍵即可出現選單。</a:t>
+              <a:t>批次建立零件的基礎資訊。</a:t>
             </a:r>
           </a:p>
         </p:txBody>
       </p:sp>
       <p:pic>
         <p:nvPicPr>
-          <p:cNvPr id="7" name="圖片 6" descr="The image displays a table or form with various fields for inputting information, including a search bar, a section for material names, size or model numbers, and buttons for actions such as editing or deleting, specifically for a 2-4mm range.&#10;&#10;AI 產生的內容可能不正確。">
+          <p:cNvPr id="6" name="圖片 5" descr="The image shows a computer interface displaying a list of successfully imported materials, each entry showing a timestamp and a unique identifier.&#10;&#10;AI 產生的內容可能不正確。">
             <a:extLst>
               <a:ext uri="{FF2B5EF4-FFF2-40B4-BE49-F238E27FC236}">
-                <a16:creationId xmlns:a16="http://schemas.microsoft.com/office/drawing/2014/main" id="{B93D4E19-8D5A-1107-BD29-16DA192F8144}"/>
+                <a16:creationId xmlns:a16="http://schemas.microsoft.com/office/drawing/2014/main" id="{E42C0942-9C94-1F8B-F48D-BF32640ABC1C}"/>
               </a:ext>
             </a:extLst>
           </p:cNvPr>
@@ -11730,377 +15298,8 @@
         </p:blipFill>
         <p:spPr>
           <a:xfrm>
-            <a:off x="1411580" y="3429000"/>
-            <a:ext cx="4248150" cy="3105150"/>
-          </a:xfrm>
-          <a:prstGeom prst="rect">
-            <a:avLst/>
-          </a:prstGeom>
-        </p:spPr>
-      </p:pic>
-      <p:pic>
-        <p:nvPicPr>
-          <p:cNvPr id="10" name="圖片 9" descr="The image shows a software interface with fields for part number, name, specification, safe stock, lead days, and station, and includes options to save or cancel.&#10;&#10;AI 產生的內容可能不正確。">
-            <a:extLst>
-              <a:ext uri="{FF2B5EF4-FFF2-40B4-BE49-F238E27FC236}">
-                <a16:creationId xmlns:a16="http://schemas.microsoft.com/office/drawing/2014/main" id="{8AD69383-3527-BFC0-CD1F-FDCA53B8451E}"/>
-              </a:ext>
-            </a:extLst>
-          </p:cNvPr>
-          <p:cNvPicPr>
-            <a:picLocks noChangeAspect="1"/>
-          </p:cNvPicPr>
-          <p:nvPr/>
-        </p:nvPicPr>
-        <p:blipFill>
-          <a:blip r:embed="rId4"/>
-          <a:stretch>
-            <a:fillRect/>
-          </a:stretch>
-        </p:blipFill>
-        <p:spPr>
-          <a:xfrm>
-            <a:off x="6534270" y="1552266"/>
-            <a:ext cx="5262303" cy="4654026"/>
-          </a:xfrm>
-          <a:prstGeom prst="rect">
-            <a:avLst/>
-          </a:prstGeom>
-        </p:spPr>
-      </p:pic>
-    </p:spTree>
-    <p:extLst>
-      <p:ext uri="{BB962C8B-B14F-4D97-AF65-F5344CB8AC3E}">
-        <p14:creationId xmlns:p14="http://schemas.microsoft.com/office/powerpoint/2010/main" val="319827598"/>
-      </p:ext>
-    </p:extLst>
-  </p:cSld>
-  <p:clrMapOvr>
-    <a:masterClrMapping/>
-  </p:clrMapOvr>
-</p:sld>
-</file>
-
-<file path=ppt/slides/slide8.xml><?xml version="1.0" encoding="utf-8"?>
-<p:sld xmlns:a="http://schemas.openxmlformats.org/drawingml/2006/main" xmlns:r="http://schemas.openxmlformats.org/officeDocument/2006/relationships" xmlns:p="http://schemas.openxmlformats.org/presentationml/2006/main">
-  <p:cSld>
-    <p:spTree>
-      <p:nvGrpSpPr>
-        <p:cNvPr id="1" name="">
-          <a:extLst>
-            <a:ext uri="{FF2B5EF4-FFF2-40B4-BE49-F238E27FC236}">
-              <a16:creationId xmlns:a16="http://schemas.microsoft.com/office/drawing/2014/main" id="{9087C49E-ACCC-CC16-7516-4D97DD300EFB}"/>
-            </a:ext>
-          </a:extLst>
-        </p:cNvPr>
-        <p:cNvGrpSpPr/>
-        <p:nvPr/>
-      </p:nvGrpSpPr>
-      <p:grpSpPr>
-        <a:xfrm>
-          <a:off x="0" y="0"/>
-          <a:ext cx="0" cy="0"/>
-          <a:chOff x="0" y="0"/>
-          <a:chExt cx="0" cy="0"/>
-        </a:xfrm>
-      </p:grpSpPr>
-      <p:sp>
-        <p:nvSpPr>
-          <p:cNvPr id="3" name="標題 2">
-            <a:extLst>
-              <a:ext uri="{FF2B5EF4-FFF2-40B4-BE49-F238E27FC236}">
-                <a16:creationId xmlns:a16="http://schemas.microsoft.com/office/drawing/2014/main" id="{B7F30EA8-14CA-0337-626E-936AC979D801}"/>
-              </a:ext>
-            </a:extLst>
-          </p:cNvPr>
-          <p:cNvSpPr>
-            <a:spLocks noGrp="1"/>
-          </p:cNvSpPr>
-          <p:nvPr>
-            <p:ph type="title"/>
-          </p:nvPr>
-        </p:nvSpPr>
-        <p:spPr>
-          <a:xfrm>
-            <a:off x="319892" y="107816"/>
-            <a:ext cx="11379200" cy="461659"/>
-          </a:xfrm>
-        </p:spPr>
-        <p:txBody>
-          <a:bodyPr>
-            <a:noAutofit/>
-          </a:bodyPr>
-          <a:lstStyle/>
-          <a:p>
-            <a:r>
-              <a:rPr lang="zh-TW" altLang="en-US" sz="2800" dirty="0"/>
-              <a:t>庫存查詢看板 </a:t>
-            </a:r>
-            <a:r>
-              <a:rPr lang="en-US" altLang="zh-TW" sz="2800" dirty="0"/>
-              <a:t>(Inventory Monitoring)</a:t>
-            </a:r>
-          </a:p>
-        </p:txBody>
-      </p:sp>
-      <p:sp>
-        <p:nvSpPr>
-          <p:cNvPr id="53" name="標題 2">
-            <a:extLst>
-              <a:ext uri="{FF2B5EF4-FFF2-40B4-BE49-F238E27FC236}">
-                <a16:creationId xmlns:a16="http://schemas.microsoft.com/office/drawing/2014/main" id="{B596482B-6D93-EDE6-9CE4-8F0026113B93}"/>
-              </a:ext>
-            </a:extLst>
-          </p:cNvPr>
-          <p:cNvSpPr txBox="1">
-            <a:spLocks/>
-          </p:cNvSpPr>
-          <p:nvPr/>
-        </p:nvSpPr>
-        <p:spPr>
-          <a:xfrm>
-            <a:off x="217952" y="1200293"/>
-            <a:ext cx="5511319" cy="461659"/>
-          </a:xfrm>
-          <a:prstGeom prst="rect">
-            <a:avLst/>
-          </a:prstGeom>
-        </p:spPr>
-        <p:txBody>
-          <a:bodyPr vert="horz" lIns="0" tIns="45720" rIns="0" bIns="45720" rtlCol="0" anchor="t">
-            <a:noAutofit/>
-          </a:bodyPr>
-          <a:lstStyle>
-            <a:lvl1pPr algn="ctr" defTabSz="685783" rtl="0" eaLnBrk="1" latinLnBrk="0" hangingPunct="1">
-              <a:lnSpc>
-                <a:spcPct val="90000"/>
-              </a:lnSpc>
-              <a:spcBef>
-                <a:spcPct val="0"/>
-              </a:spcBef>
-              <a:buNone/>
-              <a:defRPr sz="2400" b="1" kern="1200">
-                <a:solidFill>
-                  <a:schemeClr val="tx2"/>
-                </a:solidFill>
-                <a:latin typeface="+mj-lt"/>
-                <a:ea typeface="+mj-ea"/>
-                <a:cs typeface="+mj-cs"/>
-              </a:defRPr>
-            </a:lvl1pPr>
-          </a:lstStyle>
-          <a:p>
-            <a:pPr algn="l"/>
-            <a:r>
-              <a:rPr lang="en-US" altLang="zh-TW" sz="1800" dirty="0">
-                <a:solidFill>
-                  <a:srgbClr val="0000FF"/>
-                </a:solidFill>
-              </a:rPr>
-              <a:t>1.</a:t>
-            </a:r>
-            <a:r>
-              <a:rPr lang="zh-TW" altLang="en-US" sz="1800" dirty="0">
-                <a:solidFill>
-                  <a:srgbClr val="0000FF"/>
-                </a:solidFill>
-              </a:rPr>
-              <a:t>庫存查詢</a:t>
-            </a:r>
-          </a:p>
-        </p:txBody>
-      </p:sp>
-      <p:sp>
-        <p:nvSpPr>
-          <p:cNvPr id="22" name="標題 2">
-            <a:extLst>
-              <a:ext uri="{FF2B5EF4-FFF2-40B4-BE49-F238E27FC236}">
-                <a16:creationId xmlns:a16="http://schemas.microsoft.com/office/drawing/2014/main" id="{F4FEE48A-F7EC-3CCD-4683-59A177514EE8}"/>
-              </a:ext>
-            </a:extLst>
-          </p:cNvPr>
-          <p:cNvSpPr txBox="1">
-            <a:spLocks/>
-          </p:cNvSpPr>
-          <p:nvPr/>
-        </p:nvSpPr>
-        <p:spPr>
-          <a:xfrm>
-            <a:off x="537039" y="1661952"/>
-            <a:ext cx="9192749" cy="1005790"/>
-          </a:xfrm>
-          <a:prstGeom prst="rect">
-            <a:avLst/>
-          </a:prstGeom>
-        </p:spPr>
-        <p:txBody>
-          <a:bodyPr vert="horz" lIns="0" tIns="45720" rIns="0" bIns="45720" rtlCol="0" anchor="t">
-            <a:noAutofit/>
-          </a:bodyPr>
-          <a:lstStyle>
-            <a:lvl1pPr algn="ctr" defTabSz="685783" rtl="0" eaLnBrk="1" latinLnBrk="0" hangingPunct="1">
-              <a:lnSpc>
-                <a:spcPct val="90000"/>
-              </a:lnSpc>
-              <a:spcBef>
-                <a:spcPct val="0"/>
-              </a:spcBef>
-              <a:buNone/>
-              <a:defRPr sz="2400" b="1" kern="1200">
-                <a:solidFill>
-                  <a:schemeClr val="tx2"/>
-                </a:solidFill>
-                <a:latin typeface="+mj-lt"/>
-                <a:ea typeface="+mj-ea"/>
-                <a:cs typeface="+mj-cs"/>
-              </a:defRPr>
-            </a:lvl1pPr>
-          </a:lstStyle>
-          <a:p>
-            <a:pPr marL="342900" indent="-342900" algn="l">
-              <a:buAutoNum type="arabicPeriod"/>
-            </a:pPr>
-            <a:r>
-              <a:rPr lang="zh-TW" altLang="en-US" sz="1800" dirty="0">
-                <a:solidFill>
-                  <a:srgbClr val="002060"/>
-                </a:solidFill>
-              </a:rPr>
-              <a:t>輸入關鍵字按查詢可搜尋物料名稱、規格</a:t>
-            </a:r>
-            <a:r>
-              <a:rPr lang="en-US" altLang="zh-TW" sz="1800" dirty="0">
-                <a:solidFill>
-                  <a:srgbClr val="002060"/>
-                </a:solidFill>
-              </a:rPr>
-              <a:t>/</a:t>
-            </a:r>
-            <a:r>
-              <a:rPr lang="zh-TW" altLang="en-US" sz="1800" dirty="0">
-                <a:solidFill>
-                  <a:srgbClr val="002060"/>
-                </a:solidFill>
-              </a:rPr>
-              <a:t>型號、料號。</a:t>
-            </a:r>
-            <a:endParaRPr lang="en-US" altLang="zh-TW" sz="1800" dirty="0">
-              <a:solidFill>
-                <a:srgbClr val="002060"/>
-              </a:solidFill>
-            </a:endParaRPr>
-          </a:p>
-          <a:p>
-            <a:pPr marL="342900" indent="-342900" algn="l">
-              <a:buAutoNum type="arabicPeriod"/>
-            </a:pPr>
-            <a:r>
-              <a:rPr lang="zh-TW" altLang="en-US" sz="1800" dirty="0">
-                <a:solidFill>
-                  <a:srgbClr val="002060"/>
-                </a:solidFill>
-              </a:rPr>
-              <a:t>按顯示全部可以顯示所有庫存</a:t>
-            </a:r>
-            <a:endParaRPr lang="en-US" altLang="zh-TW" sz="1800" dirty="0">
-              <a:solidFill>
-                <a:srgbClr val="002060"/>
-              </a:solidFill>
-            </a:endParaRPr>
-          </a:p>
-        </p:txBody>
-      </p:sp>
-      <p:sp>
-        <p:nvSpPr>
-          <p:cNvPr id="2" name="標題 2">
-            <a:extLst>
-              <a:ext uri="{FF2B5EF4-FFF2-40B4-BE49-F238E27FC236}">
-                <a16:creationId xmlns:a16="http://schemas.microsoft.com/office/drawing/2014/main" id="{4289CD50-EC92-01C2-856A-A0B1D73CC3CA}"/>
-              </a:ext>
-            </a:extLst>
-          </p:cNvPr>
-          <p:cNvSpPr txBox="1">
-            <a:spLocks/>
-          </p:cNvSpPr>
-          <p:nvPr/>
-        </p:nvSpPr>
-        <p:spPr>
-          <a:xfrm>
-            <a:off x="537039" y="546476"/>
-            <a:ext cx="11162053" cy="1005790"/>
-          </a:xfrm>
-          <a:prstGeom prst="rect">
-            <a:avLst/>
-          </a:prstGeom>
-        </p:spPr>
-        <p:txBody>
-          <a:bodyPr vert="horz" lIns="0" tIns="45720" rIns="0" bIns="45720" rtlCol="0" anchor="t">
-            <a:noAutofit/>
-          </a:bodyPr>
-          <a:lstStyle>
-            <a:lvl1pPr algn="ctr" defTabSz="685783" rtl="0" eaLnBrk="1" latinLnBrk="0" hangingPunct="1">
-              <a:lnSpc>
-                <a:spcPct val="90000"/>
-              </a:lnSpc>
-              <a:spcBef>
-                <a:spcPct val="0"/>
-              </a:spcBef>
-              <a:buNone/>
-              <a:defRPr sz="2400" b="1" kern="1200">
-                <a:solidFill>
-                  <a:schemeClr val="tx2"/>
-                </a:solidFill>
-                <a:latin typeface="+mj-lt"/>
-                <a:ea typeface="+mj-ea"/>
-                <a:cs typeface="+mj-cs"/>
-              </a:defRPr>
-            </a:lvl1pPr>
-          </a:lstStyle>
-          <a:p>
-            <a:pPr marL="285750" indent="-285750" algn="l">
-              <a:buFont typeface="Wingdings" panose="05000000000000000000" pitchFamily="2" charset="2"/>
-              <a:buChar char="u"/>
-            </a:pPr>
-            <a:r>
-              <a:rPr lang="zh-TW" altLang="en-US" sz="1800" dirty="0">
-                <a:solidFill>
-                  <a:srgbClr val="002060"/>
-                </a:solidFill>
-              </a:rPr>
-              <a:t>用來查詢庫存清單。</a:t>
-            </a:r>
-            <a:endParaRPr lang="en-US" altLang="zh-TW" sz="1800" dirty="0">
-              <a:solidFill>
-                <a:srgbClr val="002060"/>
-              </a:solidFill>
-            </a:endParaRPr>
-          </a:p>
-        </p:txBody>
-      </p:sp>
-      <p:pic>
-        <p:nvPicPr>
-          <p:cNvPr id="5" name="圖片 4" descr="The image shows a table with columns for 'Name', 'Item Code', 'Bin', and 'Stock', listing various items and their stock levels in a warehouse.&#10;&#10;AI 產生的內容可能不正確。">
-            <a:extLst>
-              <a:ext uri="{FF2B5EF4-FFF2-40B4-BE49-F238E27FC236}">
-                <a16:creationId xmlns:a16="http://schemas.microsoft.com/office/drawing/2014/main" id="{92721348-8969-D585-4669-836EBA713953}"/>
-              </a:ext>
-            </a:extLst>
-          </p:cNvPr>
-          <p:cNvPicPr>
-            <a:picLocks noChangeAspect="1"/>
-          </p:cNvPicPr>
-          <p:nvPr/>
-        </p:nvPicPr>
-        <p:blipFill>
-          <a:blip r:embed="rId3"/>
-          <a:stretch>
-            <a:fillRect/>
-          </a:stretch>
-        </p:blipFill>
-        <p:spPr>
-          <a:xfrm>
-            <a:off x="319892" y="3248533"/>
-            <a:ext cx="11401425" cy="2828925"/>
+            <a:off x="5729271" y="2102177"/>
+            <a:ext cx="6363034" cy="3824194"/>
           </a:xfrm>
           <a:prstGeom prst="rect">
             <a:avLst/>
@@ -12109,10 +15308,10 @@
       </p:pic>
       <p:grpSp>
         <p:nvGrpSpPr>
-          <p:cNvPr id="6" name="群組 5">
+          <p:cNvPr id="7" name="群組 6">
             <a:extLst>
               <a:ext uri="{FF2B5EF4-FFF2-40B4-BE49-F238E27FC236}">
-                <a16:creationId xmlns:a16="http://schemas.microsoft.com/office/drawing/2014/main" id="{CE215241-EEC4-8622-786C-235339509618}"/>
+                <a16:creationId xmlns:a16="http://schemas.microsoft.com/office/drawing/2014/main" id="{1212DD35-BEC5-17C6-9ED9-A43E26D98FC6}"/>
               </a:ext>
             </a:extLst>
           </p:cNvPr>
@@ -12121,8 +15320,8 @@
         </p:nvGrpSpPr>
         <p:grpSpPr>
           <a:xfrm>
-            <a:off x="470683" y="3596088"/>
-            <a:ext cx="5051228" cy="767921"/>
+            <a:off x="5886827" y="2352562"/>
+            <a:ext cx="1620613" cy="664015"/>
             <a:chOff x="7688062" y="4473437"/>
             <a:chExt cx="2041726" cy="711122"/>
           </a:xfrm>
@@ -12132,7 +15331,7 @@
             <p:cNvPr id="8" name="矩形 7">
               <a:extLst>
                 <a:ext uri="{FF2B5EF4-FFF2-40B4-BE49-F238E27FC236}">
-                  <a16:creationId xmlns:a16="http://schemas.microsoft.com/office/drawing/2014/main" id="{77569B9B-F6B6-65C1-8F27-66905B080C28}"/>
+                  <a16:creationId xmlns:a16="http://schemas.microsoft.com/office/drawing/2014/main" id="{7320A1F7-923D-29C5-14A3-E831F05F4582}"/>
                 </a:ext>
               </a:extLst>
             </p:cNvPr>
@@ -12184,7 +15383,7 @@
             <p:cNvPr id="9" name="文字方塊 8">
               <a:extLst>
                 <a:ext uri="{FF2B5EF4-FFF2-40B4-BE49-F238E27FC236}">
-                  <a16:creationId xmlns:a16="http://schemas.microsoft.com/office/drawing/2014/main" id="{682DB426-07CB-8C72-8DED-A2A98203AF8C}"/>
+                  <a16:creationId xmlns:a16="http://schemas.microsoft.com/office/drawing/2014/main" id="{7CEBD8D0-98C0-8011-C44F-2E3DB56614C4}"/>
                 </a:ext>
               </a:extLst>
             </p:cNvPr>
@@ -12229,7 +15428,7 @@
           <p:cNvPr id="10" name="群組 9">
             <a:extLst>
               <a:ext uri="{FF2B5EF4-FFF2-40B4-BE49-F238E27FC236}">
-                <a16:creationId xmlns:a16="http://schemas.microsoft.com/office/drawing/2014/main" id="{32F369C7-05F9-7B5B-C9B5-94215FE304DB}"/>
+                <a16:creationId xmlns:a16="http://schemas.microsoft.com/office/drawing/2014/main" id="{87EE98CB-6FE5-0138-BAF7-D2DD37F16ADE}"/>
               </a:ext>
             </a:extLst>
           </p:cNvPr>
@@ -12238,10 +15437,10 @@
         </p:nvGrpSpPr>
         <p:grpSpPr>
           <a:xfrm>
-            <a:off x="5606267" y="3607905"/>
-            <a:ext cx="1737383" cy="767921"/>
+            <a:off x="7519644" y="2352562"/>
+            <a:ext cx="1685151" cy="664015"/>
             <a:chOff x="7688062" y="4473437"/>
-            <a:chExt cx="2108579" cy="711122"/>
+            <a:chExt cx="2123034" cy="711122"/>
           </a:xfrm>
         </p:grpSpPr>
         <p:sp>
@@ -12249,7 +15448,7 @@
             <p:cNvPr id="11" name="矩形 10">
               <a:extLst>
                 <a:ext uri="{FF2B5EF4-FFF2-40B4-BE49-F238E27FC236}">
-                  <a16:creationId xmlns:a16="http://schemas.microsoft.com/office/drawing/2014/main" id="{1DCEEAA0-3D59-C6F2-544B-468C29669FDD}"/>
+                  <a16:creationId xmlns:a16="http://schemas.microsoft.com/office/drawing/2014/main" id="{B0CB904D-92EE-6E74-2063-80B4A0BA5703}"/>
                 </a:ext>
               </a:extLst>
             </p:cNvPr>
@@ -12301,7 +15500,7 @@
             <p:cNvPr id="12" name="文字方塊 11">
               <a:extLst>
                 <a:ext uri="{FF2B5EF4-FFF2-40B4-BE49-F238E27FC236}">
-                  <a16:creationId xmlns:a16="http://schemas.microsoft.com/office/drawing/2014/main" id="{11951813-B9EF-D7FD-B2C3-510394065010}"/>
+                  <a16:creationId xmlns:a16="http://schemas.microsoft.com/office/drawing/2014/main" id="{8EC89D72-D5F4-2366-E2C3-77F01BB3F798}"/>
                 </a:ext>
               </a:extLst>
             </p:cNvPr>
@@ -12311,7 +15510,7 @@
           <p:spPr>
             <a:xfrm>
               <a:off x="9416882" y="4473437"/>
-              <a:ext cx="379759" cy="342014"/>
+              <a:ext cx="394214" cy="395533"/>
             </a:xfrm>
             <a:prstGeom prst="rect">
               <a:avLst/>
@@ -12344,477 +15543,7 @@
     </p:spTree>
     <p:extLst>
       <p:ext uri="{BB962C8B-B14F-4D97-AF65-F5344CB8AC3E}">
-        <p14:creationId xmlns:p14="http://schemas.microsoft.com/office/powerpoint/2010/main" val="3848321853"/>
-      </p:ext>
-    </p:extLst>
-  </p:cSld>
-  <p:clrMapOvr>
-    <a:masterClrMapping/>
-  </p:clrMapOvr>
-</p:sld>
-</file>
-
-<file path=ppt/slides/slide9.xml><?xml version="1.0" encoding="utf-8"?>
-<p:sld xmlns:a="http://schemas.openxmlformats.org/drawingml/2006/main" xmlns:r="http://schemas.openxmlformats.org/officeDocument/2006/relationships" xmlns:p="http://schemas.openxmlformats.org/presentationml/2006/main">
-  <p:cSld>
-    <p:spTree>
-      <p:nvGrpSpPr>
-        <p:cNvPr id="1" name="">
-          <a:extLst>
-            <a:ext uri="{FF2B5EF4-FFF2-40B4-BE49-F238E27FC236}">
-              <a16:creationId xmlns:a16="http://schemas.microsoft.com/office/drawing/2014/main" id="{58E51442-6BD6-C6F0-1F69-EC6F14626D62}"/>
-            </a:ext>
-          </a:extLst>
-        </p:cNvPr>
-        <p:cNvGrpSpPr/>
-        <p:nvPr/>
-      </p:nvGrpSpPr>
-      <p:grpSpPr>
-        <a:xfrm>
-          <a:off x="0" y="0"/>
-          <a:ext cx="0" cy="0"/>
-          <a:chOff x="0" y="0"/>
-          <a:chExt cx="0" cy="0"/>
-        </a:xfrm>
-      </p:grpSpPr>
-      <p:sp>
-        <p:nvSpPr>
-          <p:cNvPr id="3" name="標題 2">
-            <a:extLst>
-              <a:ext uri="{FF2B5EF4-FFF2-40B4-BE49-F238E27FC236}">
-                <a16:creationId xmlns:a16="http://schemas.microsoft.com/office/drawing/2014/main" id="{F0EA1FF4-D808-25AD-DB91-0D15317D4E6F}"/>
-              </a:ext>
-            </a:extLst>
-          </p:cNvPr>
-          <p:cNvSpPr>
-            <a:spLocks noGrp="1"/>
-          </p:cNvSpPr>
-          <p:nvPr>
-            <p:ph type="title"/>
-          </p:nvPr>
-        </p:nvSpPr>
-        <p:spPr>
-          <a:xfrm>
-            <a:off x="319892" y="107816"/>
-            <a:ext cx="11379200" cy="461659"/>
-          </a:xfrm>
-        </p:spPr>
-        <p:txBody>
-          <a:bodyPr>
-            <a:noAutofit/>
-          </a:bodyPr>
-          <a:lstStyle/>
-          <a:p>
-            <a:r>
-              <a:rPr lang="zh-TW" altLang="en-US" sz="2800" dirty="0"/>
-              <a:t>低安全庫存監控 </a:t>
-            </a:r>
-            <a:r>
-              <a:rPr lang="en-US" altLang="zh-TW" sz="2800" dirty="0"/>
-              <a:t>(Low Safety Stock Monitoring)</a:t>
-            </a:r>
-          </a:p>
-        </p:txBody>
-      </p:sp>
-      <p:sp>
-        <p:nvSpPr>
-          <p:cNvPr id="53" name="標題 2">
-            <a:extLst>
-              <a:ext uri="{FF2B5EF4-FFF2-40B4-BE49-F238E27FC236}">
-                <a16:creationId xmlns:a16="http://schemas.microsoft.com/office/drawing/2014/main" id="{69CA39BF-1A32-AAD9-66FB-E7B28B423FD4}"/>
-              </a:ext>
-            </a:extLst>
-          </p:cNvPr>
-          <p:cNvSpPr txBox="1">
-            <a:spLocks/>
-          </p:cNvSpPr>
-          <p:nvPr/>
-        </p:nvSpPr>
-        <p:spPr>
-          <a:xfrm>
-            <a:off x="217952" y="1200293"/>
-            <a:ext cx="5511319" cy="461659"/>
-          </a:xfrm>
-          <a:prstGeom prst="rect">
-            <a:avLst/>
-          </a:prstGeom>
-        </p:spPr>
-        <p:txBody>
-          <a:bodyPr vert="horz" lIns="0" tIns="45720" rIns="0" bIns="45720" rtlCol="0" anchor="t">
-            <a:noAutofit/>
-          </a:bodyPr>
-          <a:lstStyle>
-            <a:lvl1pPr algn="ctr" defTabSz="685783" rtl="0" eaLnBrk="1" latinLnBrk="0" hangingPunct="1">
-              <a:lnSpc>
-                <a:spcPct val="90000"/>
-              </a:lnSpc>
-              <a:spcBef>
-                <a:spcPct val="0"/>
-              </a:spcBef>
-              <a:buNone/>
-              <a:defRPr sz="2400" b="1" kern="1200">
-                <a:solidFill>
-                  <a:schemeClr val="tx2"/>
-                </a:solidFill>
-                <a:latin typeface="+mj-lt"/>
-                <a:ea typeface="+mj-ea"/>
-                <a:cs typeface="+mj-cs"/>
-              </a:defRPr>
-            </a:lvl1pPr>
-          </a:lstStyle>
-          <a:p>
-            <a:pPr algn="l"/>
-            <a:r>
-              <a:rPr lang="en-US" altLang="zh-TW" sz="1800" dirty="0">
-                <a:solidFill>
-                  <a:srgbClr val="0000FF"/>
-                </a:solidFill>
-              </a:rPr>
-              <a:t>1.</a:t>
-            </a:r>
-            <a:r>
-              <a:rPr lang="zh-TW" altLang="en-US" sz="1800" dirty="0">
-                <a:solidFill>
-                  <a:srgbClr val="0000FF"/>
-                </a:solidFill>
-              </a:rPr>
-              <a:t>低安全庫存警報</a:t>
-            </a:r>
-          </a:p>
-        </p:txBody>
-      </p:sp>
-      <p:sp>
-        <p:nvSpPr>
-          <p:cNvPr id="22" name="標題 2">
-            <a:extLst>
-              <a:ext uri="{FF2B5EF4-FFF2-40B4-BE49-F238E27FC236}">
-                <a16:creationId xmlns:a16="http://schemas.microsoft.com/office/drawing/2014/main" id="{883D75F4-F8CB-CCBB-9215-C21AF251BD35}"/>
-              </a:ext>
-            </a:extLst>
-          </p:cNvPr>
-          <p:cNvSpPr txBox="1">
-            <a:spLocks/>
-          </p:cNvSpPr>
-          <p:nvPr/>
-        </p:nvSpPr>
-        <p:spPr>
-          <a:xfrm>
-            <a:off x="537039" y="1661952"/>
-            <a:ext cx="9192749" cy="1005790"/>
-          </a:xfrm>
-          <a:prstGeom prst="rect">
-            <a:avLst/>
-          </a:prstGeom>
-        </p:spPr>
-        <p:txBody>
-          <a:bodyPr vert="horz" lIns="0" tIns="45720" rIns="0" bIns="45720" rtlCol="0" anchor="t">
-            <a:noAutofit/>
-          </a:bodyPr>
-          <a:lstStyle>
-            <a:lvl1pPr algn="ctr" defTabSz="685783" rtl="0" eaLnBrk="1" latinLnBrk="0" hangingPunct="1">
-              <a:lnSpc>
-                <a:spcPct val="90000"/>
-              </a:lnSpc>
-              <a:spcBef>
-                <a:spcPct val="0"/>
-              </a:spcBef>
-              <a:buNone/>
-              <a:defRPr sz="2400" b="1" kern="1200">
-                <a:solidFill>
-                  <a:schemeClr val="tx2"/>
-                </a:solidFill>
-                <a:latin typeface="+mj-lt"/>
-                <a:ea typeface="+mj-ea"/>
-                <a:cs typeface="+mj-cs"/>
-              </a:defRPr>
-            </a:lvl1pPr>
-          </a:lstStyle>
-          <a:p>
-            <a:pPr marL="285750" indent="-285750" algn="l">
-              <a:buFont typeface="Wingdings" panose="05000000000000000000" pitchFamily="2" charset="2"/>
-              <a:buChar char="u"/>
-            </a:pPr>
-            <a:r>
-              <a:rPr lang="zh-TW" altLang="en-US" sz="1800" dirty="0">
-                <a:solidFill>
-                  <a:srgbClr val="002060"/>
-                </a:solidFill>
-              </a:rPr>
-              <a:t>領料後若剩餘庫存低於安全庫存則會發出警報。</a:t>
-            </a:r>
-            <a:endParaRPr lang="en-US" altLang="zh-TW" sz="1800" dirty="0">
-              <a:solidFill>
-                <a:srgbClr val="002060"/>
-              </a:solidFill>
-            </a:endParaRPr>
-          </a:p>
-        </p:txBody>
-      </p:sp>
-      <p:sp>
-        <p:nvSpPr>
-          <p:cNvPr id="35" name="標題 2">
-            <a:extLst>
-              <a:ext uri="{FF2B5EF4-FFF2-40B4-BE49-F238E27FC236}">
-                <a16:creationId xmlns:a16="http://schemas.microsoft.com/office/drawing/2014/main" id="{414A5CC3-D0FF-379E-B150-99D2AAA1AA1B}"/>
-              </a:ext>
-            </a:extLst>
-          </p:cNvPr>
-          <p:cNvSpPr txBox="1">
-            <a:spLocks/>
-          </p:cNvSpPr>
-          <p:nvPr/>
-        </p:nvSpPr>
-        <p:spPr>
-          <a:xfrm>
-            <a:off x="217952" y="2799753"/>
-            <a:ext cx="5511319" cy="461659"/>
-          </a:xfrm>
-          <a:prstGeom prst="rect">
-            <a:avLst/>
-          </a:prstGeom>
-        </p:spPr>
-        <p:txBody>
-          <a:bodyPr vert="horz" lIns="0" tIns="45720" rIns="0" bIns="45720" rtlCol="0" anchor="t">
-            <a:noAutofit/>
-          </a:bodyPr>
-          <a:lstStyle>
-            <a:lvl1pPr algn="ctr" defTabSz="685783" rtl="0" eaLnBrk="1" latinLnBrk="0" hangingPunct="1">
-              <a:lnSpc>
-                <a:spcPct val="90000"/>
-              </a:lnSpc>
-              <a:spcBef>
-                <a:spcPct val="0"/>
-              </a:spcBef>
-              <a:buNone/>
-              <a:defRPr sz="2400" b="1" kern="1200">
-                <a:solidFill>
-                  <a:schemeClr val="tx2"/>
-                </a:solidFill>
-                <a:latin typeface="+mj-lt"/>
-                <a:ea typeface="+mj-ea"/>
-                <a:cs typeface="+mj-cs"/>
-              </a:defRPr>
-            </a:lvl1pPr>
-          </a:lstStyle>
-          <a:p>
-            <a:pPr algn="l"/>
-            <a:r>
-              <a:rPr lang="en-US" altLang="zh-TW" sz="1800" dirty="0">
-                <a:solidFill>
-                  <a:srgbClr val="0000FF"/>
-                </a:solidFill>
-              </a:rPr>
-              <a:t>2.</a:t>
-            </a:r>
-            <a:r>
-              <a:rPr lang="zh-TW" altLang="en-US" sz="1800" dirty="0">
-                <a:solidFill>
-                  <a:srgbClr val="0000FF"/>
-                </a:solidFill>
-              </a:rPr>
-              <a:t>全廠低安全庫存看板</a:t>
-            </a:r>
-          </a:p>
-        </p:txBody>
-      </p:sp>
-      <p:sp>
-        <p:nvSpPr>
-          <p:cNvPr id="43" name="標題 2">
-            <a:extLst>
-              <a:ext uri="{FF2B5EF4-FFF2-40B4-BE49-F238E27FC236}">
-                <a16:creationId xmlns:a16="http://schemas.microsoft.com/office/drawing/2014/main" id="{BE249722-073E-AC22-8A27-BD6475EB42BE}"/>
-              </a:ext>
-            </a:extLst>
-          </p:cNvPr>
-          <p:cNvSpPr txBox="1">
-            <a:spLocks/>
-          </p:cNvSpPr>
-          <p:nvPr/>
-        </p:nvSpPr>
-        <p:spPr>
-          <a:xfrm>
-            <a:off x="537039" y="3261412"/>
-            <a:ext cx="9192749" cy="1005790"/>
-          </a:xfrm>
-          <a:prstGeom prst="rect">
-            <a:avLst/>
-          </a:prstGeom>
-        </p:spPr>
-        <p:txBody>
-          <a:bodyPr vert="horz" lIns="0" tIns="45720" rIns="0" bIns="45720" rtlCol="0" anchor="t">
-            <a:noAutofit/>
-          </a:bodyPr>
-          <a:lstStyle>
-            <a:lvl1pPr algn="ctr" defTabSz="685783" rtl="0" eaLnBrk="1" latinLnBrk="0" hangingPunct="1">
-              <a:lnSpc>
-                <a:spcPct val="90000"/>
-              </a:lnSpc>
-              <a:spcBef>
-                <a:spcPct val="0"/>
-              </a:spcBef>
-              <a:buNone/>
-              <a:defRPr sz="2400" b="1" kern="1200">
-                <a:solidFill>
-                  <a:schemeClr val="tx2"/>
-                </a:solidFill>
-                <a:latin typeface="+mj-lt"/>
-                <a:ea typeface="+mj-ea"/>
-                <a:cs typeface="+mj-cs"/>
-              </a:defRPr>
-            </a:lvl1pPr>
-          </a:lstStyle>
-          <a:p>
-            <a:pPr marL="285750" indent="-285750" algn="l">
-              <a:buFont typeface="Wingdings" panose="05000000000000000000" pitchFamily="2" charset="2"/>
-              <a:buChar char="u"/>
-            </a:pPr>
-            <a:r>
-              <a:rPr lang="zh-TW" altLang="en-US" sz="1800" dirty="0">
-                <a:solidFill>
-                  <a:srgbClr val="002060"/>
-                </a:solidFill>
-              </a:rPr>
-              <a:t>打開可看到所有目前庫存低於安全庫存的物料。</a:t>
-            </a:r>
-            <a:endParaRPr lang="en-US" altLang="zh-TW" sz="1800" dirty="0">
-              <a:solidFill>
-                <a:srgbClr val="002060"/>
-              </a:solidFill>
-            </a:endParaRPr>
-          </a:p>
-        </p:txBody>
-      </p:sp>
-      <p:sp>
-        <p:nvSpPr>
-          <p:cNvPr id="2" name="標題 2">
-            <a:extLst>
-              <a:ext uri="{FF2B5EF4-FFF2-40B4-BE49-F238E27FC236}">
-                <a16:creationId xmlns:a16="http://schemas.microsoft.com/office/drawing/2014/main" id="{95F584EF-6D8A-328D-8364-D6A254D4972F}"/>
-              </a:ext>
-            </a:extLst>
-          </p:cNvPr>
-          <p:cNvSpPr txBox="1">
-            <a:spLocks/>
-          </p:cNvSpPr>
-          <p:nvPr/>
-        </p:nvSpPr>
-        <p:spPr>
-          <a:xfrm>
-            <a:off x="537039" y="546476"/>
-            <a:ext cx="11162053" cy="1005790"/>
-          </a:xfrm>
-          <a:prstGeom prst="rect">
-            <a:avLst/>
-          </a:prstGeom>
-        </p:spPr>
-        <p:txBody>
-          <a:bodyPr vert="horz" lIns="0" tIns="45720" rIns="0" bIns="45720" rtlCol="0" anchor="t">
-            <a:noAutofit/>
-          </a:bodyPr>
-          <a:lstStyle>
-            <a:lvl1pPr algn="ctr" defTabSz="685783" rtl="0" eaLnBrk="1" latinLnBrk="0" hangingPunct="1">
-              <a:lnSpc>
-                <a:spcPct val="90000"/>
-              </a:lnSpc>
-              <a:spcBef>
-                <a:spcPct val="0"/>
-              </a:spcBef>
-              <a:buNone/>
-              <a:defRPr sz="2400" b="1" kern="1200">
-                <a:solidFill>
-                  <a:schemeClr val="tx2"/>
-                </a:solidFill>
-                <a:latin typeface="+mj-lt"/>
-                <a:ea typeface="+mj-ea"/>
-                <a:cs typeface="+mj-cs"/>
-              </a:defRPr>
-            </a:lvl1pPr>
-          </a:lstStyle>
-          <a:p>
-            <a:pPr marL="285750" indent="-285750" algn="l">
-              <a:buFont typeface="Wingdings" panose="05000000000000000000" pitchFamily="2" charset="2"/>
-              <a:buChar char="u"/>
-            </a:pPr>
-            <a:r>
-              <a:rPr lang="zh-TW" altLang="en-US" sz="1800" dirty="0">
-                <a:solidFill>
-                  <a:srgbClr val="002060"/>
-                </a:solidFill>
-              </a:rPr>
-              <a:t>用以監控低於安全庫存的物料。</a:t>
-            </a:r>
-            <a:endParaRPr lang="en-US" altLang="zh-TW" sz="1800" dirty="0">
-              <a:solidFill>
-                <a:srgbClr val="002060"/>
-              </a:solidFill>
-            </a:endParaRPr>
-          </a:p>
-        </p:txBody>
-      </p:sp>
-      <p:pic>
-        <p:nvPicPr>
-          <p:cNvPr id="9" name="圖片 8" descr="The image shows a factory's low safety stock status table, listing item numbers, descriptions, specifications, and current and safe stock levels.&#10;&#10;AI 產生的內容可能不正確。">
-            <a:extLst>
-              <a:ext uri="{FF2B5EF4-FFF2-40B4-BE49-F238E27FC236}">
-                <a16:creationId xmlns:a16="http://schemas.microsoft.com/office/drawing/2014/main" id="{EA2A33F6-98E9-8069-3FE3-ACF655920218}"/>
-              </a:ext>
-            </a:extLst>
-          </p:cNvPr>
-          <p:cNvPicPr>
-            <a:picLocks noChangeAspect="1"/>
-          </p:cNvPicPr>
-          <p:nvPr/>
-        </p:nvPicPr>
-        <p:blipFill>
-          <a:blip r:embed="rId3"/>
-          <a:stretch>
-            <a:fillRect/>
-          </a:stretch>
-        </p:blipFill>
-        <p:spPr>
-          <a:xfrm>
-            <a:off x="319892" y="3958849"/>
-            <a:ext cx="11391900" cy="2352675"/>
-          </a:xfrm>
-          <a:prstGeom prst="rect">
-            <a:avLst/>
-          </a:prstGeom>
-        </p:spPr>
-      </p:pic>
-      <p:pic>
-        <p:nvPicPr>
-          <p:cNvPr id="11" name="圖片 10" descr="The image shows a red background with Chinese text indicating a factory's total stock has only 3 units left and reaching safe water levels, followed by an acknowledgment message.&#10;&#10;AI 產生的內容可能不正確。">
-            <a:extLst>
-              <a:ext uri="{FF2B5EF4-FFF2-40B4-BE49-F238E27FC236}">
-                <a16:creationId xmlns:a16="http://schemas.microsoft.com/office/drawing/2014/main" id="{678C1D68-5705-E580-7E50-C78B3FDF7E18}"/>
-              </a:ext>
-            </a:extLst>
-          </p:cNvPr>
-          <p:cNvPicPr>
-            <a:picLocks noChangeAspect="1"/>
-          </p:cNvPicPr>
-          <p:nvPr/>
-        </p:nvPicPr>
-        <p:blipFill>
-          <a:blip r:embed="rId4"/>
-          <a:stretch>
-            <a:fillRect/>
-          </a:stretch>
-        </p:blipFill>
-        <p:spPr>
-          <a:xfrm>
-            <a:off x="6711519" y="1008135"/>
-            <a:ext cx="3785494" cy="2520852"/>
-          </a:xfrm>
-          <a:prstGeom prst="rect">
-            <a:avLst/>
-          </a:prstGeom>
-        </p:spPr>
-      </p:pic>
-    </p:spTree>
-    <p:extLst>
-      <p:ext uri="{BB962C8B-B14F-4D97-AF65-F5344CB8AC3E}">
-        <p14:creationId xmlns:p14="http://schemas.microsoft.com/office/powerpoint/2010/main" val="3320506873"/>
+        <p14:creationId xmlns:p14="http://schemas.microsoft.com/office/powerpoint/2010/main" val="2960327121"/>
       </p:ext>
     </p:extLst>
   </p:cSld>

--- a/doc/使用說明(中文).pptx
+++ b/doc/使用說明(中文).pptx
@@ -221,7 +221,7 @@
           <a:p>
             <a:fld id="{2297D84D-3581-4C3F-BAAF-6FA71816E76E}" type="datetimeFigureOut">
               <a:rPr lang="zh-TW" altLang="en-US" smtClean="0"/>
-              <a:t>2026/3/16</a:t>
+              <a:t>2026/3/17</a:t>
             </a:fld>
             <a:endParaRPr lang="zh-TW" altLang="en-US"/>
           </a:p>
@@ -14817,8 +14817,21 @@
                   <a:srgbClr val="002060"/>
                 </a:solidFill>
               </a:rPr>
-              <a:t>檔，一個料號最多兩個附件</a:t>
-            </a:r>
+              <a:t>檔，一個料號最多兩個附件，單個檔案最大</a:t>
+            </a:r>
+            <a:r>
+              <a:rPr lang="en-US" altLang="zh-TW" sz="1800" dirty="0">
+                <a:solidFill>
+                  <a:srgbClr val="002060"/>
+                </a:solidFill>
+              </a:rPr>
+              <a:t>2MB</a:t>
+            </a:r>
+            <a:endParaRPr lang="zh-TW" altLang="en-US" sz="1800" dirty="0">
+              <a:solidFill>
+                <a:srgbClr val="002060"/>
+              </a:solidFill>
+            </a:endParaRPr>
           </a:p>
         </p:txBody>
       </p:sp>

--- a/doc/使用說明(中文).pptx
+++ b/doc/使用說明(中文).pptx
@@ -221,7 +221,7 @@
           <a:p>
             <a:fld id="{2297D84D-3581-4C3F-BAAF-6FA71816E76E}" type="datetimeFigureOut">
               <a:rPr lang="zh-TW" altLang="en-US" smtClean="0"/>
-              <a:t>2026/3/17</a:t>
+              <a:t>2026/3/19</a:t>
             </a:fld>
             <a:endParaRPr lang="zh-TW" altLang="en-US"/>
           </a:p>
@@ -8503,38 +8503,8 @@
         </p:blipFill>
         <p:spPr>
           <a:xfrm>
-            <a:off x="5005633" y="4148812"/>
+            <a:off x="5017514" y="4148812"/>
             <a:ext cx="2507084" cy="2379497"/>
-          </a:xfrm>
-          <a:prstGeom prst="rect">
-            <a:avLst/>
-          </a:prstGeom>
-        </p:spPr>
-      </p:pic>
-      <p:pic>
-        <p:nvPicPr>
-          <p:cNvPr id="8" name="圖片 7" descr="The image shows a software interface with fields for product details, including barcode, product number, product code, inventory, purchase cycle, supplier, manufacturer, initial inventory, and a section for attaching up to two PDF documents.&#10;&#10;AI 產生的內容可能不正確。">
-            <a:extLst>
-              <a:ext uri="{FF2B5EF4-FFF2-40B4-BE49-F238E27FC236}">
-                <a16:creationId xmlns:a16="http://schemas.microsoft.com/office/drawing/2014/main" id="{401EEA9F-A006-0C37-EB86-444A75DD97F2}"/>
-              </a:ext>
-            </a:extLst>
-          </p:cNvPr>
-          <p:cNvPicPr>
-            <a:picLocks noChangeAspect="1"/>
-          </p:cNvPicPr>
-          <p:nvPr/>
-        </p:nvPicPr>
-        <p:blipFill>
-          <a:blip r:embed="rId4"/>
-          <a:stretch>
-            <a:fillRect/>
-          </a:stretch>
-        </p:blipFill>
-        <p:spPr>
-          <a:xfrm>
-            <a:off x="7589538" y="1008135"/>
-            <a:ext cx="4280500" cy="5745638"/>
           </a:xfrm>
           <a:prstGeom prst="rect">
             <a:avLst/>
@@ -8675,6 +8645,36 @@
           </a:p>
         </p:txBody>
       </p:sp>
+      <p:pic>
+        <p:nvPicPr>
+          <p:cNvPr id="6" name="圖片 5" descr="The image displays a table on a computer screen, showing product details such as code, name, size, quantity, and cost, along with options to download PDF attachments.&#10;&#10;AI 產生的內容可能不正確。">
+            <a:extLst>
+              <a:ext uri="{FF2B5EF4-FFF2-40B4-BE49-F238E27FC236}">
+                <a16:creationId xmlns:a16="http://schemas.microsoft.com/office/drawing/2014/main" id="{7668A8F7-E96D-009E-2941-162976D27C4A}"/>
+              </a:ext>
+            </a:extLst>
+          </p:cNvPr>
+          <p:cNvPicPr>
+            <a:picLocks noChangeAspect="1"/>
+          </p:cNvPicPr>
+          <p:nvPr/>
+        </p:nvPicPr>
+        <p:blipFill>
+          <a:blip r:embed="rId4"/>
+          <a:stretch>
+            <a:fillRect/>
+          </a:stretch>
+        </p:blipFill>
+        <p:spPr>
+          <a:xfrm>
+            <a:off x="7684141" y="846224"/>
+            <a:ext cx="3970820" cy="5807590"/>
+          </a:xfrm>
+          <a:prstGeom prst="rect">
+            <a:avLst/>
+          </a:prstGeom>
+        </p:spPr>
+      </p:pic>
     </p:spTree>
     <p:extLst>
       <p:ext uri="{BB962C8B-B14F-4D97-AF65-F5344CB8AC3E}">
@@ -14750,6 +14750,41 @@
                   <a:srgbClr val="002060"/>
                 </a:solidFill>
               </a:rPr>
+              <a:t>金額 </a:t>
+            </a:r>
+            <a:r>
+              <a:rPr lang="en-US" altLang="zh-TW" sz="1800" dirty="0">
+                <a:solidFill>
+                  <a:srgbClr val="002060"/>
+                </a:solidFill>
+              </a:rPr>
+              <a:t>:</a:t>
+            </a:r>
+            <a:r>
+              <a:rPr lang="zh-TW" altLang="en-US" sz="1800" dirty="0">
+                <a:solidFill>
+                  <a:srgbClr val="002060"/>
+                </a:solidFill>
+              </a:rPr>
+              <a:t> 每單位金額</a:t>
+            </a:r>
+            <a:endParaRPr lang="en-US" altLang="zh-TW" sz="1800" dirty="0">
+              <a:solidFill>
+                <a:srgbClr val="002060"/>
+              </a:solidFill>
+            </a:endParaRPr>
+          </a:p>
+          <a:p>
+            <a:pPr marL="342900" indent="-342900" algn="l">
+              <a:buFont typeface="+mj-lt"/>
+              <a:buAutoNum type="arabicPeriod"/>
+            </a:pPr>
+            <a:r>
+              <a:rPr lang="zh-TW" altLang="en-US" sz="1800" dirty="0">
+                <a:solidFill>
+                  <a:srgbClr val="002060"/>
+                </a:solidFill>
+              </a:rPr>
               <a:t>期初在庫數量 </a:t>
             </a:r>
             <a:r>
@@ -14899,10 +14934,10 @@
       </p:sp>
       <p:pic>
         <p:nvPicPr>
-          <p:cNvPr id="5" name="圖片 4" descr="The image shows a document with fields for material details, inventory, supplier, manufacturer, initial stock, storage warehouse, and an attachment area for up to two PDFs.&#10;&#10;AI 產生的內容可能不正確。">
+          <p:cNvPr id="8" name="圖片 7" descr="The image displays a table on a computer screen, showing product details such as code, name, size, quantity, and cost, along with options to download PDF attachments.&#10;&#10;AI 產生的內容可能不正確。">
             <a:extLst>
               <a:ext uri="{FF2B5EF4-FFF2-40B4-BE49-F238E27FC236}">
-                <a16:creationId xmlns:a16="http://schemas.microsoft.com/office/drawing/2014/main" id="{613F2EB8-A068-AC25-F67E-698C40DB62A0}"/>
+                <a16:creationId xmlns:a16="http://schemas.microsoft.com/office/drawing/2014/main" id="{503F00FD-61AA-9693-C0E7-D1F85E489E70}"/>
               </a:ext>
             </a:extLst>
           </p:cNvPr>
@@ -14919,8 +14954,8 @@
         </p:blipFill>
         <p:spPr>
           <a:xfrm>
-            <a:off x="7274510" y="757233"/>
-            <a:ext cx="4380451" cy="5893378"/>
+            <a:off x="7575456" y="719090"/>
+            <a:ext cx="4123635" cy="6031093"/>
           </a:xfrm>
           <a:prstGeom prst="rect">
             <a:avLst/>
